--- a/LG_부트캠프_12기_C반_프로젝트일정_및_최종제출결과물_3팀/4.LG_부트캠프_12기_C반_결과보고서(3팀)_v1.pptx
+++ b/LG_부트캠프_12기_C반_프로젝트일정_및_최종제출결과물_3팀/4.LG_부트캠프_12기_C반_결과보고서(3팀)_v1.pptx
@@ -7027,7 +7027,7 @@
               <a:buChar char="-"/>
             </a:pPr>
             <a:r>
-              <a:rPr lang="en-US" altLang="ko-KR" sz="2000" b="1" dirty="0">
+              <a:rPr lang="en-US" altLang="ko-KR" b="1" dirty="0">
                 <a:solidFill>
                   <a:schemeClr val="tx1"/>
                 </a:solidFill>
@@ -7035,7 +7035,7 @@
               <a:t>telnet </a:t>
             </a:r>
             <a:r>
-              <a:rPr lang="ko-KR" altLang="en-US" sz="2000" b="1">
+              <a:rPr lang="ko-KR" altLang="en-US" b="1">
                 <a:solidFill>
                   <a:schemeClr val="tx1"/>
                 </a:solidFill>
@@ -7043,7 +7043,7 @@
               <a:t>끊기는 경우</a:t>
             </a:r>
             <a:r>
-              <a:rPr lang="en-US" altLang="ko-KR" sz="2000" b="1" dirty="0">
+              <a:rPr lang="en-US" altLang="ko-KR" b="1" dirty="0">
                 <a:solidFill>
                   <a:schemeClr val="tx1"/>
                 </a:solidFill>
@@ -7051,7 +7051,7 @@
               <a:t>.. </a:t>
             </a:r>
             <a:r>
-              <a:rPr lang="en-US" altLang="ko-KR" sz="2000" b="1" dirty="0" smtClean="0">
+              <a:rPr lang="en-US" altLang="ko-KR" b="1" dirty="0" smtClean="0">
                 <a:solidFill>
                   <a:schemeClr val="tx1"/>
                 </a:solidFill>
@@ -7059,7 +7059,7 @@
               <a:t>-&gt; </a:t>
             </a:r>
             <a:r>
-              <a:rPr lang="ko-KR" altLang="en-US" sz="2000" b="1" smtClean="0">
+              <a:rPr lang="ko-KR" altLang="en-US" b="1" smtClean="0">
                 <a:solidFill>
                   <a:schemeClr val="tx1"/>
                 </a:solidFill>
@@ -7067,7 +7067,7 @@
               <a:t>보드 </a:t>
             </a:r>
             <a:r>
-              <a:rPr lang="en-US" altLang="ko-KR" sz="2000" b="1" dirty="0" smtClean="0">
+              <a:rPr lang="en-US" altLang="ko-KR" b="1" dirty="0" smtClean="0">
                 <a:solidFill>
                   <a:schemeClr val="tx1"/>
                 </a:solidFill>
@@ -7075,7 +7075,7 @@
               <a:t>2,3 </a:t>
             </a:r>
             <a:r>
-              <a:rPr lang="en-US" altLang="ko-KR" sz="2000" b="1" dirty="0" err="1" smtClean="0">
+              <a:rPr lang="en-US" altLang="ko-KR" b="1" dirty="0" err="1" smtClean="0">
                 <a:solidFill>
                   <a:schemeClr val="tx1"/>
                 </a:solidFill>
@@ -7083,7 +7083,7 @@
               <a:t>Brrootfs</a:t>
             </a:r>
             <a:r>
-              <a:rPr lang="en-US" altLang="ko-KR" sz="2000" b="1" dirty="0" smtClean="0">
+              <a:rPr lang="en-US" altLang="ko-KR" b="1" dirty="0" smtClean="0">
                 <a:solidFill>
                   <a:schemeClr val="tx1"/>
                 </a:solidFill>
@@ -7091,23 +7091,15 @@
               <a:t> </a:t>
             </a:r>
             <a:r>
-              <a:rPr lang="ko-KR" altLang="en-US" sz="2000" b="1" smtClean="0">
-                <a:solidFill>
-                  <a:schemeClr val="tx1"/>
-                </a:solidFill>
-              </a:rPr>
-              <a:t>이미지 구워서 </a:t>
-            </a:r>
-            <a:r>
-              <a:rPr lang="ko-KR" altLang="en-US" sz="2000" b="1" smtClean="0">
-                <a:solidFill>
-                  <a:schemeClr val="tx1"/>
-                </a:solidFill>
-              </a:rPr>
-              <a:t>업로드</a:t>
-            </a:r>
-            <a:r>
-              <a:rPr lang="en-US" altLang="ko-KR" sz="2000" b="1" dirty="0" smtClean="0">
+              <a:rPr lang="ko-KR" altLang="en-US" b="1" smtClean="0">
+                <a:solidFill>
+                  <a:schemeClr val="tx1"/>
+                </a:solidFill>
+              </a:rPr>
+              <a:t>이미지 구워서 업로드</a:t>
+            </a:r>
+            <a:r>
+              <a:rPr lang="en-US" altLang="ko-KR" b="1" dirty="0" smtClean="0">
                 <a:solidFill>
                   <a:schemeClr val="tx1"/>
                 </a:solidFill>
@@ -7115,7 +7107,7 @@
               <a:t>(</a:t>
             </a:r>
             <a:r>
-              <a:rPr lang="ko-KR" altLang="en-US" sz="2000" b="1" smtClean="0">
+              <a:rPr lang="ko-KR" altLang="en-US" b="1" smtClean="0">
                 <a:solidFill>
                   <a:schemeClr val="tx1"/>
                 </a:solidFill>
@@ -7123,14 +7115,14 @@
               <a:t>완</a:t>
             </a:r>
             <a:r>
-              <a:rPr lang="en-US" altLang="ko-KR" sz="2000" b="1" dirty="0" smtClean="0">
+              <a:rPr lang="en-US" altLang="ko-KR" b="1" dirty="0" smtClean="0">
                 <a:solidFill>
                   <a:schemeClr val="tx1"/>
                 </a:solidFill>
               </a:rPr>
               <a:t>)</a:t>
             </a:r>
-            <a:endParaRPr lang="en-US" altLang="ko-KR" sz="2000" b="1" dirty="0">
+            <a:endParaRPr lang="en-US" altLang="ko-KR" b="1" dirty="0">
               <a:solidFill>
                 <a:schemeClr val="tx1"/>
               </a:solidFill>
@@ -7145,7 +7137,7 @@
               <a:buChar char="-"/>
             </a:pPr>
             <a:r>
-              <a:rPr lang="ko-KR" altLang="en-US" sz="2000" b="1" dirty="0" smtClean="0">
+              <a:rPr lang="ko-KR" altLang="en-US" b="1" dirty="0" smtClean="0">
                 <a:solidFill>
                   <a:schemeClr val="tx1"/>
                 </a:solidFill>
@@ -7153,7 +7145,7 @@
               <a:t>참가자가 </a:t>
             </a:r>
             <a:r>
-              <a:rPr lang="ko-KR" altLang="en-US" sz="2000" b="1" dirty="0">
+              <a:rPr lang="ko-KR" altLang="en-US" b="1" dirty="0">
                 <a:solidFill>
                   <a:schemeClr val="tx1"/>
                 </a:solidFill>
@@ -7161,7 +7153,7 @@
               <a:t>자기의 화면을 알 수 있도록 </a:t>
             </a:r>
             <a:r>
-              <a:rPr lang="ko-KR" altLang="en-US" sz="2000" b="1" dirty="0" smtClean="0">
+              <a:rPr lang="ko-KR" altLang="en-US" b="1" dirty="0" smtClean="0">
                 <a:solidFill>
                   <a:schemeClr val="tx1"/>
                 </a:solidFill>
@@ -7169,7 +7161,7 @@
               <a:t>표시</a:t>
             </a:r>
             <a:r>
-              <a:rPr lang="en-US" altLang="ko-KR" sz="2000" b="1" dirty="0" smtClean="0">
+              <a:rPr lang="en-US" altLang="ko-KR" b="1" dirty="0" smtClean="0">
                 <a:solidFill>
                   <a:schemeClr val="tx1"/>
                 </a:solidFill>
@@ -7177,7 +7169,7 @@
               <a:t>(</a:t>
             </a:r>
             <a:r>
-              <a:rPr lang="ko-KR" altLang="en-US" sz="2000" b="1" smtClean="0">
+              <a:rPr lang="ko-KR" altLang="en-US" b="1" smtClean="0">
                 <a:solidFill>
                   <a:schemeClr val="tx1"/>
                 </a:solidFill>
@@ -7185,7 +7177,7 @@
               <a:t>완</a:t>
             </a:r>
             <a:r>
-              <a:rPr lang="en-US" altLang="ko-KR" sz="2000" b="1" dirty="0" smtClean="0">
+              <a:rPr lang="en-US" altLang="ko-KR" b="1" dirty="0" smtClean="0">
                 <a:solidFill>
                   <a:schemeClr val="tx1"/>
                 </a:solidFill>
@@ -7202,7 +7194,7 @@
               <a:buChar char="-"/>
             </a:pPr>
             <a:r>
-              <a:rPr lang="ko-KR" altLang="en-US" sz="2000" b="1" dirty="0">
+              <a:rPr lang="ko-KR" altLang="en-US" b="1" dirty="0">
                 <a:solidFill>
                   <a:schemeClr val="tx1"/>
                 </a:solidFill>
@@ -7210,7 +7202,7 @@
               <a:t>화면 터치 펜 찾아보기</a:t>
             </a:r>
             <a:r>
-              <a:rPr lang="en-US" altLang="ko-KR" sz="2000" b="1" dirty="0">
+              <a:rPr lang="en-US" altLang="ko-KR" b="1" dirty="0">
                 <a:solidFill>
                   <a:schemeClr val="tx1"/>
                 </a:solidFill>
@@ -7218,7 +7210,7 @@
               <a:t> – </a:t>
             </a:r>
             <a:r>
-              <a:rPr lang="ko-KR" altLang="en-US" sz="2000" b="1">
+              <a:rPr lang="ko-KR" altLang="en-US" b="1">
                 <a:solidFill>
                   <a:schemeClr val="tx1"/>
                 </a:solidFill>
@@ -7226,7 +7218,7 @@
               <a:t>다이소 디스크 펜 </a:t>
             </a:r>
             <a:r>
-              <a:rPr lang="en-US" altLang="ko-KR" sz="2000" b="1" dirty="0">
+              <a:rPr lang="en-US" altLang="ko-KR" b="1" dirty="0">
                 <a:solidFill>
                   <a:schemeClr val="tx1"/>
                 </a:solidFill>
@@ -7234,7 +7226,7 @@
               <a:t>1000</a:t>
             </a:r>
             <a:r>
-              <a:rPr lang="ko-KR" altLang="en-US" sz="2000" b="1">
+              <a:rPr lang="ko-KR" altLang="en-US" b="1">
                 <a:solidFill>
                   <a:schemeClr val="tx1"/>
                 </a:solidFill>
@@ -7242,7 +7234,7 @@
               <a:t>원짜리 </a:t>
             </a:r>
             <a:r>
-              <a:rPr lang="en-US" altLang="ko-KR" sz="2000" b="1" dirty="0">
+              <a:rPr lang="en-US" altLang="ko-KR" b="1" dirty="0">
                 <a:solidFill>
                   <a:schemeClr val="tx1"/>
                 </a:solidFill>
@@ -7250,7 +7242,7 @@
               <a:t>(</a:t>
             </a:r>
             <a:r>
-              <a:rPr lang="ko-KR" altLang="en-US" sz="2000" b="1">
+              <a:rPr lang="ko-KR" altLang="en-US" b="1">
                 <a:solidFill>
                   <a:schemeClr val="tx1"/>
                 </a:solidFill>
@@ -7258,7 +7250,7 @@
               <a:t>완</a:t>
             </a:r>
             <a:r>
-              <a:rPr lang="en-US" altLang="ko-KR" sz="2000" b="1" dirty="0" smtClean="0">
+              <a:rPr lang="en-US" altLang="ko-KR" b="1" dirty="0" smtClean="0">
                 <a:solidFill>
                   <a:schemeClr val="tx1"/>
                 </a:solidFill>
@@ -7275,7 +7267,7 @@
               <a:buChar char="-"/>
             </a:pPr>
             <a:r>
-              <a:rPr lang="ko-KR" altLang="en-US" sz="2000" b="1" dirty="0">
+              <a:rPr lang="ko-KR" altLang="en-US" b="1" dirty="0">
                 <a:solidFill>
                   <a:schemeClr val="tx1"/>
                 </a:solidFill>
@@ -7283,7 +7275,7 @@
               <a:t>지우개 기능</a:t>
             </a:r>
             <a:r>
-              <a:rPr lang="en-US" altLang="ko-KR" sz="2000" b="1" dirty="0">
+              <a:rPr lang="en-US" altLang="ko-KR" b="1" dirty="0">
                 <a:solidFill>
                   <a:schemeClr val="tx1"/>
                 </a:solidFill>
@@ -7291,7 +7283,7 @@
               <a:t>(</a:t>
             </a:r>
             <a:r>
-              <a:rPr lang="ko-KR" altLang="en-US" sz="2000" b="1">
+              <a:rPr lang="ko-KR" altLang="en-US" b="1">
                 <a:solidFill>
                   <a:schemeClr val="tx1"/>
                 </a:solidFill>
@@ -7299,14 +7291,14 @@
               <a:t>완</a:t>
             </a:r>
             <a:r>
-              <a:rPr lang="en-US" altLang="ko-KR" sz="2000" b="1" dirty="0">
+              <a:rPr lang="en-US" altLang="ko-KR" b="1" dirty="0">
                 <a:solidFill>
                   <a:schemeClr val="tx1"/>
                 </a:solidFill>
               </a:rPr>
               <a:t>)</a:t>
             </a:r>
-            <a:endParaRPr lang="en-US" altLang="ko-KR" sz="2000" b="1" dirty="0" smtClean="0">
+            <a:endParaRPr lang="en-US" altLang="ko-KR" b="1" dirty="0" smtClean="0">
               <a:solidFill>
                 <a:schemeClr val="tx1"/>
               </a:solidFill>
@@ -7321,14 +7313,14 @@
               <a:buChar char="-"/>
             </a:pPr>
             <a:r>
-              <a:rPr lang="ko-KR" altLang="en-US" sz="2000" b="1" dirty="0" smtClean="0">
+              <a:rPr lang="ko-KR" altLang="en-US" b="1" dirty="0" smtClean="0">
                 <a:solidFill>
                   <a:schemeClr val="tx1"/>
                 </a:solidFill>
               </a:rPr>
               <a:t>구현</a:t>
             </a:r>
-            <a:endParaRPr lang="en-US" altLang="ko-KR" sz="2000" b="1" dirty="0" smtClean="0">
+            <a:endParaRPr lang="en-US" altLang="ko-KR" b="1" dirty="0" smtClean="0">
               <a:solidFill>
                 <a:schemeClr val="tx1"/>
               </a:solidFill>
@@ -7343,7 +7335,7 @@
               <a:buChar char="-"/>
             </a:pPr>
             <a:r>
-              <a:rPr lang="en-US" altLang="ko-KR" sz="2000" b="1" dirty="0" smtClean="0">
+              <a:rPr lang="en-US" altLang="ko-KR" b="1" dirty="0" smtClean="0">
                 <a:solidFill>
                   <a:schemeClr val="tx1"/>
                 </a:solidFill>
@@ -7351,7 +7343,7 @@
               <a:t>6.12.81 </a:t>
             </a:r>
             <a:r>
-              <a:rPr lang="ko-KR" altLang="en-US" sz="2000" b="1" smtClean="0">
+              <a:rPr lang="ko-KR" altLang="en-US" b="1" smtClean="0">
                 <a:solidFill>
                   <a:schemeClr val="tx1"/>
                 </a:solidFill>
@@ -7359,7 +7351,7 @@
               <a:t>리눅스 </a:t>
             </a:r>
             <a:r>
-              <a:rPr lang="ko-KR" altLang="en-US" sz="2000" b="1" dirty="0" err="1" smtClean="0">
+              <a:rPr lang="ko-KR" altLang="en-US" b="1" dirty="0" err="1" smtClean="0">
                 <a:solidFill>
                   <a:schemeClr val="tx1"/>
                 </a:solidFill>
@@ -7367,7 +7359,7 @@
               <a:t>커널</a:t>
             </a:r>
             <a:r>
-              <a:rPr lang="ko-KR" altLang="en-US" sz="2000" b="1" dirty="0" smtClean="0">
+              <a:rPr lang="ko-KR" altLang="en-US" b="1" dirty="0" smtClean="0">
                 <a:solidFill>
                   <a:schemeClr val="tx1"/>
                 </a:solidFill>
@@ -7375,7 +7367,7 @@
               <a:t> 이미지 </a:t>
             </a:r>
             <a:r>
-              <a:rPr lang="ko-KR" altLang="en-US" sz="2000" b="1" smtClean="0">
+              <a:rPr lang="ko-KR" altLang="en-US" b="1" smtClean="0">
                 <a:solidFill>
                   <a:schemeClr val="tx1"/>
                 </a:solidFill>
@@ -7383,23 +7375,15 @@
               <a:t>보드에 업로드 </a:t>
             </a:r>
             <a:r>
-              <a:rPr lang="en-US" altLang="ko-KR" sz="2000" b="1" dirty="0" smtClean="0">
-                <a:solidFill>
-                  <a:schemeClr val="tx1"/>
-                </a:solidFill>
-              </a:rPr>
-              <a:t>– </a:t>
-            </a:r>
-            <a:r>
-              <a:rPr lang="en-US" altLang="ko-KR" sz="2000" b="1" dirty="0" smtClean="0">
-                <a:solidFill>
-                  <a:schemeClr val="tx1"/>
-                </a:solidFill>
-              </a:rPr>
-              <a:t>BGM </a:t>
-            </a:r>
-            <a:r>
-              <a:rPr lang="ko-KR" altLang="en-US" sz="2000" b="1" smtClean="0">
+              <a:rPr lang="en-US" altLang="ko-KR" b="1" dirty="0" smtClean="0">
+                <a:solidFill>
+                  <a:schemeClr val="tx1"/>
+                </a:solidFill>
+              </a:rPr>
+              <a:t>– BGM </a:t>
+            </a:r>
+            <a:r>
+              <a:rPr lang="ko-KR" altLang="en-US" b="1" smtClean="0">
                 <a:solidFill>
                   <a:schemeClr val="tx1"/>
                 </a:solidFill>
@@ -7407,18 +7391,13 @@
               <a:t>추가</a:t>
             </a:r>
             <a:r>
-              <a:rPr lang="en-US" altLang="ko-KR" sz="2000" b="1" dirty="0" smtClean="0">
+              <a:rPr lang="en-US" altLang="ko-KR" b="1" dirty="0" smtClean="0">
                 <a:solidFill>
                   <a:schemeClr val="tx1"/>
                 </a:solidFill>
               </a:rPr>
               <a:t> </a:t>
             </a:r>
-            <a:endParaRPr lang="en-US" altLang="ko-KR" sz="2000" b="1" dirty="0" smtClean="0">
-              <a:solidFill>
-                <a:schemeClr val="tx1"/>
-              </a:solidFill>
-            </a:endParaRPr>
           </a:p>
           <a:p>
             <a:pPr marL="800100" lvl="1" indent="-342900">
@@ -7429,14 +7408,14 @@
               <a:buChar char="-"/>
             </a:pPr>
             <a:r>
-              <a:rPr lang="ko-KR" altLang="en-US" sz="2000" b="1" dirty="0" smtClean="0">
+              <a:rPr lang="ko-KR" altLang="en-US" b="1" dirty="0" smtClean="0">
                 <a:solidFill>
                   <a:schemeClr val="tx1"/>
                 </a:solidFill>
               </a:rPr>
               <a:t>출제자 화면에 제시어 출력</a:t>
             </a:r>
-            <a:endParaRPr lang="en-US" altLang="ko-KR" sz="2000" b="1" dirty="0" smtClean="0">
+            <a:endParaRPr lang="en-US" altLang="ko-KR" b="1" dirty="0" smtClean="0">
               <a:solidFill>
                 <a:schemeClr val="tx1"/>
               </a:solidFill>
@@ -7451,14 +7430,14 @@
               <a:buChar char="-"/>
             </a:pPr>
             <a:r>
-              <a:rPr lang="ko-KR" altLang="en-US" sz="2000" b="1" smtClean="0">
+              <a:rPr lang="ko-KR" altLang="en-US" b="1" dirty="0" smtClean="0">
                 <a:solidFill>
                   <a:schemeClr val="tx1"/>
                 </a:solidFill>
               </a:rPr>
               <a:t>참가자 화면에도 지우개 기능</a:t>
             </a:r>
-            <a:endParaRPr lang="en-US" altLang="ko-KR" sz="2000" b="1" dirty="0" smtClean="0">
+            <a:endParaRPr lang="en-US" altLang="ko-KR" b="1" dirty="0" smtClean="0">
               <a:solidFill>
                 <a:schemeClr val="tx1"/>
               </a:solidFill>
@@ -7473,7 +7452,7 @@
               <a:buChar char="-"/>
             </a:pPr>
             <a:r>
-              <a:rPr lang="ko-KR" altLang="en-US" sz="2000" b="1" dirty="0" smtClean="0">
+              <a:rPr lang="ko-KR" altLang="en-US" b="1" dirty="0" smtClean="0">
                 <a:solidFill>
                   <a:schemeClr val="tx1"/>
                 </a:solidFill>
@@ -7481,7 +7460,7 @@
               <a:t>음악 </a:t>
             </a:r>
             <a:r>
-              <a:rPr lang="ko-KR" altLang="en-US" sz="2000" b="1" dirty="0" err="1" smtClean="0">
+              <a:rPr lang="ko-KR" altLang="en-US" b="1" dirty="0" err="1" smtClean="0">
                 <a:solidFill>
                   <a:schemeClr val="tx1"/>
                 </a:solidFill>
@@ -7489,14 +7468,14 @@
               <a:t>싱크</a:t>
             </a:r>
             <a:r>
-              <a:rPr lang="ko-KR" altLang="en-US" sz="2000" b="1" dirty="0" smtClean="0">
+              <a:rPr lang="ko-KR" altLang="en-US" b="1" dirty="0" smtClean="0">
                 <a:solidFill>
                   <a:schemeClr val="tx1"/>
                 </a:solidFill>
               </a:rPr>
               <a:t> 맞추기</a:t>
             </a:r>
-            <a:endParaRPr lang="en-US" altLang="ko-KR" sz="2000" b="1" dirty="0" smtClean="0">
+            <a:endParaRPr lang="en-US" altLang="ko-KR" b="1" dirty="0" smtClean="0">
               <a:solidFill>
                 <a:schemeClr val="tx1"/>
               </a:solidFill>
@@ -7511,7 +7490,7 @@
               <a:buChar char="-"/>
             </a:pPr>
             <a:r>
-              <a:rPr lang="ko-KR" altLang="en-US" sz="2000" b="1" dirty="0" smtClean="0">
+              <a:rPr lang="ko-KR" altLang="en-US" b="1" dirty="0" smtClean="0">
                 <a:solidFill>
                   <a:schemeClr val="tx1"/>
                 </a:solidFill>
@@ -7519,7 +7498,7 @@
               <a:t>일정 </a:t>
             </a:r>
             <a:r>
-              <a:rPr lang="ko-KR" altLang="en-US" sz="2000" b="1" dirty="0">
+              <a:rPr lang="ko-KR" altLang="en-US" b="1" dirty="0">
                 <a:solidFill>
                   <a:schemeClr val="tx1"/>
                 </a:solidFill>
@@ -7527,14 +7506,14 @@
               <a:t>시간 못 맞추면 힌트로 카테고리 </a:t>
             </a:r>
             <a:r>
-              <a:rPr lang="ko-KR" altLang="en-US" sz="2000" b="1" dirty="0" smtClean="0">
+              <a:rPr lang="ko-KR" altLang="en-US" b="1" dirty="0" smtClean="0">
                 <a:solidFill>
                   <a:schemeClr val="tx1"/>
                 </a:solidFill>
               </a:rPr>
               <a:t>출력</a:t>
             </a:r>
-            <a:endParaRPr lang="en-US" altLang="ko-KR" sz="2000" b="1" dirty="0" smtClean="0">
+            <a:endParaRPr lang="en-US" altLang="ko-KR" b="1" dirty="0" smtClean="0">
               <a:solidFill>
                 <a:schemeClr val="tx1"/>
               </a:solidFill>
@@ -7549,7 +7528,7 @@
               <a:buChar char="-"/>
             </a:pPr>
             <a:r>
-              <a:rPr lang="en-US" altLang="ko-KR" sz="2000" b="1" dirty="0" smtClean="0">
+              <a:rPr lang="en-US" altLang="ko-KR" b="1" dirty="0" smtClean="0">
                 <a:solidFill>
                   <a:schemeClr val="tx1"/>
                 </a:solidFill>
@@ -7557,7 +7536,7 @@
               <a:t>UI </a:t>
             </a:r>
             <a:r>
-              <a:rPr lang="ko-KR" altLang="en-US" sz="2000" b="1" smtClean="0">
+              <a:rPr lang="ko-KR" altLang="en-US" b="1" smtClean="0">
                 <a:solidFill>
                   <a:schemeClr val="tx1"/>
                 </a:solidFill>
@@ -7565,7 +7544,7 @@
               <a:t>화면 추가</a:t>
             </a:r>
             <a:r>
-              <a:rPr lang="en-US" altLang="ko-KR" sz="2000" b="1" dirty="0" smtClean="0">
+              <a:rPr lang="en-US" altLang="ko-KR" b="1" dirty="0" smtClean="0">
                 <a:solidFill>
                   <a:schemeClr val="tx1"/>
                 </a:solidFill>
@@ -7573,7 +7552,7 @@
               <a:t>(</a:t>
             </a:r>
             <a:r>
-              <a:rPr lang="ko-KR" altLang="en-US" sz="2000" b="1" smtClean="0">
+              <a:rPr lang="ko-KR" altLang="en-US" b="1" smtClean="0">
                 <a:solidFill>
                   <a:schemeClr val="tx1"/>
                 </a:solidFill>
@@ -7581,7 +7560,7 @@
               <a:t>게임 시작 화면</a:t>
             </a:r>
             <a:r>
-              <a:rPr lang="en-US" altLang="ko-KR" sz="2000" b="1" dirty="0" smtClean="0">
+              <a:rPr lang="en-US" altLang="ko-KR" b="1" dirty="0" smtClean="0">
                 <a:solidFill>
                   <a:schemeClr val="tx1"/>
                 </a:solidFill>
@@ -7589,7 +7568,7 @@
               <a:t>, </a:t>
             </a:r>
             <a:r>
-              <a:rPr lang="ko-KR" altLang="en-US" sz="2000" b="1" smtClean="0">
+              <a:rPr lang="ko-KR" altLang="en-US" b="1" smtClean="0">
                 <a:solidFill>
                   <a:schemeClr val="tx1"/>
                 </a:solidFill>
@@ -7597,7 +7576,7 @@
               <a:t>케릭터 추가</a:t>
             </a:r>
             <a:r>
-              <a:rPr lang="en-US" altLang="ko-KR" sz="2000" b="1" dirty="0" smtClean="0">
+              <a:rPr lang="en-US" altLang="ko-KR" b="1" dirty="0" smtClean="0">
                 <a:solidFill>
                   <a:schemeClr val="tx1"/>
                 </a:solidFill>
@@ -7605,7 +7584,7 @@
               <a:t>, </a:t>
             </a:r>
             <a:r>
-              <a:rPr lang="ko-KR" altLang="en-US" sz="2000" b="1" smtClean="0">
+              <a:rPr lang="ko-KR" altLang="en-US" b="1" smtClean="0">
                 <a:solidFill>
                   <a:schemeClr val="tx1"/>
                 </a:solidFill>
@@ -7613,7 +7592,7 @@
               <a:t>제한 시간 </a:t>
             </a:r>
             <a:r>
-              <a:rPr lang="en-US" altLang="ko-KR" sz="2000" b="1" dirty="0" smtClean="0">
+              <a:rPr lang="en-US" altLang="ko-KR" b="1" dirty="0" smtClean="0">
                 <a:solidFill>
                   <a:schemeClr val="tx1"/>
                 </a:solidFill>
@@ -7621,7 +7600,7 @@
               <a:t>: 30</a:t>
             </a:r>
             <a:r>
-              <a:rPr lang="ko-KR" altLang="en-US" sz="2000" b="1" smtClean="0">
+              <a:rPr lang="ko-KR" altLang="en-US" b="1" smtClean="0">
                 <a:solidFill>
                   <a:schemeClr val="tx1"/>
                 </a:solidFill>
@@ -7629,7 +7608,7 @@
               <a:t>초</a:t>
             </a:r>
             <a:r>
-              <a:rPr lang="en-US" altLang="ko-KR" sz="2000" b="1" dirty="0" smtClean="0">
+              <a:rPr lang="en-US" altLang="ko-KR" b="1" dirty="0" smtClean="0">
                 <a:solidFill>
                   <a:schemeClr val="tx1"/>
                 </a:solidFill>
@@ -7637,14 +7616,14 @@
               <a:t>)</a:t>
             </a:r>
             <a:r>
-              <a:rPr lang="ko-KR" altLang="en-US" sz="2000" b="1" smtClean="0">
+              <a:rPr lang="ko-KR" altLang="en-US" b="1" smtClean="0">
                 <a:solidFill>
                   <a:schemeClr val="tx1"/>
                 </a:solidFill>
               </a:rPr>
               <a:t> </a:t>
             </a:r>
-            <a:endParaRPr lang="en-US" altLang="ko-KR" sz="2000" b="1" dirty="0" smtClean="0">
+            <a:endParaRPr lang="en-US" altLang="ko-KR" b="1" dirty="0" smtClean="0">
               <a:solidFill>
                 <a:schemeClr val="tx1"/>
               </a:solidFill>
@@ -7659,7 +7638,7 @@
               <a:buChar char="-"/>
             </a:pPr>
             <a:r>
-              <a:rPr lang="ko-KR" altLang="en-US" sz="2000" b="1" dirty="0" err="1" smtClean="0">
+              <a:rPr lang="ko-KR" altLang="en-US" b="1" dirty="0" err="1" smtClean="0">
                 <a:solidFill>
                   <a:schemeClr val="tx1"/>
                 </a:solidFill>
@@ -7667,7 +7646,7 @@
               <a:t>점수제</a:t>
             </a:r>
             <a:r>
-              <a:rPr lang="ko-KR" altLang="en-US" sz="2000" b="1" dirty="0" smtClean="0">
+              <a:rPr lang="ko-KR" altLang="en-US" b="1" dirty="0" smtClean="0">
                 <a:solidFill>
                   <a:schemeClr val="tx1"/>
                 </a:solidFill>
@@ -7675,7 +7654,7 @@
               <a:t> 룰 </a:t>
             </a:r>
             <a:r>
-              <a:rPr lang="en-US" altLang="ko-KR" sz="2000" b="1" dirty="0" smtClean="0">
+              <a:rPr lang="en-US" altLang="ko-KR" b="1" dirty="0" smtClean="0">
                 <a:solidFill>
                   <a:schemeClr val="tx1"/>
                 </a:solidFill>
@@ -7683,7 +7662,7 @@
               <a:t>(5</a:t>
             </a:r>
             <a:r>
-              <a:rPr lang="ko-KR" altLang="en-US" sz="2000" b="1" smtClean="0">
+              <a:rPr lang="ko-KR" altLang="en-US" b="1" smtClean="0">
                 <a:solidFill>
                   <a:schemeClr val="tx1"/>
                 </a:solidFill>
@@ -7691,7 +7670,7 @@
               <a:t>라운드</a:t>
             </a:r>
             <a:r>
-              <a:rPr lang="en-US" altLang="ko-KR" sz="2000" b="1" dirty="0" smtClean="0">
+              <a:rPr lang="en-US" altLang="ko-KR" b="1" dirty="0" smtClean="0">
                 <a:solidFill>
                   <a:schemeClr val="tx1"/>
                 </a:solidFill>
@@ -7699,7 +7678,7 @@
               <a:t>, 60</a:t>
             </a:r>
             <a:r>
-              <a:rPr lang="ko-KR" altLang="en-US" sz="2000" b="1" smtClean="0">
+              <a:rPr lang="ko-KR" altLang="en-US" b="1" smtClean="0">
                 <a:solidFill>
                   <a:schemeClr val="tx1"/>
                 </a:solidFill>
@@ -7707,7 +7686,7 @@
               <a:t>초 </a:t>
             </a:r>
             <a:r>
-              <a:rPr lang="en-US" altLang="ko-KR" sz="2000" b="1" dirty="0" smtClean="0">
+              <a:rPr lang="en-US" altLang="ko-KR" b="1" dirty="0" smtClean="0">
                 <a:solidFill>
                   <a:schemeClr val="tx1"/>
                 </a:solidFill>
@@ -7715,7 +7694,7 @@
               <a:t>-&gt; 0</a:t>
             </a:r>
             <a:r>
-              <a:rPr lang="ko-KR" altLang="en-US" sz="2000" b="1" smtClean="0">
+              <a:rPr lang="ko-KR" altLang="en-US" b="1" smtClean="0">
                 <a:solidFill>
                   <a:schemeClr val="tx1"/>
                 </a:solidFill>
@@ -7723,14 +7702,14 @@
               <a:t>초</a:t>
             </a:r>
             <a:r>
-              <a:rPr lang="en-US" altLang="ko-KR" sz="2000" b="1" dirty="0" smtClean="0">
+              <a:rPr lang="en-US" altLang="ko-KR" b="1" dirty="0" smtClean="0">
                 <a:solidFill>
                   <a:schemeClr val="tx1"/>
                 </a:solidFill>
               </a:rPr>
               <a:t>)</a:t>
             </a:r>
-            <a:endParaRPr lang="en-US" altLang="ko-KR" sz="2000" b="1" dirty="0">
+            <a:endParaRPr lang="en-US" altLang="ko-KR" b="1" dirty="0">
               <a:solidFill>
                 <a:schemeClr val="tx1"/>
               </a:solidFill>
@@ -7745,14 +7724,14 @@
               <a:buChar char="-"/>
             </a:pPr>
             <a:r>
-              <a:rPr lang="ko-KR" altLang="en-US" sz="2000" b="1" dirty="0" smtClean="0">
+              <a:rPr lang="ko-KR" altLang="en-US" b="1" dirty="0" smtClean="0">
                 <a:solidFill>
                   <a:schemeClr val="tx1"/>
                 </a:solidFill>
               </a:rPr>
               <a:t>최초 출제자는 선착순</a:t>
             </a:r>
-            <a:endParaRPr lang="en-US" altLang="ko-KR" sz="2000" b="1" dirty="0" smtClean="0">
+            <a:endParaRPr lang="en-US" altLang="ko-KR" b="1" dirty="0" smtClean="0">
               <a:solidFill>
                 <a:schemeClr val="tx1"/>
               </a:solidFill>
@@ -7767,7 +7746,7 @@
               <a:buChar char="-"/>
             </a:pPr>
             <a:r>
-              <a:rPr lang="en-US" altLang="ko-KR" sz="2000" b="1" dirty="0" smtClean="0">
+              <a:rPr lang="en-US" altLang="ko-KR" b="1" dirty="0" smtClean="0">
                 <a:solidFill>
                   <a:schemeClr val="tx1"/>
                 </a:solidFill>
@@ -7775,7 +7754,7 @@
               <a:t>60 ~ 30</a:t>
             </a:r>
             <a:r>
-              <a:rPr lang="ko-KR" altLang="en-US" sz="2000" b="1" smtClean="0">
+              <a:rPr lang="ko-KR" altLang="en-US" b="1" smtClean="0">
                 <a:solidFill>
                   <a:schemeClr val="tx1"/>
                 </a:solidFill>
@@ -7783,7 +7762,7 @@
               <a:t>초 </a:t>
             </a:r>
             <a:r>
-              <a:rPr lang="en-US" altLang="ko-KR" sz="2000" b="1" dirty="0" smtClean="0">
+              <a:rPr lang="en-US" altLang="ko-KR" b="1" dirty="0" smtClean="0">
                 <a:solidFill>
                   <a:schemeClr val="tx1"/>
                 </a:solidFill>
@@ -7791,7 +7770,7 @@
               <a:t>– </a:t>
             </a:r>
             <a:r>
-              <a:rPr lang="ko-KR" altLang="en-US" sz="2000" b="1" smtClean="0">
+              <a:rPr lang="ko-KR" altLang="en-US" b="1" smtClean="0">
                 <a:solidFill>
                   <a:schemeClr val="tx1"/>
                 </a:solidFill>
@@ -7799,7 +7778,7 @@
               <a:t>출제자의 문제를 맞추면</a:t>
             </a:r>
             <a:r>
-              <a:rPr lang="en-US" altLang="ko-KR" sz="2000" b="1" dirty="0" smtClean="0">
+              <a:rPr lang="en-US" altLang="ko-KR" b="1" dirty="0" smtClean="0">
                 <a:solidFill>
                   <a:schemeClr val="tx1"/>
                 </a:solidFill>
@@ -7807,7 +7786,7 @@
               <a:t>,</a:t>
             </a:r>
             <a:r>
-              <a:rPr lang="ko-KR" altLang="en-US" sz="2000" b="1" smtClean="0">
+              <a:rPr lang="ko-KR" altLang="en-US" b="1" smtClean="0">
                 <a:solidFill>
                   <a:schemeClr val="tx1"/>
                 </a:solidFill>
@@ -7815,7 +7794,7 @@
               <a:t> 출제자가 </a:t>
             </a:r>
             <a:r>
-              <a:rPr lang="en-US" altLang="ko-KR" sz="2000" b="1" dirty="0" smtClean="0">
+              <a:rPr lang="en-US" altLang="ko-KR" b="1" dirty="0" smtClean="0">
                 <a:solidFill>
                   <a:schemeClr val="tx1"/>
                 </a:solidFill>
@@ -7823,7 +7802,7 @@
               <a:t>2</a:t>
             </a:r>
             <a:r>
-              <a:rPr lang="ko-KR" altLang="en-US" sz="2000" b="1" smtClean="0">
+              <a:rPr lang="ko-KR" altLang="en-US" b="1" smtClean="0">
                 <a:solidFill>
                   <a:schemeClr val="tx1"/>
                 </a:solidFill>
@@ -7831,7 +7810,7 @@
               <a:t>점 획득</a:t>
             </a:r>
             <a:r>
-              <a:rPr lang="en-US" altLang="ko-KR" sz="2000" b="1" dirty="0" smtClean="0">
+              <a:rPr lang="en-US" altLang="ko-KR" b="1" dirty="0" smtClean="0">
                 <a:solidFill>
                   <a:schemeClr val="tx1"/>
                 </a:solidFill>
@@ -7839,7 +7818,7 @@
               <a:t>, </a:t>
             </a:r>
             <a:r>
-              <a:rPr lang="ko-KR" altLang="en-US" sz="2000" b="1" smtClean="0">
+              <a:rPr lang="ko-KR" altLang="en-US" b="1" smtClean="0">
                 <a:solidFill>
                   <a:schemeClr val="tx1"/>
                 </a:solidFill>
@@ -7847,7 +7826,7 @@
               <a:t>참가자는 </a:t>
             </a:r>
             <a:r>
-              <a:rPr lang="en-US" altLang="ko-KR" sz="2000" b="1" dirty="0" smtClean="0">
+              <a:rPr lang="en-US" altLang="ko-KR" b="1" dirty="0" smtClean="0">
                 <a:solidFill>
                   <a:schemeClr val="tx1"/>
                 </a:solidFill>
@@ -7855,14 +7834,14 @@
               <a:t>3</a:t>
             </a:r>
             <a:r>
-              <a:rPr lang="ko-KR" altLang="en-US" sz="2000" b="1" smtClean="0">
+              <a:rPr lang="ko-KR" altLang="en-US" b="1" smtClean="0">
                 <a:solidFill>
                   <a:schemeClr val="tx1"/>
                 </a:solidFill>
               </a:rPr>
               <a:t>점 획득</a:t>
             </a:r>
-            <a:endParaRPr lang="en-US" altLang="ko-KR" sz="2000" b="1" dirty="0" smtClean="0">
+            <a:endParaRPr lang="en-US" altLang="ko-KR" b="1" dirty="0" smtClean="0">
               <a:solidFill>
                 <a:schemeClr val="tx1"/>
               </a:solidFill>
@@ -7877,7 +7856,7 @@
               <a:buChar char="-"/>
             </a:pPr>
             <a:r>
-              <a:rPr lang="en-US" altLang="ko-KR" sz="2000" b="1" dirty="0" smtClean="0">
+              <a:rPr lang="en-US" altLang="ko-KR" b="1" dirty="0" smtClean="0">
                 <a:solidFill>
                   <a:schemeClr val="tx1"/>
                 </a:solidFill>
@@ -7885,7 +7864,7 @@
               <a:t>30</a:t>
             </a:r>
             <a:r>
-              <a:rPr lang="ko-KR" altLang="en-US" sz="2000" b="1">
+              <a:rPr lang="ko-KR" altLang="en-US" b="1">
                 <a:solidFill>
                   <a:schemeClr val="tx1"/>
                 </a:solidFill>
@@ -7893,7 +7872,7 @@
               <a:t> </a:t>
             </a:r>
             <a:r>
-              <a:rPr lang="en-US" altLang="ko-KR" sz="2000" b="1" dirty="0" smtClean="0">
+              <a:rPr lang="en-US" altLang="ko-KR" b="1" dirty="0" smtClean="0">
                 <a:solidFill>
                   <a:schemeClr val="tx1"/>
                 </a:solidFill>
@@ -7901,7 +7880,7 @@
               <a:t>~ 0</a:t>
             </a:r>
             <a:r>
-              <a:rPr lang="ko-KR" altLang="en-US" sz="2000" b="1" smtClean="0">
+              <a:rPr lang="ko-KR" altLang="en-US" b="1" smtClean="0">
                 <a:solidFill>
                   <a:schemeClr val="tx1"/>
                 </a:solidFill>
@@ -7909,7 +7888,7 @@
               <a:t>초 </a:t>
             </a:r>
             <a:r>
-              <a:rPr lang="en-US" altLang="ko-KR" sz="2000" b="1" dirty="0" smtClean="0">
+              <a:rPr lang="en-US" altLang="ko-KR" b="1" dirty="0" smtClean="0">
                 <a:solidFill>
                   <a:schemeClr val="tx1"/>
                 </a:solidFill>
@@ -7917,7 +7896,7 @@
               <a:t>– </a:t>
             </a:r>
             <a:r>
-              <a:rPr lang="ko-KR" altLang="en-US" sz="2000" b="1" smtClean="0">
+              <a:rPr lang="ko-KR" altLang="en-US" b="1" smtClean="0">
                 <a:solidFill>
                   <a:schemeClr val="tx1"/>
                 </a:solidFill>
@@ -7925,7 +7904,7 @@
               <a:t>힌트 출력</a:t>
             </a:r>
             <a:r>
-              <a:rPr lang="en-US" altLang="ko-KR" sz="2000" b="1" dirty="0" smtClean="0">
+              <a:rPr lang="en-US" altLang="ko-KR" b="1" dirty="0" smtClean="0">
                 <a:solidFill>
                   <a:schemeClr val="tx1"/>
                 </a:solidFill>
@@ -7933,7 +7912,7 @@
               <a:t>(</a:t>
             </a:r>
             <a:r>
-              <a:rPr lang="ko-KR" altLang="en-US" sz="2000" b="1" smtClean="0">
+              <a:rPr lang="ko-KR" altLang="en-US" b="1" smtClean="0">
                 <a:solidFill>
                   <a:schemeClr val="tx1"/>
                 </a:solidFill>
@@ -7941,7 +7920,7 @@
               <a:t>카테고리</a:t>
             </a:r>
             <a:r>
-              <a:rPr lang="en-US" altLang="ko-KR" sz="2000" b="1" dirty="0" smtClean="0">
+              <a:rPr lang="en-US" altLang="ko-KR" b="1" dirty="0" smtClean="0">
                 <a:solidFill>
                   <a:schemeClr val="tx1"/>
                 </a:solidFill>
@@ -7949,7 +7928,7 @@
               <a:t>). </a:t>
             </a:r>
             <a:r>
-              <a:rPr lang="ko-KR" altLang="en-US" sz="2000" b="1" smtClean="0">
+              <a:rPr lang="ko-KR" altLang="en-US" b="1" smtClean="0">
                 <a:solidFill>
                   <a:schemeClr val="tx1"/>
                 </a:solidFill>
@@ -7957,7 +7936,7 @@
               <a:t>출제자의 </a:t>
             </a:r>
             <a:r>
-              <a:rPr lang="ko-KR" altLang="en-US" sz="2000" b="1">
+              <a:rPr lang="ko-KR" altLang="en-US" b="1">
                 <a:solidFill>
                   <a:schemeClr val="tx1"/>
                 </a:solidFill>
@@ -7965,7 +7944,7 @@
               <a:t>문제를 맞추면</a:t>
             </a:r>
             <a:r>
-              <a:rPr lang="en-US" altLang="ko-KR" sz="2000" b="1" dirty="0">
+              <a:rPr lang="en-US" altLang="ko-KR" b="1" dirty="0">
                 <a:solidFill>
                   <a:schemeClr val="tx1"/>
                 </a:solidFill>
@@ -7973,23 +7952,15 @@
               <a:t>,</a:t>
             </a:r>
             <a:r>
-              <a:rPr lang="ko-KR" altLang="en-US" sz="2000" b="1">
-                <a:solidFill>
-                  <a:schemeClr val="tx1"/>
-                </a:solidFill>
-              </a:rPr>
-              <a:t> </a:t>
-            </a:r>
-            <a:r>
-              <a:rPr lang="ko-KR" altLang="en-US" sz="2000" b="1">
-                <a:solidFill>
-                  <a:schemeClr val="tx1"/>
-                </a:solidFill>
-              </a:rPr>
-              <a:t>출제자가 </a:t>
-            </a:r>
-            <a:r>
-              <a:rPr lang="en-US" altLang="ko-KR" sz="2000" b="1" dirty="0" smtClean="0">
+              <a:rPr lang="ko-KR" altLang="en-US" b="1">
+                <a:solidFill>
+                  <a:schemeClr val="tx1"/>
+                </a:solidFill>
+              </a:rPr>
+              <a:t> 출제자가 </a:t>
+            </a:r>
+            <a:r>
+              <a:rPr lang="en-US" altLang="ko-KR" b="1" dirty="0" smtClean="0">
                 <a:solidFill>
                   <a:schemeClr val="tx1"/>
                 </a:solidFill>
@@ -7997,7 +7968,7 @@
               <a:t>1</a:t>
             </a:r>
             <a:r>
-              <a:rPr lang="ko-KR" altLang="en-US" sz="2000" b="1" smtClean="0">
+              <a:rPr lang="ko-KR" altLang="en-US" b="1" smtClean="0">
                 <a:solidFill>
                   <a:schemeClr val="tx1"/>
                 </a:solidFill>
@@ -8005,7 +7976,7 @@
               <a:t>점 </a:t>
             </a:r>
             <a:r>
-              <a:rPr lang="ko-KR" altLang="en-US" sz="2000" b="1">
+              <a:rPr lang="ko-KR" altLang="en-US" b="1">
                 <a:solidFill>
                   <a:schemeClr val="tx1"/>
                 </a:solidFill>
@@ -8013,7 +7984,7 @@
               <a:t>획득</a:t>
             </a:r>
             <a:r>
-              <a:rPr lang="en-US" altLang="ko-KR" sz="2000" b="1" dirty="0">
+              <a:rPr lang="en-US" altLang="ko-KR" b="1" dirty="0">
                 <a:solidFill>
                   <a:schemeClr val="tx1"/>
                 </a:solidFill>
@@ -8021,7 +7992,7 @@
               <a:t>, </a:t>
             </a:r>
             <a:r>
-              <a:rPr lang="ko-KR" altLang="en-US" sz="2000" b="1">
+              <a:rPr lang="ko-KR" altLang="en-US" b="1">
                 <a:solidFill>
                   <a:schemeClr val="tx1"/>
                 </a:solidFill>
@@ -8029,7 +8000,7 @@
               <a:t>참가자는 </a:t>
             </a:r>
             <a:r>
-              <a:rPr lang="en-US" altLang="ko-KR" sz="2000" b="1" dirty="0" smtClean="0">
+              <a:rPr lang="en-US" altLang="ko-KR" b="1" dirty="0" smtClean="0">
                 <a:solidFill>
                   <a:schemeClr val="tx1"/>
                 </a:solidFill>
@@ -8037,14 +8008,14 @@
               <a:t>2</a:t>
             </a:r>
             <a:r>
-              <a:rPr lang="ko-KR" altLang="en-US" sz="2000" b="1" smtClean="0">
+              <a:rPr lang="ko-KR" altLang="en-US" b="1" smtClean="0">
                 <a:solidFill>
                   <a:schemeClr val="tx1"/>
                 </a:solidFill>
               </a:rPr>
               <a:t>점 획득</a:t>
             </a:r>
-            <a:endParaRPr lang="en-US" altLang="ko-KR" sz="2000" b="1" dirty="0" smtClean="0">
+            <a:endParaRPr lang="en-US" altLang="ko-KR" b="1" dirty="0" smtClean="0">
               <a:solidFill>
                 <a:schemeClr val="tx1"/>
               </a:solidFill>
@@ -8059,7 +8030,7 @@
               <a:buChar char="-"/>
             </a:pPr>
             <a:r>
-              <a:rPr lang="en-US" altLang="ko-KR" sz="2000" b="1" dirty="0" smtClean="0">
+              <a:rPr lang="en-US" altLang="ko-KR" b="1" dirty="0" smtClean="0">
                 <a:solidFill>
                   <a:schemeClr val="tx1"/>
                 </a:solidFill>
@@ -8067,7 +8038,7 @@
               <a:t>0</a:t>
             </a:r>
             <a:r>
-              <a:rPr lang="ko-KR" altLang="en-US" sz="2000" b="1" smtClean="0">
+              <a:rPr lang="ko-KR" altLang="en-US" b="1" smtClean="0">
                 <a:solidFill>
                   <a:schemeClr val="tx1"/>
                 </a:solidFill>
@@ -8075,7 +8046,7 @@
               <a:t>초 이후 </a:t>
             </a:r>
             <a:r>
-              <a:rPr lang="en-US" altLang="ko-KR" sz="2000" b="1" dirty="0" smtClean="0">
+              <a:rPr lang="en-US" altLang="ko-KR" b="1" dirty="0" smtClean="0">
                 <a:solidFill>
                   <a:schemeClr val="tx1"/>
                 </a:solidFill>
@@ -8083,7 +8054,7 @@
               <a:t>– </a:t>
             </a:r>
             <a:r>
-              <a:rPr lang="ko-KR" altLang="en-US" sz="2000" b="1" smtClean="0">
+              <a:rPr lang="ko-KR" altLang="en-US" b="1" smtClean="0">
                 <a:solidFill>
                   <a:schemeClr val="tx1"/>
                 </a:solidFill>
@@ -8091,7 +8062,7 @@
               <a:t>바로 종료 후</a:t>
             </a:r>
             <a:r>
-              <a:rPr lang="en-US" altLang="ko-KR" sz="2000" b="1" dirty="0" smtClean="0">
+              <a:rPr lang="en-US" altLang="ko-KR" b="1" dirty="0" smtClean="0">
                 <a:solidFill>
                   <a:schemeClr val="tx1"/>
                 </a:solidFill>
@@ -8099,7 +8070,7 @@
               <a:t>, </a:t>
             </a:r>
             <a:r>
-              <a:rPr lang="ko-KR" altLang="en-US" sz="2000" b="1" smtClean="0">
+              <a:rPr lang="ko-KR" altLang="en-US" b="1" smtClean="0">
                 <a:solidFill>
                   <a:schemeClr val="tx1"/>
                 </a:solidFill>
@@ -8107,7 +8078,7 @@
               <a:t>정답 공개</a:t>
             </a:r>
             <a:r>
-              <a:rPr lang="en-US" altLang="ko-KR" sz="2000" b="1" dirty="0" smtClean="0">
+              <a:rPr lang="en-US" altLang="ko-KR" b="1" dirty="0" smtClean="0">
                 <a:solidFill>
                   <a:schemeClr val="tx1"/>
                 </a:solidFill>
@@ -8115,7 +8086,7 @@
               <a:t>. </a:t>
             </a:r>
             <a:r>
-              <a:rPr lang="ko-KR" altLang="en-US" sz="2000" b="1" smtClean="0">
+              <a:rPr lang="ko-KR" altLang="en-US" b="1" smtClean="0">
                 <a:solidFill>
                   <a:schemeClr val="tx1"/>
                 </a:solidFill>
@@ -8123,7 +8094,7 @@
               <a:t>출제자 </a:t>
             </a:r>
             <a:r>
-              <a:rPr lang="en-US" altLang="ko-KR" sz="2000" b="1" dirty="0" smtClean="0">
+              <a:rPr lang="en-US" altLang="ko-KR" b="1" dirty="0" smtClean="0">
                 <a:solidFill>
                   <a:schemeClr val="tx1"/>
                 </a:solidFill>
@@ -8131,7 +8102,7 @@
               <a:t>1</a:t>
             </a:r>
             <a:r>
-              <a:rPr lang="ko-KR" altLang="en-US" sz="2000" b="1" smtClean="0">
+              <a:rPr lang="ko-KR" altLang="en-US" b="1" smtClean="0">
                 <a:solidFill>
                   <a:schemeClr val="tx1"/>
                 </a:solidFill>
@@ -8139,7 +8110,7 @@
               <a:t>점 감점</a:t>
             </a:r>
             <a:r>
-              <a:rPr lang="en-US" altLang="ko-KR" sz="2000" b="1" dirty="0" smtClean="0">
+              <a:rPr lang="en-US" altLang="ko-KR" b="1" dirty="0" smtClean="0">
                 <a:solidFill>
                   <a:schemeClr val="tx1"/>
                 </a:solidFill>
@@ -8147,14 +8118,14 @@
               <a:t>, </a:t>
             </a:r>
             <a:r>
-              <a:rPr lang="ko-KR" altLang="en-US" sz="2000" b="1" smtClean="0">
+              <a:rPr lang="ko-KR" altLang="en-US" b="1" smtClean="0">
                 <a:solidFill>
                   <a:schemeClr val="tx1"/>
                 </a:solidFill>
               </a:rPr>
               <a:t>다음 출제자는 기존 출제자 유지 </a:t>
             </a:r>
-            <a:endParaRPr lang="en-US" altLang="ko-KR" sz="2000" b="1" dirty="0" smtClean="0">
+            <a:endParaRPr lang="en-US" altLang="ko-KR" b="1" dirty="0" smtClean="0">
               <a:solidFill>
                 <a:schemeClr val="tx1"/>
               </a:solidFill>
@@ -8169,14 +8140,14 @@
               <a:buChar char="-"/>
             </a:pPr>
             <a:r>
-              <a:rPr lang="ko-KR" altLang="en-US" sz="2000" b="1" dirty="0" smtClean="0">
+              <a:rPr lang="ko-KR" altLang="en-US" b="1" dirty="0" smtClean="0">
                 <a:solidFill>
                   <a:schemeClr val="tx1"/>
                 </a:solidFill>
               </a:rPr>
               <a:t>기타</a:t>
             </a:r>
-            <a:endParaRPr lang="en-US" altLang="ko-KR" sz="2000" b="1" dirty="0" smtClean="0">
+            <a:endParaRPr lang="en-US" altLang="ko-KR" b="1" dirty="0" smtClean="0">
               <a:solidFill>
                 <a:schemeClr val="tx1"/>
               </a:solidFill>
@@ -8191,7 +8162,7 @@
               <a:buChar char="-"/>
             </a:pPr>
             <a:r>
-              <a:rPr lang="ko-KR" altLang="en-US" sz="2000" b="1" dirty="0">
+              <a:rPr lang="ko-KR" altLang="en-US" b="1" dirty="0">
                 <a:solidFill>
                   <a:schemeClr val="tx1"/>
                 </a:solidFill>
@@ -8199,7 +8170,7 @@
               <a:t>팀 소개 영상 </a:t>
             </a:r>
             <a:r>
-              <a:rPr lang="en-US" altLang="ko-KR" sz="2000" b="1" dirty="0">
+              <a:rPr lang="en-US" altLang="ko-KR" b="1" dirty="0">
                 <a:solidFill>
                   <a:schemeClr val="tx1"/>
                 </a:solidFill>
@@ -8207,30 +8178,22 @@
               <a:t>– </a:t>
             </a:r>
             <a:r>
-              <a:rPr lang="ko-KR" altLang="en-US" sz="2000" b="1">
-                <a:solidFill>
-                  <a:schemeClr val="tx1"/>
-                </a:solidFill>
-              </a:rPr>
-              <a:t>월요일 </a:t>
-            </a:r>
-            <a:r>
-              <a:rPr lang="ko-KR" altLang="en-US" sz="2000" b="1">
-                <a:solidFill>
-                  <a:schemeClr val="tx1"/>
-                </a:solidFill>
-              </a:rPr>
-              <a:t>오후 </a:t>
-            </a:r>
-            <a:r>
-              <a:rPr lang="ko-KR" altLang="en-US" sz="2000" b="1" smtClean="0">
+              <a:rPr lang="ko-KR" altLang="en-US" b="1">
+                <a:solidFill>
+                  <a:schemeClr val="tx1"/>
+                </a:solidFill>
+              </a:rPr>
+              <a:t>월요일 오후 </a:t>
+            </a:r>
+            <a:r>
+              <a:rPr lang="ko-KR" altLang="en-US" b="1" smtClean="0">
                 <a:solidFill>
                   <a:schemeClr val="tx1"/>
                 </a:solidFill>
               </a:rPr>
               <a:t>한시까지 제출</a:t>
             </a:r>
-            <a:endParaRPr lang="en-US" altLang="ko-KR" sz="2000" b="1" dirty="0" smtClean="0">
+            <a:endParaRPr lang="en-US" altLang="ko-KR" b="1" dirty="0" smtClean="0">
               <a:solidFill>
                 <a:schemeClr val="tx1"/>
               </a:solidFill>
@@ -8245,7 +8208,7 @@
               <a:buChar char="-"/>
             </a:pPr>
             <a:r>
-              <a:rPr lang="en-US" altLang="ko-KR" sz="2000" b="1" dirty="0" err="1" smtClean="0">
+              <a:rPr lang="en-US" altLang="ko-KR" b="1" dirty="0" err="1" smtClean="0">
                 <a:solidFill>
                   <a:schemeClr val="tx1"/>
                 </a:solidFill>
@@ -8253,7 +8216,15 @@
               <a:t>Github</a:t>
             </a:r>
             <a:r>
-              <a:rPr lang="ko-KR" altLang="en-US" sz="2000" b="1" smtClean="0">
+              <a:rPr lang="ko-KR" altLang="en-US" b="1" smtClean="0">
+                <a:solidFill>
+                  <a:schemeClr val="tx1"/>
+                </a:solidFill>
+              </a:rPr>
+              <a:t> 업로드 방법</a:t>
+            </a:r>
+            <a:r>
+              <a:rPr lang="en-US" altLang="ko-KR" b="1" dirty="0" smtClean="0">
                 <a:solidFill>
                   <a:schemeClr val="tx1"/>
                 </a:solidFill>
@@ -8261,15 +8232,47 @@
               <a:t> </a:t>
             </a:r>
             <a:r>
-              <a:rPr lang="ko-KR" altLang="en-US" sz="2000" b="1" smtClean="0">
-                <a:solidFill>
-                  <a:schemeClr val="tx1"/>
-                </a:solidFill>
-              </a:rPr>
-              <a:t>업로드 방법</a:t>
-            </a:r>
-            <a:r>
-              <a:rPr lang="en-US" altLang="ko-KR" sz="2000" b="1" dirty="0" smtClean="0">
+              <a:rPr lang="ko-KR" altLang="en-US" b="1" smtClean="0">
+                <a:solidFill>
+                  <a:schemeClr val="tx1"/>
+                </a:solidFill>
+              </a:rPr>
+              <a:t>찾기</a:t>
+            </a:r>
+            <a:r>
+              <a:rPr lang="en-US" altLang="ko-KR" b="1" dirty="0" smtClean="0">
+                <a:solidFill>
+                  <a:schemeClr val="tx1"/>
+                </a:solidFill>
+              </a:rPr>
+              <a:t> – </a:t>
+            </a:r>
+            <a:r>
+              <a:rPr lang="en-US" altLang="ko-KR" b="1" dirty="0" err="1" smtClean="0">
+                <a:solidFill>
+                  <a:schemeClr val="tx1"/>
+                </a:solidFill>
+              </a:rPr>
+              <a:t>i</a:t>
+            </a:r>
+            <a:r>
+              <a:rPr lang="en-US" altLang="ko-KR" b="1" dirty="0" smtClean="0">
+                <a:solidFill>
+                  <a:schemeClr val="tx1"/>
+                </a:solidFill>
+              </a:rPr>
+              <a:t>-privacy </a:t>
+            </a:r>
+            <a:r>
+              <a:rPr lang="ko-KR" altLang="en-US" b="1" smtClean="0">
+                <a:solidFill>
+                  <a:schemeClr val="tx1"/>
+                </a:solidFill>
+              </a:rPr>
+              <a:t>허가</a:t>
+            </a:r>
+            <a:r>
+              <a:rPr lang="en-US" altLang="ko-KR" b="1" dirty="0" smtClean="0">
                 <a:solidFill>
                   <a:schemeClr val="tx1"/>
                 </a:solidFill>
@@ -8277,62 +8280,14 @@
               <a:t> </a:t>
             </a:r>
             <a:r>
-              <a:rPr lang="ko-KR" altLang="en-US" sz="2000" b="1" smtClean="0">
-                <a:solidFill>
-                  <a:schemeClr val="tx1"/>
-                </a:solidFill>
-              </a:rPr>
-              <a:t>찾기</a:t>
-            </a:r>
-            <a:r>
-              <a:rPr lang="en-US" altLang="ko-KR" sz="2000" b="1" dirty="0" smtClean="0">
-                <a:solidFill>
-                  <a:schemeClr val="tx1"/>
-                </a:solidFill>
-              </a:rPr>
-              <a:t> – </a:t>
-            </a:r>
-            <a:r>
-              <a:rPr lang="en-US" altLang="ko-KR" sz="2000" b="1" dirty="0" err="1" smtClean="0">
-                <a:solidFill>
-                  <a:schemeClr val="tx1"/>
-                </a:solidFill>
-              </a:rPr>
-              <a:t>i</a:t>
-            </a:r>
-            <a:r>
-              <a:rPr lang="en-US" altLang="ko-KR" sz="2000" b="1" dirty="0" smtClean="0">
-                <a:solidFill>
-                  <a:schemeClr val="tx1"/>
-                </a:solidFill>
-              </a:rPr>
-              <a:t>-privacy </a:t>
-            </a:r>
-            <a:r>
-              <a:rPr lang="ko-KR" altLang="en-US" sz="2000" b="1" smtClean="0">
-                <a:solidFill>
-                  <a:schemeClr val="tx1"/>
-                </a:solidFill>
-              </a:rPr>
-              <a:t>허가</a:t>
-            </a:r>
-            <a:r>
-              <a:rPr lang="en-US" altLang="ko-KR" sz="2000" b="1" dirty="0" smtClean="0">
-                <a:solidFill>
-                  <a:schemeClr val="tx1"/>
-                </a:solidFill>
-              </a:rPr>
-              <a:t> </a:t>
-            </a:r>
-            <a:r>
-              <a:rPr lang="ko-KR" altLang="en-US" sz="2000" b="1" smtClean="0">
+              <a:rPr lang="ko-KR" altLang="en-US" b="1" smtClean="0">
                 <a:solidFill>
                   <a:schemeClr val="tx1"/>
                 </a:solidFill>
               </a:rPr>
               <a:t>안해줄듯</a:t>
             </a:r>
-            <a:endParaRPr lang="en-US" altLang="ko-KR" sz="2000" b="1" dirty="0" smtClean="0">
+            <a:endParaRPr lang="en-US" altLang="ko-KR" b="1" dirty="0" smtClean="0">
               <a:solidFill>
                 <a:schemeClr val="tx1"/>
               </a:solidFill>
@@ -8347,7 +8302,7 @@
               <a:buChar char="-"/>
             </a:pPr>
             <a:r>
-              <a:rPr lang="ko-KR" altLang="en-US" sz="2000" b="1" dirty="0" smtClean="0">
+              <a:rPr lang="ko-KR" altLang="en-US" b="1" dirty="0" smtClean="0">
                 <a:solidFill>
                   <a:schemeClr val="tx1"/>
                 </a:solidFill>
@@ -8355,103 +8310,30 @@
               <a:t>전시회 시연 고려 </a:t>
             </a:r>
             <a:r>
-              <a:rPr lang="en-US" altLang="ko-KR" sz="2000" b="1" dirty="0" smtClean="0">
-                <a:solidFill>
-                  <a:schemeClr val="tx1"/>
-                </a:solidFill>
-              </a:rPr>
-              <a:t>– </a:t>
-            </a:r>
-            <a:r>
-              <a:rPr lang="en-US" altLang="ko-KR" sz="2000" b="1" dirty="0" smtClean="0">
-                <a:solidFill>
-                  <a:schemeClr val="tx1"/>
-                </a:solidFill>
-              </a:rPr>
-              <a:t>PC </a:t>
-            </a:r>
-            <a:r>
-              <a:rPr lang="ko-KR" altLang="en-US" sz="2000" b="1" smtClean="0">
-                <a:solidFill>
-                  <a:schemeClr val="tx1"/>
-                </a:solidFill>
-              </a:rPr>
-              <a:t>모니터에 띄울 수 있는지</a:t>
-            </a:r>
-            <a:endParaRPr lang="en-US" altLang="ko-KR" sz="2000" b="1" dirty="0" smtClean="0">
-              <a:solidFill>
-                <a:schemeClr val="tx1"/>
-              </a:solidFill>
-            </a:endParaRPr>
-          </a:p>
-          <a:p>
-            <a:pPr marL="342900" indent="-342900">
-              <a:lnSpc>
-                <a:spcPct val="150000"/>
-              </a:lnSpc>
-              <a:buFontTx/>
-              <a:buChar char="-"/>
-            </a:pPr>
-            <a:endParaRPr lang="en-US" altLang="ko-KR" sz="2400" b="1" dirty="0">
-              <a:solidFill>
-                <a:schemeClr val="tx1"/>
-              </a:solidFill>
-            </a:endParaRPr>
-          </a:p>
-          <a:p>
-            <a:pPr marL="342900" indent="-342900">
-              <a:lnSpc>
-                <a:spcPct val="150000"/>
-              </a:lnSpc>
-              <a:buFontTx/>
-              <a:buChar char="-"/>
-            </a:pPr>
-            <a:endParaRPr lang="en-US" altLang="ko-KR" sz="2400" b="1" dirty="0" smtClean="0">
-              <a:solidFill>
-                <a:schemeClr val="tx1"/>
-              </a:solidFill>
-            </a:endParaRPr>
-          </a:p>
-          <a:p>
-            <a:pPr>
-              <a:lnSpc>
-                <a:spcPct val="150000"/>
-              </a:lnSpc>
-            </a:pPr>
-            <a:endParaRPr lang="en-US" altLang="ko-KR" sz="2400" b="1" dirty="0" smtClean="0">
-              <a:solidFill>
-                <a:schemeClr val="tx1"/>
-              </a:solidFill>
-            </a:endParaRPr>
-          </a:p>
-          <a:p>
-            <a:pPr>
-              <a:lnSpc>
-                <a:spcPct val="150000"/>
-              </a:lnSpc>
-            </a:pPr>
-            <a:endParaRPr lang="en-US" altLang="ko-KR" sz="3200" b="1" dirty="0" smtClean="0">
-              <a:solidFill>
-                <a:schemeClr val="tx1"/>
-              </a:solidFill>
-            </a:endParaRPr>
-          </a:p>
-          <a:p>
-            <a:endParaRPr lang="en-US" altLang="ko-KR" sz="3200" b="1" dirty="0" smtClean="0">
-              <a:solidFill>
-                <a:schemeClr val="tx1"/>
-              </a:solidFill>
-            </a:endParaRPr>
-          </a:p>
-          <a:p>
-            <a:endParaRPr lang="en-US" altLang="ko-KR" sz="3200" b="1" dirty="0" smtClean="0">
-              <a:solidFill>
-                <a:schemeClr val="tx1"/>
-              </a:solidFill>
-            </a:endParaRPr>
-          </a:p>
-          <a:p>
-            <a:endParaRPr lang="ko-KR" altLang="en-US" sz="3200" b="1" dirty="0">
+              <a:rPr lang="en-US" altLang="ko-KR" b="1" dirty="0" smtClean="0">
+                <a:solidFill>
+                  <a:schemeClr val="tx1"/>
+                </a:solidFill>
+              </a:rPr>
+              <a:t>– PC </a:t>
+            </a:r>
+            <a:r>
+              <a:rPr lang="ko-KR" altLang="en-US" b="1" smtClean="0">
+                <a:solidFill>
+                  <a:schemeClr val="tx1"/>
+                </a:solidFill>
+              </a:rPr>
+              <a:t>모니터에 띄울 수 </a:t>
+            </a:r>
+            <a:r>
+              <a:rPr lang="ko-KR" altLang="en-US" b="1" smtClean="0">
+                <a:solidFill>
+                  <a:schemeClr val="tx1"/>
+                </a:solidFill>
+              </a:rPr>
+              <a:t>있는지</a:t>
+            </a:r>
+            <a:endParaRPr lang="en-US" altLang="ko-KR" sz="2800" b="1" dirty="0" smtClean="0">
               <a:solidFill>
                 <a:schemeClr val="tx1"/>
               </a:solidFill>

--- a/LG_부트캠프_12기_C반_프로젝트일정_및_최종제출결과물_3팀/4.LG_부트캠프_12기_C반_결과보고서(3팀)_v1.pptx
+++ b/LG_부트캠프_12기_C반_프로젝트일정_및_최종제출결과물_3팀/4.LG_부트캠프_12기_C반_결과보고서(3팀)_v1.pptx
@@ -7291,18 +7291,13 @@
               <a:t>완</a:t>
             </a:r>
             <a:r>
-              <a:rPr lang="en-US" altLang="ko-KR" b="1" dirty="0">
+              <a:rPr lang="en-US" altLang="ko-KR" b="1" dirty="0" smtClean="0">
                 <a:solidFill>
                   <a:schemeClr val="tx1"/>
                 </a:solidFill>
               </a:rPr>
               <a:t>)</a:t>
             </a:r>
-            <a:endParaRPr lang="en-US" altLang="ko-KR" b="1" dirty="0" smtClean="0">
-              <a:solidFill>
-                <a:schemeClr val="tx1"/>
-              </a:solidFill>
-            </a:endParaRPr>
           </a:p>
           <a:p>
             <a:pPr marL="342900" indent="-342900">
@@ -7313,6 +7308,84 @@
               <a:buChar char="-"/>
             </a:pPr>
             <a:r>
+              <a:rPr lang="en-US" altLang="ko-KR" b="1" dirty="0" err="1">
+                <a:solidFill>
+                  <a:schemeClr val="tx1"/>
+                </a:solidFill>
+              </a:rPr>
+              <a:t>Github</a:t>
+            </a:r>
+            <a:r>
+              <a:rPr lang="ko-KR" altLang="en-US" b="1">
+                <a:solidFill>
+                  <a:schemeClr val="tx1"/>
+                </a:solidFill>
+              </a:rPr>
+              <a:t> 업로드 </a:t>
+            </a:r>
+            <a:r>
+              <a:rPr lang="ko-KR" altLang="en-US" b="1">
+                <a:solidFill>
+                  <a:schemeClr val="tx1"/>
+                </a:solidFill>
+              </a:rPr>
+              <a:t>방법</a:t>
+            </a:r>
+            <a:r>
+              <a:rPr lang="en-US" altLang="ko-KR" b="1" dirty="0">
+                <a:solidFill>
+                  <a:schemeClr val="tx1"/>
+                </a:solidFill>
+              </a:rPr>
+              <a:t> </a:t>
+            </a:r>
+            <a:r>
+              <a:rPr lang="ko-KR" altLang="en-US" b="1" smtClean="0">
+                <a:solidFill>
+                  <a:schemeClr val="tx1"/>
+                </a:solidFill>
+              </a:rPr>
+              <a:t>찾기</a:t>
+            </a:r>
+            <a:r>
+              <a:rPr lang="en-US" altLang="ko-KR" b="1" dirty="0" smtClean="0">
+                <a:solidFill>
+                  <a:schemeClr val="tx1"/>
+                </a:solidFill>
+              </a:rPr>
+              <a:t>(</a:t>
+            </a:r>
+            <a:r>
+              <a:rPr lang="ko-KR" altLang="en-US" b="1" smtClean="0">
+                <a:solidFill>
+                  <a:schemeClr val="tx1"/>
+                </a:solidFill>
+              </a:rPr>
+              <a:t>완</a:t>
+            </a:r>
+            <a:r>
+              <a:rPr lang="en-US" altLang="ko-KR" b="1" smtClean="0">
+                <a:solidFill>
+                  <a:schemeClr val="tx1"/>
+                </a:solidFill>
+              </a:rPr>
+              <a:t>)</a:t>
+            </a:r>
+            <a:endParaRPr lang="en-US" altLang="ko-KR" b="1" dirty="0" smtClean="0">
+              <a:solidFill>
+                <a:schemeClr val="tx1"/>
+              </a:solidFill>
+            </a:endParaRPr>
+          </a:p>
+          <a:p>
+            <a:pPr marL="342900" indent="-342900">
+              <a:lnSpc>
+                <a:spcPct val="150000"/>
+              </a:lnSpc>
+              <a:buFontTx/>
+              <a:buChar char="-"/>
+            </a:pPr>
+            <a:r>
               <a:rPr lang="ko-KR" altLang="en-US" b="1" dirty="0" smtClean="0">
                 <a:solidFill>
                   <a:schemeClr val="tx1"/>
@@ -8208,106 +8281,20 @@
               <a:buChar char="-"/>
             </a:pPr>
             <a:r>
-              <a:rPr lang="en-US" altLang="ko-KR" b="1" dirty="0" err="1" smtClean="0">
-                <a:solidFill>
-                  <a:schemeClr val="tx1"/>
-                </a:solidFill>
-              </a:rPr>
-              <a:t>Github</a:t>
-            </a:r>
-            <a:r>
-              <a:rPr lang="ko-KR" altLang="en-US" b="1" smtClean="0">
-                <a:solidFill>
-                  <a:schemeClr val="tx1"/>
-                </a:solidFill>
-              </a:rPr>
-              <a:t> 업로드 방법</a:t>
-            </a:r>
-            <a:r>
-              <a:rPr lang="en-US" altLang="ko-KR" b="1" dirty="0" smtClean="0">
-                <a:solidFill>
-                  <a:schemeClr val="tx1"/>
-                </a:solidFill>
-              </a:rPr>
-              <a:t> </a:t>
-            </a:r>
-            <a:r>
-              <a:rPr lang="ko-KR" altLang="en-US" b="1" smtClean="0">
-                <a:solidFill>
-                  <a:schemeClr val="tx1"/>
-                </a:solidFill>
-              </a:rPr>
-              <a:t>찾기</a:t>
-            </a:r>
-            <a:r>
-              <a:rPr lang="en-US" altLang="ko-KR" b="1" dirty="0" smtClean="0">
-                <a:solidFill>
-                  <a:schemeClr val="tx1"/>
-                </a:solidFill>
-              </a:rPr>
-              <a:t> – </a:t>
-            </a:r>
-            <a:r>
-              <a:rPr lang="en-US" altLang="ko-KR" b="1" dirty="0" err="1" smtClean="0">
-                <a:solidFill>
-                  <a:schemeClr val="tx1"/>
-                </a:solidFill>
-              </a:rPr>
-              <a:t>i</a:t>
-            </a:r>
-            <a:r>
-              <a:rPr lang="en-US" altLang="ko-KR" b="1" dirty="0" smtClean="0">
-                <a:solidFill>
-                  <a:schemeClr val="tx1"/>
-                </a:solidFill>
-              </a:rPr>
-              <a:t>-privacy </a:t>
-            </a:r>
-            <a:r>
-              <a:rPr lang="ko-KR" altLang="en-US" b="1" smtClean="0">
-                <a:solidFill>
-                  <a:schemeClr val="tx1"/>
-                </a:solidFill>
-              </a:rPr>
-              <a:t>허가</a:t>
-            </a:r>
-            <a:r>
-              <a:rPr lang="en-US" altLang="ko-KR" b="1" dirty="0" smtClean="0">
-                <a:solidFill>
-                  <a:schemeClr val="tx1"/>
-                </a:solidFill>
-              </a:rPr>
-              <a:t> </a:t>
-            </a:r>
-            <a:r>
-              <a:rPr lang="ko-KR" altLang="en-US" b="1" smtClean="0">
-                <a:solidFill>
-                  <a:schemeClr val="tx1"/>
-                </a:solidFill>
-              </a:rPr>
-              <a:t>안해줄듯</a:t>
-            </a:r>
-            <a:endParaRPr lang="en-US" altLang="ko-KR" b="1" dirty="0" smtClean="0">
-              <a:solidFill>
-                <a:schemeClr val="tx1"/>
-              </a:solidFill>
-            </a:endParaRPr>
-          </a:p>
-          <a:p>
-            <a:pPr marL="800100" lvl="1" indent="-342900">
-              <a:lnSpc>
-                <a:spcPct val="150000"/>
-              </a:lnSpc>
-              <a:buFontTx/>
-              <a:buChar char="-"/>
-            </a:pPr>
-            <a:r>
               <a:rPr lang="ko-KR" altLang="en-US" b="1" dirty="0" smtClean="0">
                 <a:solidFill>
                   <a:schemeClr val="tx1"/>
                 </a:solidFill>
               </a:rPr>
-              <a:t>전시회 시연 고려 </a:t>
+              <a:t>전시회 </a:t>
+            </a:r>
+            <a:r>
+              <a:rPr lang="ko-KR" altLang="en-US" b="1" dirty="0" smtClean="0">
+                <a:solidFill>
+                  <a:schemeClr val="tx1"/>
+                </a:solidFill>
+              </a:rPr>
+              <a:t>시연 고려 </a:t>
             </a:r>
             <a:r>
               <a:rPr lang="en-US" altLang="ko-KR" b="1" dirty="0" smtClean="0">

--- a/LG_부트캠프_12기_C반_프로젝트일정_및_최종제출결과물_3팀/4.LG_부트캠프_12기_C반_결과보고서(3팀)_v1.pptx
+++ b/LG_부트캠프_12기_C반_프로젝트일정_및_최종제출결과물_3팀/4.LG_부트캠프_12기_C반_결과보고서(3팀)_v1.pptx
@@ -6921,76 +6921,14 @@
       </p:grpSpPr>
       <p:sp>
         <p:nvSpPr>
-          <p:cNvPr id="2" name="TextBox 1"/>
-          <p:cNvSpPr txBox="1"/>
-          <p:nvPr/>
-        </p:nvSpPr>
-        <p:spPr>
-          <a:xfrm>
-            <a:off x="244862" y="238662"/>
-            <a:ext cx="14190667" cy="923330"/>
-          </a:xfrm>
-          <a:prstGeom prst="rect">
-            <a:avLst/>
-          </a:prstGeom>
-          <a:noFill/>
-        </p:spPr>
-        <p:txBody>
-          <a:bodyPr wrap="square" rtlCol="0">
-            <a:spAutoFit/>
-          </a:bodyPr>
-          <a:lstStyle/>
-          <a:p>
-            <a:r>
-              <a:rPr lang="en-US" altLang="ko-KR" sz="5400" b="1" dirty="0" smtClean="0">
-                <a:solidFill>
-                  <a:schemeClr val="bg1"/>
-                </a:solidFill>
-                <a:latin typeface="LG스마트체2.0 Regular" panose="020B0600000101010101" pitchFamily="50" charset="-127"/>
-                <a:ea typeface="LG스마트체2.0 Regular" panose="020B0600000101010101" pitchFamily="50" charset="-127"/>
-              </a:rPr>
-              <a:t>0. </a:t>
-            </a:r>
-            <a:r>
-              <a:rPr lang="ko-KR" altLang="en-US" sz="5400" b="1" smtClean="0">
-                <a:solidFill>
-                  <a:schemeClr val="bg1"/>
-                </a:solidFill>
-                <a:latin typeface="LG스마트체2.0 Regular" panose="020B0600000101010101" pitchFamily="50" charset="-127"/>
-                <a:ea typeface="LG스마트체2.0 Regular" panose="020B0600000101010101" pitchFamily="50" charset="-127"/>
-              </a:rPr>
-              <a:t>기획</a:t>
-            </a:r>
-            <a:r>
-              <a:rPr lang="en-US" altLang="ko-KR" sz="5400" b="1" dirty="0" smtClean="0">
-                <a:solidFill>
-                  <a:schemeClr val="bg1"/>
-                </a:solidFill>
-                <a:latin typeface="LG스마트체2.0 Regular" panose="020B0600000101010101" pitchFamily="50" charset="-127"/>
-                <a:ea typeface="LG스마트체2.0 Regular" panose="020B0600000101010101" pitchFamily="50" charset="-127"/>
-              </a:rPr>
-              <a:t>(260417)</a:t>
-            </a:r>
-            <a:endParaRPr lang="ko-KR" altLang="en-US" sz="5400" b="1" dirty="0">
-              <a:solidFill>
-                <a:schemeClr val="bg1"/>
-              </a:solidFill>
-              <a:latin typeface="LG스마트체2.0 Regular" panose="020B0600000101010101" pitchFamily="50" charset="-127"/>
-              <a:ea typeface="LG스마트체2.0 Regular" panose="020B0600000101010101" pitchFamily="50" charset="-127"/>
-            </a:endParaRPr>
-          </a:p>
-        </p:txBody>
-      </p:sp>
-      <p:sp>
-        <p:nvSpPr>
-          <p:cNvPr id="5" name="직사각형 4"/>
+          <p:cNvPr id="21" name="직사각형 20"/>
           <p:cNvSpPr/>
           <p:nvPr/>
         </p:nvSpPr>
         <p:spPr>
           <a:xfrm>
-            <a:off x="701540" y="1561514"/>
-            <a:ext cx="16410803" cy="8653640"/>
+            <a:off x="8857633" y="1561514"/>
+            <a:ext cx="7743960" cy="8653640"/>
           </a:xfrm>
           <a:prstGeom prst="rect">
             <a:avLst/>
@@ -7027,12 +6965,42 @@
               <a:buChar char="-"/>
             </a:pPr>
             <a:r>
+              <a:rPr lang="ko-KR" altLang="en-US" b="1" dirty="0" smtClean="0">
+                <a:solidFill>
+                  <a:schemeClr val="tx1"/>
+                </a:solidFill>
+              </a:rPr>
+              <a:t>구현</a:t>
+            </a:r>
+            <a:endParaRPr lang="en-US" altLang="ko-KR" b="1" dirty="0" smtClean="0">
+              <a:solidFill>
+                <a:schemeClr val="tx1"/>
+              </a:solidFill>
+            </a:endParaRPr>
+          </a:p>
+          <a:p>
+            <a:pPr marL="800100" lvl="1" indent="-342900">
+              <a:lnSpc>
+                <a:spcPct val="150000"/>
+              </a:lnSpc>
+              <a:buFontTx/>
+              <a:buChar char="-"/>
+            </a:pPr>
+            <a:r>
+              <a:rPr lang="ko-KR" altLang="en-US" b="1" dirty="0">
+                <a:solidFill>
+                  <a:schemeClr val="tx1"/>
+                </a:solidFill>
+              </a:rPr>
+              <a:t>참가자 </a:t>
+            </a:r>
+            <a:r>
               <a:rPr lang="en-US" altLang="ko-KR" b="1" dirty="0">
                 <a:solidFill>
                   <a:schemeClr val="tx1"/>
                 </a:solidFill>
               </a:rPr>
-              <a:t>telnet </a:t>
+              <a:t>1</a:t>
             </a:r>
             <a:r>
               <a:rPr lang="ko-KR" altLang="en-US" b="1">
@@ -7040,7 +7008,7 @@
                   <a:schemeClr val="tx1"/>
                 </a:solidFill>
               </a:rPr>
-              <a:t>끊기는 경우</a:t>
+              <a:t>이 제출한 상태에서 참가자 </a:t>
             </a:r>
             <a:r>
               <a:rPr lang="en-US" altLang="ko-KR" b="1" dirty="0">
@@ -7048,7 +7016,78 @@
                   <a:schemeClr val="tx1"/>
                 </a:solidFill>
               </a:rPr>
-              <a:t>.. </a:t>
+              <a:t>2</a:t>
+            </a:r>
+            <a:r>
+              <a:rPr lang="ko-KR" altLang="en-US" b="1">
+                <a:solidFill>
+                  <a:schemeClr val="tx1"/>
+                </a:solidFill>
+              </a:rPr>
+              <a:t>가 제출하고 </a:t>
+            </a:r>
+            <a:r>
+              <a:rPr lang="en-US" altLang="ko-KR" b="1" dirty="0">
+                <a:solidFill>
+                  <a:schemeClr val="tx1"/>
+                </a:solidFill>
+              </a:rPr>
+              <a:t>NG </a:t>
+            </a:r>
+            <a:r>
+              <a:rPr lang="ko-KR" altLang="en-US" b="1">
+                <a:solidFill>
+                  <a:schemeClr val="tx1"/>
+                </a:solidFill>
+              </a:rPr>
+              <a:t>터치하면 참가자 </a:t>
+            </a:r>
+            <a:r>
+              <a:rPr lang="en-US" altLang="ko-KR" b="1" dirty="0">
+                <a:solidFill>
+                  <a:schemeClr val="tx1"/>
+                </a:solidFill>
+              </a:rPr>
+              <a:t>2</a:t>
+            </a:r>
+            <a:r>
+              <a:rPr lang="ko-KR" altLang="en-US" b="1">
+                <a:solidFill>
+                  <a:schemeClr val="tx1"/>
+                </a:solidFill>
+              </a:rPr>
+              <a:t>가 </a:t>
+            </a:r>
+            <a:r>
+              <a:rPr lang="ko-KR" altLang="en-US" b="1" smtClean="0">
+                <a:solidFill>
+                  <a:schemeClr val="tx1"/>
+                </a:solidFill>
+              </a:rPr>
+              <a:t>끊김</a:t>
+            </a:r>
+            <a:r>
+              <a:rPr lang="en-US" altLang="ko-KR" b="1" dirty="0">
+                <a:solidFill>
+                  <a:schemeClr val="tx1"/>
+                </a:solidFill>
+              </a:rPr>
+              <a:t/>
+            </a:r>
+            <a:br>
+              <a:rPr lang="en-US" altLang="ko-KR" b="1" dirty="0">
+                <a:solidFill>
+                  <a:schemeClr val="tx1"/>
+                </a:solidFill>
+              </a:rPr>
+            </a:br>
+            <a:r>
+              <a:rPr lang="ko-KR" altLang="en-US" b="1" smtClean="0">
+                <a:solidFill>
+                  <a:schemeClr val="tx1"/>
+                </a:solidFill>
+              </a:rPr>
+              <a:t>참가자 </a:t>
             </a:r>
             <a:r>
               <a:rPr lang="en-US" altLang="ko-KR" b="1" dirty="0" smtClean="0">
@@ -7056,7 +7095,7 @@
                   <a:schemeClr val="tx1"/>
                 </a:solidFill>
               </a:rPr>
-              <a:t>-&gt; </a:t>
+              <a:t>1</a:t>
             </a:r>
             <a:r>
               <a:rPr lang="ko-KR" altLang="en-US" b="1" smtClean="0">
@@ -7064,7 +7103,7 @@
                   <a:schemeClr val="tx1"/>
                 </a:solidFill>
               </a:rPr>
-              <a:t>보드 </a:t>
+              <a:t>이 제출한 상태에서 참가자 </a:t>
             </a:r>
             <a:r>
               <a:rPr lang="en-US" altLang="ko-KR" b="1" dirty="0" smtClean="0">
@@ -7072,31 +7111,331 @@
                   <a:schemeClr val="tx1"/>
                 </a:solidFill>
               </a:rPr>
-              <a:t>2,3 </a:t>
-            </a:r>
-            <a:r>
-              <a:rPr lang="en-US" altLang="ko-KR" b="1" dirty="0" err="1" smtClean="0">
-                <a:solidFill>
-                  <a:schemeClr val="tx1"/>
-                </a:solidFill>
-              </a:rPr>
-              <a:t>Brrootfs</a:t>
-            </a:r>
+              <a:t>2</a:t>
+            </a:r>
+            <a:r>
+              <a:rPr lang="ko-KR" altLang="en-US" b="1" smtClean="0">
+                <a:solidFill>
+                  <a:schemeClr val="tx1"/>
+                </a:solidFill>
+              </a:rPr>
+              <a:t>가 제출 못하도록 원복하자</a:t>
+            </a:r>
+            <a:endParaRPr lang="en-US" altLang="ko-KR" b="1" dirty="0" smtClean="0">
+              <a:solidFill>
+                <a:schemeClr val="tx1"/>
+              </a:solidFill>
+            </a:endParaRPr>
+          </a:p>
+          <a:p>
+            <a:pPr marL="800100" lvl="1" indent="-342900">
+              <a:lnSpc>
+                <a:spcPct val="150000"/>
+              </a:lnSpc>
+              <a:buFontTx/>
+              <a:buChar char="-"/>
+            </a:pPr>
             <a:r>
               <a:rPr lang="en-US" altLang="ko-KR" b="1" dirty="0" smtClean="0">
                 <a:solidFill>
                   <a:schemeClr val="tx1"/>
                 </a:solidFill>
               </a:rPr>
+              <a:t>6.12.81 </a:t>
+            </a:r>
+            <a:r>
+              <a:rPr lang="ko-KR" altLang="en-US" b="1" smtClean="0">
+                <a:solidFill>
+                  <a:schemeClr val="tx1"/>
+                </a:solidFill>
+              </a:rPr>
+              <a:t>리눅스 </a:t>
+            </a:r>
+            <a:r>
+              <a:rPr lang="ko-KR" altLang="en-US" b="1" dirty="0" err="1" smtClean="0">
+                <a:solidFill>
+                  <a:schemeClr val="tx1"/>
+                </a:solidFill>
+              </a:rPr>
+              <a:t>커널</a:t>
+            </a:r>
+            <a:r>
+              <a:rPr lang="ko-KR" altLang="en-US" b="1" dirty="0" smtClean="0">
+                <a:solidFill>
+                  <a:schemeClr val="tx1"/>
+                </a:solidFill>
+              </a:rPr>
+              <a:t> 이미지 </a:t>
+            </a:r>
+            <a:r>
+              <a:rPr lang="ko-KR" altLang="en-US" b="1" smtClean="0">
+                <a:solidFill>
+                  <a:schemeClr val="tx1"/>
+                </a:solidFill>
+              </a:rPr>
+              <a:t>보드에 업로드 </a:t>
+            </a:r>
+            <a:endParaRPr lang="en-US" altLang="ko-KR" b="1" dirty="0" smtClean="0">
+              <a:solidFill>
+                <a:schemeClr val="tx1"/>
+              </a:solidFill>
+            </a:endParaRPr>
+          </a:p>
+          <a:p>
+            <a:pPr marL="800100" lvl="1" indent="-342900">
+              <a:lnSpc>
+                <a:spcPct val="150000"/>
+              </a:lnSpc>
+              <a:buFontTx/>
+              <a:buChar char="-"/>
+            </a:pPr>
+            <a:r>
+              <a:rPr lang="ko-KR" altLang="en-US" b="1" dirty="0" smtClean="0">
+                <a:solidFill>
+                  <a:schemeClr val="tx1"/>
+                </a:solidFill>
+              </a:rPr>
+              <a:t>참가자</a:t>
+            </a:r>
+            <a:r>
+              <a:rPr lang="en-US" altLang="ko-KR" b="1" dirty="0" smtClean="0">
+                <a:solidFill>
+                  <a:schemeClr val="tx1"/>
+                </a:solidFill>
+              </a:rPr>
+              <a:t>/</a:t>
+            </a:r>
+            <a:r>
+              <a:rPr lang="ko-KR" altLang="en-US" b="1" smtClean="0">
+                <a:solidFill>
+                  <a:schemeClr val="tx1"/>
+                </a:solidFill>
+              </a:rPr>
+              <a:t>출제자 화면에 </a:t>
+            </a:r>
+            <a:r>
+              <a:rPr lang="ko-KR" altLang="en-US" b="1" dirty="0" smtClean="0">
+                <a:solidFill>
+                  <a:schemeClr val="tx1"/>
+                </a:solidFill>
+              </a:rPr>
+              <a:t>지우개 기능</a:t>
+            </a:r>
+            <a:endParaRPr lang="en-US" altLang="ko-KR" b="1" dirty="0" smtClean="0">
+              <a:solidFill>
+                <a:schemeClr val="tx1"/>
+              </a:solidFill>
+            </a:endParaRPr>
+          </a:p>
+          <a:p>
+            <a:pPr marL="800100" lvl="1" indent="-342900">
+              <a:lnSpc>
+                <a:spcPct val="150000"/>
+              </a:lnSpc>
+              <a:buFontTx/>
+              <a:buChar char="-"/>
+            </a:pPr>
+            <a:r>
+              <a:rPr lang="ko-KR" altLang="en-US" b="1" dirty="0" smtClean="0">
+                <a:solidFill>
+                  <a:schemeClr val="tx1"/>
+                </a:solidFill>
+              </a:rPr>
+              <a:t>음악 </a:t>
+            </a:r>
+            <a:r>
+              <a:rPr lang="ko-KR" altLang="en-US" b="1" dirty="0" err="1" smtClean="0">
+                <a:solidFill>
+                  <a:schemeClr val="tx1"/>
+                </a:solidFill>
+              </a:rPr>
+              <a:t>싱크</a:t>
+            </a:r>
+            <a:r>
+              <a:rPr lang="ko-KR" altLang="en-US" b="1" dirty="0" smtClean="0">
+                <a:solidFill>
+                  <a:schemeClr val="tx1"/>
+                </a:solidFill>
+              </a:rPr>
+              <a:t> 맞추기</a:t>
+            </a:r>
+            <a:endParaRPr lang="en-US" altLang="ko-KR" b="1" dirty="0" smtClean="0">
+              <a:solidFill>
+                <a:schemeClr val="tx1"/>
+              </a:solidFill>
+            </a:endParaRPr>
+          </a:p>
+          <a:p>
+            <a:pPr marL="800100" lvl="1" indent="-342900">
+              <a:lnSpc>
+                <a:spcPct val="150000"/>
+              </a:lnSpc>
+              <a:buFontTx/>
+              <a:buChar char="-"/>
+            </a:pPr>
+            <a:r>
+              <a:rPr lang="ko-KR" altLang="en-US" b="1" dirty="0" smtClean="0">
+                <a:solidFill>
+                  <a:schemeClr val="tx1"/>
+                </a:solidFill>
+              </a:rPr>
+              <a:t>일정 </a:t>
+            </a:r>
+            <a:r>
+              <a:rPr lang="ko-KR" altLang="en-US" b="1" dirty="0">
+                <a:solidFill>
+                  <a:schemeClr val="tx1"/>
+                </a:solidFill>
+              </a:rPr>
+              <a:t>시간 못 맞추면 힌트로 카테고리 </a:t>
+            </a:r>
+            <a:r>
+              <a:rPr lang="ko-KR" altLang="en-US" b="1" dirty="0" smtClean="0">
+                <a:solidFill>
+                  <a:schemeClr val="tx1"/>
+                </a:solidFill>
+              </a:rPr>
+              <a:t>출력</a:t>
+            </a:r>
+            <a:endParaRPr lang="en-US" altLang="ko-KR" b="1" dirty="0" smtClean="0">
+              <a:solidFill>
+                <a:schemeClr val="tx1"/>
+              </a:solidFill>
+            </a:endParaRPr>
+          </a:p>
+          <a:p>
+            <a:pPr marL="800100" lvl="1" indent="-342900">
+              <a:lnSpc>
+                <a:spcPct val="150000"/>
+              </a:lnSpc>
+              <a:buFontTx/>
+              <a:buChar char="-"/>
+            </a:pPr>
+            <a:r>
+              <a:rPr lang="en-US" altLang="ko-KR" b="1" dirty="0" smtClean="0">
+                <a:solidFill>
+                  <a:schemeClr val="tx1"/>
+                </a:solidFill>
+              </a:rPr>
+              <a:t>UI </a:t>
+            </a:r>
+            <a:r>
+              <a:rPr lang="ko-KR" altLang="en-US" b="1" smtClean="0">
+                <a:solidFill>
+                  <a:schemeClr val="tx1"/>
+                </a:solidFill>
+              </a:rPr>
+              <a:t>화면 추가</a:t>
+            </a:r>
+            <a:r>
+              <a:rPr lang="en-US" altLang="ko-KR" b="1" dirty="0" smtClean="0">
+                <a:solidFill>
+                  <a:schemeClr val="tx1"/>
+                </a:solidFill>
+              </a:rPr>
+              <a:t>(</a:t>
+            </a:r>
+            <a:r>
+              <a:rPr lang="ko-KR" altLang="en-US" b="1" smtClean="0">
+                <a:solidFill>
+                  <a:schemeClr val="tx1"/>
+                </a:solidFill>
+              </a:rPr>
+              <a:t>게임 시작 화면</a:t>
+            </a:r>
+            <a:r>
+              <a:rPr lang="en-US" altLang="ko-KR" b="1" dirty="0" smtClean="0">
+                <a:solidFill>
+                  <a:schemeClr val="tx1"/>
+                </a:solidFill>
+              </a:rPr>
+              <a:t>, </a:t>
+            </a:r>
+            <a:r>
+              <a:rPr lang="ko-KR" altLang="en-US" b="1" smtClean="0">
+                <a:solidFill>
+                  <a:schemeClr val="tx1"/>
+                </a:solidFill>
+              </a:rPr>
+              <a:t>케릭터 </a:t>
+            </a:r>
+            <a:r>
+              <a:rPr lang="ko-KR" altLang="en-US" b="1" smtClean="0">
+                <a:solidFill>
+                  <a:schemeClr val="tx1"/>
+                </a:solidFill>
+              </a:rPr>
+              <a:t>추가</a:t>
+            </a:r>
+            <a:r>
+              <a:rPr lang="en-US" altLang="ko-KR" b="1" dirty="0" smtClean="0">
+                <a:solidFill>
+                  <a:schemeClr val="tx1"/>
+                </a:solidFill>
+              </a:rPr>
+              <a:t>)</a:t>
+            </a:r>
+            <a:r>
+              <a:rPr lang="ko-KR" altLang="en-US" b="1" smtClean="0">
+                <a:solidFill>
+                  <a:schemeClr val="tx1"/>
+                </a:solidFill>
+              </a:rPr>
               <a:t> </a:t>
             </a:r>
+            <a:endParaRPr lang="en-US" altLang="ko-KR" b="1" dirty="0" smtClean="0">
+              <a:solidFill>
+                <a:schemeClr val="tx1"/>
+              </a:solidFill>
+            </a:endParaRPr>
+          </a:p>
+          <a:p>
+            <a:pPr marL="800100" lvl="1" indent="-342900">
+              <a:lnSpc>
+                <a:spcPct val="150000"/>
+              </a:lnSpc>
+              <a:buFontTx/>
+              <a:buChar char="-"/>
+            </a:pPr>
+            <a:r>
+              <a:rPr lang="ko-KR" altLang="en-US" b="1" dirty="0" err="1" smtClean="0">
+                <a:solidFill>
+                  <a:schemeClr val="tx1"/>
+                </a:solidFill>
+              </a:rPr>
+              <a:t>점수제</a:t>
+            </a:r>
+            <a:r>
+              <a:rPr lang="ko-KR" altLang="en-US" b="1" dirty="0" smtClean="0">
+                <a:solidFill>
+                  <a:schemeClr val="tx1"/>
+                </a:solidFill>
+              </a:rPr>
+              <a:t> </a:t>
+            </a:r>
+            <a:r>
+              <a:rPr lang="ko-KR" altLang="en-US" b="1" dirty="0" smtClean="0">
+                <a:solidFill>
+                  <a:schemeClr val="tx1"/>
+                </a:solidFill>
+              </a:rPr>
+              <a:t>룰 </a:t>
+            </a:r>
+            <a:r>
+              <a:rPr lang="en-US" altLang="ko-KR" b="1" dirty="0" smtClean="0">
+                <a:solidFill>
+                  <a:schemeClr val="tx1"/>
+                </a:solidFill>
+              </a:rPr>
+              <a:t>(5</a:t>
+            </a:r>
             <a:r>
               <a:rPr lang="ko-KR" altLang="en-US" b="1" smtClean="0">
                 <a:solidFill>
                   <a:schemeClr val="tx1"/>
                 </a:solidFill>
               </a:rPr>
-              <a:t>이미지 구워서 업로드</a:t>
+              <a:t>라운드</a:t>
             </a:r>
             <a:r>
               <a:rPr lang="en-US" altLang="ko-KR" b="1" dirty="0" smtClean="0">
@@ -7104,6 +7443,240 @@
                   <a:schemeClr val="tx1"/>
                 </a:solidFill>
               </a:rPr>
+              <a:t>, 60</a:t>
+            </a:r>
+            <a:r>
+              <a:rPr lang="ko-KR" altLang="en-US" b="1" smtClean="0">
+                <a:solidFill>
+                  <a:schemeClr val="tx1"/>
+                </a:solidFill>
+              </a:rPr>
+              <a:t>초 </a:t>
+            </a:r>
+            <a:r>
+              <a:rPr lang="en-US" altLang="ko-KR" b="1" dirty="0" smtClean="0">
+                <a:solidFill>
+                  <a:schemeClr val="tx1"/>
+                </a:solidFill>
+              </a:rPr>
+              <a:t>-&gt; 0</a:t>
+            </a:r>
+            <a:r>
+              <a:rPr lang="ko-KR" altLang="en-US" b="1" smtClean="0">
+                <a:solidFill>
+                  <a:schemeClr val="tx1"/>
+                </a:solidFill>
+              </a:rPr>
+              <a:t>초</a:t>
+            </a:r>
+            <a:r>
+              <a:rPr lang="en-US" altLang="ko-KR" b="1" dirty="0" smtClean="0">
+                <a:solidFill>
+                  <a:schemeClr val="tx1"/>
+                </a:solidFill>
+              </a:rPr>
+              <a:t>)</a:t>
+            </a:r>
+            <a:endParaRPr lang="en-US" altLang="ko-KR" b="1" dirty="0">
+              <a:solidFill>
+                <a:schemeClr val="tx1"/>
+              </a:solidFill>
+            </a:endParaRPr>
+          </a:p>
+          <a:p>
+            <a:pPr marL="1257300" lvl="2" indent="-342900">
+              <a:lnSpc>
+                <a:spcPct val="150000"/>
+              </a:lnSpc>
+              <a:buFontTx/>
+              <a:buChar char="-"/>
+            </a:pPr>
+            <a:r>
+              <a:rPr lang="ko-KR" altLang="en-US" b="1" dirty="0" smtClean="0">
+                <a:solidFill>
+                  <a:schemeClr val="tx1"/>
+                </a:solidFill>
+              </a:rPr>
+              <a:t>최초 출제자는 선착순</a:t>
+            </a:r>
+            <a:endParaRPr lang="en-US" altLang="ko-KR" b="1" dirty="0" smtClean="0">
+              <a:solidFill>
+                <a:schemeClr val="tx1"/>
+              </a:solidFill>
+            </a:endParaRPr>
+          </a:p>
+          <a:p>
+            <a:pPr marL="1257300" lvl="2" indent="-342900">
+              <a:lnSpc>
+                <a:spcPct val="150000"/>
+              </a:lnSpc>
+              <a:buFontTx/>
+              <a:buChar char="-"/>
+            </a:pPr>
+            <a:r>
+              <a:rPr lang="en-US" altLang="ko-KR" b="1" dirty="0" smtClean="0">
+                <a:solidFill>
+                  <a:schemeClr val="tx1"/>
+                </a:solidFill>
+              </a:rPr>
+              <a:t>60 ~ 30</a:t>
+            </a:r>
+            <a:r>
+              <a:rPr lang="ko-KR" altLang="en-US" b="1" smtClean="0">
+                <a:solidFill>
+                  <a:schemeClr val="tx1"/>
+                </a:solidFill>
+              </a:rPr>
+              <a:t>초 </a:t>
+            </a:r>
+            <a:r>
+              <a:rPr lang="en-US" altLang="ko-KR" b="1" dirty="0" smtClean="0">
+                <a:solidFill>
+                  <a:schemeClr val="tx1"/>
+                </a:solidFill>
+              </a:rPr>
+              <a:t>– </a:t>
+            </a:r>
+            <a:r>
+              <a:rPr lang="ko-KR" altLang="en-US" b="1" smtClean="0">
+                <a:solidFill>
+                  <a:schemeClr val="tx1"/>
+                </a:solidFill>
+              </a:rPr>
+              <a:t>출제자의 문제를 맞추면</a:t>
+            </a:r>
+            <a:r>
+              <a:rPr lang="en-US" altLang="ko-KR" b="1" dirty="0" smtClean="0">
+                <a:solidFill>
+                  <a:schemeClr val="tx1"/>
+                </a:solidFill>
+              </a:rPr>
+              <a:t>,</a:t>
+            </a:r>
+            <a:r>
+              <a:rPr lang="ko-KR" altLang="en-US" b="1" smtClean="0">
+                <a:solidFill>
+                  <a:schemeClr val="tx1"/>
+                </a:solidFill>
+              </a:rPr>
+              <a:t> 출제자가 </a:t>
+            </a:r>
+            <a:r>
+              <a:rPr lang="en-US" altLang="ko-KR" b="1" dirty="0" smtClean="0">
+                <a:solidFill>
+                  <a:schemeClr val="tx1"/>
+                </a:solidFill>
+              </a:rPr>
+              <a:t>2</a:t>
+            </a:r>
+            <a:r>
+              <a:rPr lang="ko-KR" altLang="en-US" b="1" smtClean="0">
+                <a:solidFill>
+                  <a:schemeClr val="tx1"/>
+                </a:solidFill>
+              </a:rPr>
+              <a:t>점 획득</a:t>
+            </a:r>
+            <a:r>
+              <a:rPr lang="en-US" altLang="ko-KR" b="1" dirty="0" smtClean="0">
+                <a:solidFill>
+                  <a:schemeClr val="tx1"/>
+                </a:solidFill>
+              </a:rPr>
+              <a:t>, </a:t>
+            </a:r>
+            <a:r>
+              <a:rPr lang="ko-KR" altLang="en-US" b="1" smtClean="0">
+                <a:solidFill>
+                  <a:schemeClr val="tx1"/>
+                </a:solidFill>
+              </a:rPr>
+              <a:t>참가자는 </a:t>
+            </a:r>
+            <a:r>
+              <a:rPr lang="en-US" altLang="ko-KR" b="1" dirty="0" smtClean="0">
+                <a:solidFill>
+                  <a:schemeClr val="tx1"/>
+                </a:solidFill>
+              </a:rPr>
+              <a:t>3</a:t>
+            </a:r>
+            <a:r>
+              <a:rPr lang="ko-KR" altLang="en-US" b="1" smtClean="0">
+                <a:solidFill>
+                  <a:schemeClr val="tx1"/>
+                </a:solidFill>
+              </a:rPr>
+              <a:t>점 획득</a:t>
+            </a:r>
+            <a:endParaRPr lang="en-US" altLang="ko-KR" b="1" dirty="0" smtClean="0">
+              <a:solidFill>
+                <a:schemeClr val="tx1"/>
+              </a:solidFill>
+            </a:endParaRPr>
+          </a:p>
+          <a:p>
+            <a:pPr marL="1257300" lvl="2" indent="-342900">
+              <a:lnSpc>
+                <a:spcPct val="150000"/>
+              </a:lnSpc>
+              <a:buFontTx/>
+              <a:buChar char="-"/>
+            </a:pPr>
+            <a:r>
+              <a:rPr lang="en-US" altLang="ko-KR" b="1" dirty="0" smtClean="0">
+                <a:solidFill>
+                  <a:schemeClr val="tx1"/>
+                </a:solidFill>
+              </a:rPr>
+              <a:t>30</a:t>
+            </a:r>
+            <a:r>
+              <a:rPr lang="ko-KR" altLang="en-US" b="1">
+                <a:solidFill>
+                  <a:schemeClr val="tx1"/>
+                </a:solidFill>
+              </a:rPr>
+              <a:t> </a:t>
+            </a:r>
+            <a:r>
+              <a:rPr lang="en-US" altLang="ko-KR" b="1" dirty="0" smtClean="0">
+                <a:solidFill>
+                  <a:schemeClr val="tx1"/>
+                </a:solidFill>
+              </a:rPr>
+              <a:t>~ 0</a:t>
+            </a:r>
+            <a:r>
+              <a:rPr lang="ko-KR" altLang="en-US" b="1" smtClean="0">
+                <a:solidFill>
+                  <a:schemeClr val="tx1"/>
+                </a:solidFill>
+              </a:rPr>
+              <a:t>초 </a:t>
+            </a:r>
+            <a:r>
+              <a:rPr lang="en-US" altLang="ko-KR" b="1" dirty="0" smtClean="0">
+                <a:solidFill>
+                  <a:schemeClr val="tx1"/>
+                </a:solidFill>
+              </a:rPr>
+              <a:t>– </a:t>
+            </a:r>
+            <a:r>
+              <a:rPr lang="ko-KR" altLang="en-US" b="1" smtClean="0">
+                <a:solidFill>
+                  <a:schemeClr val="tx1"/>
+                </a:solidFill>
+              </a:rPr>
+              <a:t>힌트 출력</a:t>
+            </a:r>
+            <a:r>
+              <a:rPr lang="en-US" altLang="ko-KR" b="1" dirty="0" smtClean="0">
+                <a:solidFill>
+                  <a:schemeClr val="tx1"/>
+                </a:solidFill>
+              </a:rPr>
               <a:t>(</a:t>
             </a:r>
             <a:r>
@@ -7112,7 +7685,7 @@
                   <a:schemeClr val="tx1"/>
                 </a:solidFill>
               </a:rPr>
-              <a:t>완</a:t>
+              <a:t>카테고리</a:t>
             </a:r>
             <a:r>
               <a:rPr lang="en-US" altLang="ko-KR" b="1" dirty="0" smtClean="0">
@@ -7120,9 +7693,207 @@
                   <a:schemeClr val="tx1"/>
                 </a:solidFill>
               </a:rPr>
-              <a:t>)</a:t>
-            </a:r>
-            <a:endParaRPr lang="en-US" altLang="ko-KR" b="1" dirty="0">
+              <a:t>). </a:t>
+            </a:r>
+            <a:r>
+              <a:rPr lang="ko-KR" altLang="en-US" b="1" smtClean="0">
+                <a:solidFill>
+                  <a:schemeClr val="tx1"/>
+                </a:solidFill>
+              </a:rPr>
+              <a:t>출제자의 </a:t>
+            </a:r>
+            <a:r>
+              <a:rPr lang="ko-KR" altLang="en-US" b="1">
+                <a:solidFill>
+                  <a:schemeClr val="tx1"/>
+                </a:solidFill>
+              </a:rPr>
+              <a:t>문제를 맞추면</a:t>
+            </a:r>
+            <a:r>
+              <a:rPr lang="en-US" altLang="ko-KR" b="1" dirty="0">
+                <a:solidFill>
+                  <a:schemeClr val="tx1"/>
+                </a:solidFill>
+              </a:rPr>
+              <a:t>,</a:t>
+            </a:r>
+            <a:r>
+              <a:rPr lang="ko-KR" altLang="en-US" b="1">
+                <a:solidFill>
+                  <a:schemeClr val="tx1"/>
+                </a:solidFill>
+              </a:rPr>
+              <a:t> 출제자가 </a:t>
+            </a:r>
+            <a:r>
+              <a:rPr lang="en-US" altLang="ko-KR" b="1" dirty="0" smtClean="0">
+                <a:solidFill>
+                  <a:schemeClr val="tx1"/>
+                </a:solidFill>
+              </a:rPr>
+              <a:t>1</a:t>
+            </a:r>
+            <a:r>
+              <a:rPr lang="ko-KR" altLang="en-US" b="1" smtClean="0">
+                <a:solidFill>
+                  <a:schemeClr val="tx1"/>
+                </a:solidFill>
+              </a:rPr>
+              <a:t>점 </a:t>
+            </a:r>
+            <a:r>
+              <a:rPr lang="ko-KR" altLang="en-US" b="1">
+                <a:solidFill>
+                  <a:schemeClr val="tx1"/>
+                </a:solidFill>
+              </a:rPr>
+              <a:t>획득</a:t>
+            </a:r>
+            <a:r>
+              <a:rPr lang="en-US" altLang="ko-KR" b="1" dirty="0">
+                <a:solidFill>
+                  <a:schemeClr val="tx1"/>
+                </a:solidFill>
+              </a:rPr>
+              <a:t>, </a:t>
+            </a:r>
+            <a:r>
+              <a:rPr lang="ko-KR" altLang="en-US" b="1">
+                <a:solidFill>
+                  <a:schemeClr val="tx1"/>
+                </a:solidFill>
+              </a:rPr>
+              <a:t>참가자는 </a:t>
+            </a:r>
+            <a:r>
+              <a:rPr lang="en-US" altLang="ko-KR" b="1" dirty="0" smtClean="0">
+                <a:solidFill>
+                  <a:schemeClr val="tx1"/>
+                </a:solidFill>
+              </a:rPr>
+              <a:t>2</a:t>
+            </a:r>
+            <a:r>
+              <a:rPr lang="ko-KR" altLang="en-US" b="1" smtClean="0">
+                <a:solidFill>
+                  <a:schemeClr val="tx1"/>
+                </a:solidFill>
+              </a:rPr>
+              <a:t>점 획득</a:t>
+            </a:r>
+            <a:endParaRPr lang="en-US" altLang="ko-KR" b="1" dirty="0" smtClean="0">
+              <a:solidFill>
+                <a:schemeClr val="tx1"/>
+              </a:solidFill>
+            </a:endParaRPr>
+          </a:p>
+          <a:p>
+            <a:pPr marL="1257300" lvl="2" indent="-342900">
+              <a:lnSpc>
+                <a:spcPct val="150000"/>
+              </a:lnSpc>
+              <a:buFontTx/>
+              <a:buChar char="-"/>
+            </a:pPr>
+            <a:r>
+              <a:rPr lang="en-US" altLang="ko-KR" b="1" dirty="0" smtClean="0">
+                <a:solidFill>
+                  <a:schemeClr val="tx1"/>
+                </a:solidFill>
+              </a:rPr>
+              <a:t>0</a:t>
+            </a:r>
+            <a:r>
+              <a:rPr lang="ko-KR" altLang="en-US" b="1" smtClean="0">
+                <a:solidFill>
+                  <a:schemeClr val="tx1"/>
+                </a:solidFill>
+              </a:rPr>
+              <a:t>초 이후 </a:t>
+            </a:r>
+            <a:r>
+              <a:rPr lang="en-US" altLang="ko-KR" b="1" dirty="0" smtClean="0">
+                <a:solidFill>
+                  <a:schemeClr val="tx1"/>
+                </a:solidFill>
+              </a:rPr>
+              <a:t>– </a:t>
+            </a:r>
+            <a:r>
+              <a:rPr lang="ko-KR" altLang="en-US" b="1" smtClean="0">
+                <a:solidFill>
+                  <a:schemeClr val="tx1"/>
+                </a:solidFill>
+              </a:rPr>
+              <a:t>바로 종료 후</a:t>
+            </a:r>
+            <a:r>
+              <a:rPr lang="en-US" altLang="ko-KR" b="1" dirty="0" smtClean="0">
+                <a:solidFill>
+                  <a:schemeClr val="tx1"/>
+                </a:solidFill>
+              </a:rPr>
+              <a:t>, </a:t>
+            </a:r>
+            <a:r>
+              <a:rPr lang="ko-KR" altLang="en-US" b="1" smtClean="0">
+                <a:solidFill>
+                  <a:schemeClr val="tx1"/>
+                </a:solidFill>
+              </a:rPr>
+              <a:t>정답 공개</a:t>
+            </a:r>
+            <a:r>
+              <a:rPr lang="en-US" altLang="ko-KR" b="1" dirty="0" smtClean="0">
+                <a:solidFill>
+                  <a:schemeClr val="tx1"/>
+                </a:solidFill>
+              </a:rPr>
+              <a:t>. </a:t>
+            </a:r>
+            <a:r>
+              <a:rPr lang="ko-KR" altLang="en-US" b="1" smtClean="0">
+                <a:solidFill>
+                  <a:schemeClr val="tx1"/>
+                </a:solidFill>
+              </a:rPr>
+              <a:t>출제자 </a:t>
+            </a:r>
+            <a:r>
+              <a:rPr lang="en-US" altLang="ko-KR" b="1" dirty="0" smtClean="0">
+                <a:solidFill>
+                  <a:schemeClr val="tx1"/>
+                </a:solidFill>
+              </a:rPr>
+              <a:t>1</a:t>
+            </a:r>
+            <a:r>
+              <a:rPr lang="ko-KR" altLang="en-US" b="1" smtClean="0">
+                <a:solidFill>
+                  <a:schemeClr val="tx1"/>
+                </a:solidFill>
+              </a:rPr>
+              <a:t>점 감점</a:t>
+            </a:r>
+            <a:r>
+              <a:rPr lang="en-US" altLang="ko-KR" b="1" dirty="0" smtClean="0">
+                <a:solidFill>
+                  <a:schemeClr val="tx1"/>
+                </a:solidFill>
+              </a:rPr>
+              <a:t>, </a:t>
+            </a:r>
+            <a:r>
+              <a:rPr lang="ko-KR" altLang="en-US" b="1" smtClean="0">
+                <a:solidFill>
+                  <a:schemeClr val="tx1"/>
+                </a:solidFill>
+              </a:rPr>
+              <a:t>다음 출제자는 기존 출제자 유지 </a:t>
+            </a:r>
+            <a:endParaRPr lang="en-US" altLang="ko-KR" b="1" dirty="0" smtClean="0">
               <a:solidFill>
                 <a:schemeClr val="tx1"/>
               </a:solidFill>
@@ -7142,23 +7913,83 @@
                   <a:schemeClr val="tx1"/>
                 </a:solidFill>
               </a:rPr>
-              <a:t>참가자가 </a:t>
-            </a:r>
+              <a:t>기타</a:t>
+            </a:r>
+            <a:endParaRPr lang="en-US" altLang="ko-KR" b="1" dirty="0" smtClean="0">
+              <a:solidFill>
+                <a:schemeClr val="tx1"/>
+              </a:solidFill>
+            </a:endParaRPr>
+          </a:p>
+          <a:p>
+            <a:pPr marL="800100" lvl="1" indent="-342900">
+              <a:lnSpc>
+                <a:spcPct val="150000"/>
+              </a:lnSpc>
+              <a:buFontTx/>
+              <a:buChar char="-"/>
+            </a:pPr>
             <a:r>
               <a:rPr lang="ko-KR" altLang="en-US" b="1" dirty="0">
                 <a:solidFill>
                   <a:schemeClr val="tx1"/>
                 </a:solidFill>
               </a:rPr>
-              <a:t>자기의 화면을 알 수 있도록 </a:t>
-            </a:r>
+              <a:t>팀 소개 영상 </a:t>
+            </a:r>
+            <a:r>
+              <a:rPr lang="en-US" altLang="ko-KR" b="1" dirty="0">
+                <a:solidFill>
+                  <a:schemeClr val="tx1"/>
+                </a:solidFill>
+              </a:rPr>
+              <a:t>– </a:t>
+            </a:r>
+            <a:r>
+              <a:rPr lang="ko-KR" altLang="en-US" b="1">
+                <a:solidFill>
+                  <a:schemeClr val="tx1"/>
+                </a:solidFill>
+              </a:rPr>
+              <a:t>월요일 오후 </a:t>
+            </a:r>
+            <a:r>
+              <a:rPr lang="ko-KR" altLang="en-US" b="1" smtClean="0">
+                <a:solidFill>
+                  <a:schemeClr val="tx1"/>
+                </a:solidFill>
+              </a:rPr>
+              <a:t>한시까지 제출</a:t>
+            </a:r>
+            <a:endParaRPr lang="en-US" altLang="ko-KR" b="1" dirty="0" smtClean="0">
+              <a:solidFill>
+                <a:schemeClr val="tx1"/>
+              </a:solidFill>
+            </a:endParaRPr>
+          </a:p>
+          <a:p>
+            <a:pPr marL="800100" lvl="1" indent="-342900">
+              <a:lnSpc>
+                <a:spcPct val="150000"/>
+              </a:lnSpc>
+              <a:buFontTx/>
+              <a:buChar char="-"/>
+            </a:pPr>
             <a:r>
               <a:rPr lang="ko-KR" altLang="en-US" b="1" dirty="0" smtClean="0">
                 <a:solidFill>
                   <a:schemeClr val="tx1"/>
                 </a:solidFill>
               </a:rPr>
-              <a:t>표시</a:t>
+              <a:t>전시회 </a:t>
+            </a:r>
+            <a:r>
+              <a:rPr lang="ko-KR" altLang="en-US" b="1" dirty="0" smtClean="0">
+                <a:solidFill>
+                  <a:schemeClr val="tx1"/>
+                </a:solidFill>
+              </a:rPr>
+              <a:t>시연 고려 </a:t>
             </a:r>
             <a:r>
               <a:rPr lang="en-US" altLang="ko-KR" b="1" dirty="0" smtClean="0">
@@ -7166,7 +7997,7 @@
                   <a:schemeClr val="tx1"/>
                 </a:solidFill>
               </a:rPr>
-              <a:t>(</a:t>
+              <a:t>– PC </a:t>
             </a:r>
             <a:r>
               <a:rPr lang="ko-KR" altLang="en-US" b="1" smtClean="0">
@@ -7174,17 +8005,123 @@
                   <a:schemeClr val="tx1"/>
                 </a:solidFill>
               </a:rPr>
-              <a:t>완</a:t>
-            </a:r>
-            <a:r>
-              <a:rPr lang="en-US" altLang="ko-KR" b="1" dirty="0" smtClean="0">
-                <a:solidFill>
-                  <a:schemeClr val="tx1"/>
-                </a:solidFill>
-              </a:rPr>
-              <a:t>)</a:t>
-            </a:r>
-          </a:p>
+              <a:t>모니터에 띄울 수 </a:t>
+            </a:r>
+            <a:r>
+              <a:rPr lang="ko-KR" altLang="en-US" b="1" smtClean="0">
+                <a:solidFill>
+                  <a:schemeClr val="tx1"/>
+                </a:solidFill>
+              </a:rPr>
+              <a:t>있는지</a:t>
+            </a:r>
+            <a:endParaRPr lang="en-US" altLang="ko-KR" sz="2800" b="1" dirty="0" smtClean="0">
+              <a:solidFill>
+                <a:schemeClr val="tx1"/>
+              </a:solidFill>
+            </a:endParaRPr>
+          </a:p>
+        </p:txBody>
+      </p:sp>
+      <p:sp>
+        <p:nvSpPr>
+          <p:cNvPr id="2" name="TextBox 1"/>
+          <p:cNvSpPr txBox="1"/>
+          <p:nvPr/>
+        </p:nvSpPr>
+        <p:spPr>
+          <a:xfrm>
+            <a:off x="244862" y="238662"/>
+            <a:ext cx="14190667" cy="923330"/>
+          </a:xfrm>
+          <a:prstGeom prst="rect">
+            <a:avLst/>
+          </a:prstGeom>
+          <a:noFill/>
+        </p:spPr>
+        <p:txBody>
+          <a:bodyPr wrap="square" rtlCol="0">
+            <a:spAutoFit/>
+          </a:bodyPr>
+          <a:lstStyle/>
+          <a:p>
+            <a:r>
+              <a:rPr lang="en-US" altLang="ko-KR" sz="5400" b="1" dirty="0" smtClean="0">
+                <a:solidFill>
+                  <a:schemeClr val="bg1"/>
+                </a:solidFill>
+                <a:latin typeface="LG스마트체2.0 Regular" panose="020B0600000101010101" pitchFamily="50" charset="-127"/>
+                <a:ea typeface="LG스마트체2.0 Regular" panose="020B0600000101010101" pitchFamily="50" charset="-127"/>
+              </a:rPr>
+              <a:t>0. </a:t>
+            </a:r>
+            <a:r>
+              <a:rPr lang="ko-KR" altLang="en-US" sz="5400" b="1" smtClean="0">
+                <a:solidFill>
+                  <a:schemeClr val="bg1"/>
+                </a:solidFill>
+                <a:latin typeface="LG스마트체2.0 Regular" panose="020B0600000101010101" pitchFamily="50" charset="-127"/>
+                <a:ea typeface="LG스마트체2.0 Regular" panose="020B0600000101010101" pitchFamily="50" charset="-127"/>
+              </a:rPr>
+              <a:t>기획</a:t>
+            </a:r>
+            <a:r>
+              <a:rPr lang="en-US" altLang="ko-KR" sz="5400" b="1" dirty="0" smtClean="0">
+                <a:solidFill>
+                  <a:schemeClr val="bg1"/>
+                </a:solidFill>
+                <a:latin typeface="LG스마트체2.0 Regular" panose="020B0600000101010101" pitchFamily="50" charset="-127"/>
+                <a:ea typeface="LG스마트체2.0 Regular" panose="020B0600000101010101" pitchFamily="50" charset="-127"/>
+              </a:rPr>
+              <a:t>(260417)</a:t>
+            </a:r>
+            <a:endParaRPr lang="ko-KR" altLang="en-US" sz="5400" b="1" dirty="0">
+              <a:solidFill>
+                <a:schemeClr val="bg1"/>
+              </a:solidFill>
+              <a:latin typeface="LG스마트체2.0 Regular" panose="020B0600000101010101" pitchFamily="50" charset="-127"/>
+              <a:ea typeface="LG스마트체2.0 Regular" panose="020B0600000101010101" pitchFamily="50" charset="-127"/>
+            </a:endParaRPr>
+          </a:p>
+        </p:txBody>
+      </p:sp>
+      <p:sp>
+        <p:nvSpPr>
+          <p:cNvPr id="5" name="직사각형 4"/>
+          <p:cNvSpPr/>
+          <p:nvPr/>
+        </p:nvSpPr>
+        <p:spPr>
+          <a:xfrm>
+            <a:off x="701541" y="1561514"/>
+            <a:ext cx="7743960" cy="8653640"/>
+          </a:xfrm>
+          <a:prstGeom prst="rect">
+            <a:avLst/>
+          </a:prstGeom>
+          <a:solidFill>
+            <a:srgbClr val="FFFF00"/>
+          </a:solidFill>
+        </p:spPr>
+        <p:style>
+          <a:lnRef idx="2">
+            <a:schemeClr val="accent1">
+              <a:shade val="50000"/>
+            </a:schemeClr>
+          </a:lnRef>
+          <a:fillRef idx="1">
+            <a:schemeClr val="accent1"/>
+          </a:fillRef>
+          <a:effectRef idx="0">
+            <a:schemeClr val="accent1"/>
+          </a:effectRef>
+          <a:fontRef idx="minor">
+            <a:schemeClr val="lt1"/>
+          </a:fontRef>
+        </p:style>
+        <p:txBody>
+          <a:bodyPr rtlCol="0" anchor="t"/>
+          <a:lstStyle/>
           <a:p>
             <a:pPr marL="342900" indent="-342900">
               <a:lnSpc>
@@ -7194,20 +8131,12 @@
               <a:buChar char="-"/>
             </a:pPr>
             <a:r>
-              <a:rPr lang="ko-KR" altLang="en-US" b="1" dirty="0">
-                <a:solidFill>
-                  <a:schemeClr val="tx1"/>
-                </a:solidFill>
-              </a:rPr>
-              <a:t>화면 터치 펜 찾아보기</a:t>
-            </a:r>
-            <a:r>
               <a:rPr lang="en-US" altLang="ko-KR" b="1" dirty="0">
                 <a:solidFill>
                   <a:schemeClr val="tx1"/>
                 </a:solidFill>
               </a:rPr>
-              <a:t> – </a:t>
+              <a:t>telnet </a:t>
             </a:r>
             <a:r>
               <a:rPr lang="ko-KR" altLang="en-US" b="1">
@@ -7215,7 +8144,7 @@
                   <a:schemeClr val="tx1"/>
                 </a:solidFill>
               </a:rPr>
-              <a:t>다이소 디스크 펜 </a:t>
+              <a:t>끊기는 경우</a:t>
             </a:r>
             <a:r>
               <a:rPr lang="en-US" altLang="ko-KR" b="1" dirty="0">
@@ -7223,18 +8152,58 @@
                   <a:schemeClr val="tx1"/>
                 </a:solidFill>
               </a:rPr>
-              <a:t>1000</a:t>
-            </a:r>
-            <a:r>
-              <a:rPr lang="ko-KR" altLang="en-US" b="1">
-                <a:solidFill>
-                  <a:schemeClr val="tx1"/>
-                </a:solidFill>
-              </a:rPr>
-              <a:t>원짜리 </a:t>
-            </a:r>
-            <a:r>
-              <a:rPr lang="en-US" altLang="ko-KR" b="1" dirty="0">
+              <a:t>.. </a:t>
+            </a:r>
+            <a:r>
+              <a:rPr lang="en-US" altLang="ko-KR" b="1" dirty="0" smtClean="0">
+                <a:solidFill>
+                  <a:schemeClr val="tx1"/>
+                </a:solidFill>
+              </a:rPr>
+              <a:t>-&gt; </a:t>
+            </a:r>
+            <a:r>
+              <a:rPr lang="ko-KR" altLang="en-US" b="1" smtClean="0">
+                <a:solidFill>
+                  <a:schemeClr val="tx1"/>
+                </a:solidFill>
+              </a:rPr>
+              <a:t>보드 </a:t>
+            </a:r>
+            <a:r>
+              <a:rPr lang="en-US" altLang="ko-KR" b="1" dirty="0" smtClean="0">
+                <a:solidFill>
+                  <a:schemeClr val="tx1"/>
+                </a:solidFill>
+              </a:rPr>
+              <a:t>2,3 </a:t>
+            </a:r>
+            <a:r>
+              <a:rPr lang="en-US" altLang="ko-KR" b="1" dirty="0" err="1" smtClean="0">
+                <a:solidFill>
+                  <a:schemeClr val="tx1"/>
+                </a:solidFill>
+              </a:rPr>
+              <a:t>Brrootfs</a:t>
+            </a:r>
+            <a:r>
+              <a:rPr lang="en-US" altLang="ko-KR" b="1" dirty="0" smtClean="0">
+                <a:solidFill>
+                  <a:schemeClr val="tx1"/>
+                </a:solidFill>
+              </a:rPr>
+              <a:t> </a:t>
+            </a:r>
+            <a:r>
+              <a:rPr lang="ko-KR" altLang="en-US" b="1" smtClean="0">
+                <a:solidFill>
+                  <a:schemeClr val="tx1"/>
+                </a:solidFill>
+              </a:rPr>
+              <a:t>이미지 구워서 업로드</a:t>
+            </a:r>
+            <a:r>
+              <a:rPr lang="en-US" altLang="ko-KR" b="1" dirty="0" smtClean="0">
                 <a:solidFill>
                   <a:schemeClr val="tx1"/>
                 </a:solidFill>
@@ -7242,7 +8211,7 @@
               <a:t>(</a:t>
             </a:r>
             <a:r>
-              <a:rPr lang="ko-KR" altLang="en-US" b="1">
+              <a:rPr lang="ko-KR" altLang="en-US" b="1" smtClean="0">
                 <a:solidFill>
                   <a:schemeClr val="tx1"/>
                 </a:solidFill>
@@ -7257,6 +8226,11 @@
               </a:rPr>
               <a:t>)</a:t>
             </a:r>
+            <a:endParaRPr lang="en-US" altLang="ko-KR" b="1" dirty="0">
+              <a:solidFill>
+                <a:schemeClr val="tx1"/>
+              </a:solidFill>
+            </a:endParaRPr>
           </a:p>
           <a:p>
             <a:pPr marL="342900" indent="-342900">
@@ -7267,15 +8241,31 @@
               <a:buChar char="-"/>
             </a:pPr>
             <a:r>
+              <a:rPr lang="ko-KR" altLang="en-US" b="1" dirty="0" smtClean="0">
+                <a:solidFill>
+                  <a:schemeClr val="tx1"/>
+                </a:solidFill>
+              </a:rPr>
+              <a:t>참가자가 </a:t>
+            </a:r>
+            <a:r>
               <a:rPr lang="ko-KR" altLang="en-US" b="1" dirty="0">
                 <a:solidFill>
                   <a:schemeClr val="tx1"/>
                 </a:solidFill>
               </a:rPr>
-              <a:t>지우개 기능</a:t>
-            </a:r>
-            <a:r>
-              <a:rPr lang="en-US" altLang="ko-KR" b="1" dirty="0">
+              <a:t>자기의 화면을 알 수 있도록 </a:t>
+            </a:r>
+            <a:r>
+              <a:rPr lang="ko-KR" altLang="en-US" b="1" dirty="0" smtClean="0">
+                <a:solidFill>
+                  <a:schemeClr val="tx1"/>
+                </a:solidFill>
+              </a:rPr>
+              <a:t>표시</a:t>
+            </a:r>
+            <a:r>
+              <a:rPr lang="en-US" altLang="ko-KR" b="1" dirty="0" smtClean="0">
                 <a:solidFill>
                   <a:schemeClr val="tx1"/>
                 </a:solidFill>
@@ -7283,7 +8273,7 @@
               <a:t>(</a:t>
             </a:r>
             <a:r>
-              <a:rPr lang="ko-KR" altLang="en-US" b="1">
+              <a:rPr lang="ko-KR" altLang="en-US" b="1" smtClean="0">
                 <a:solidFill>
                   <a:schemeClr val="tx1"/>
                 </a:solidFill>
@@ -7308,12 +8298,20 @@
               <a:buChar char="-"/>
             </a:pPr>
             <a:r>
-              <a:rPr lang="en-US" altLang="ko-KR" b="1" dirty="0" err="1">
-                <a:solidFill>
-                  <a:schemeClr val="tx1"/>
-                </a:solidFill>
-              </a:rPr>
-              <a:t>Github</a:t>
+              <a:rPr lang="ko-KR" altLang="en-US" b="1" dirty="0">
+                <a:solidFill>
+                  <a:schemeClr val="tx1"/>
+                </a:solidFill>
+              </a:rPr>
+              <a:t>화면 터치 펜 찾아보기</a:t>
+            </a:r>
+            <a:r>
+              <a:rPr lang="en-US" altLang="ko-KR" b="1" dirty="0">
+                <a:solidFill>
+                  <a:schemeClr val="tx1"/>
+                </a:solidFill>
+              </a:rPr>
+              <a:t> – </a:t>
             </a:r>
             <a:r>
               <a:rPr lang="ko-KR" altLang="en-US" b="1">
@@ -7321,7 +8319,15 @@
                   <a:schemeClr val="tx1"/>
                 </a:solidFill>
               </a:rPr>
-              <a:t> 업로드 </a:t>
+              <a:t>다이소 디스크 펜 </a:t>
+            </a:r>
+            <a:r>
+              <a:rPr lang="en-US" altLang="ko-KR" b="1" dirty="0">
+                <a:solidFill>
+                  <a:schemeClr val="tx1"/>
+                </a:solidFill>
+              </a:rPr>
+              <a:t>1000</a:t>
             </a:r>
             <a:r>
               <a:rPr lang="ko-KR" altLang="en-US" b="1">
@@ -7329,7 +8335,7 @@
                   <a:schemeClr val="tx1"/>
                 </a:solidFill>
               </a:rPr>
-              <a:t>방법</a:t>
+              <a:t>원짜리 </a:t>
             </a:r>
             <a:r>
               <a:rPr lang="en-US" altLang="ko-KR" b="1" dirty="0">
@@ -7337,15 +8343,15 @@
                   <a:schemeClr val="tx1"/>
                 </a:solidFill>
               </a:rPr>
-              <a:t> </a:t>
-            </a:r>
-            <a:r>
-              <a:rPr lang="ko-KR" altLang="en-US" b="1" smtClean="0">
-                <a:solidFill>
-                  <a:schemeClr val="tx1"/>
-                </a:solidFill>
-              </a:rPr>
-              <a:t>찾기</a:t>
+              <a:t>(</a:t>
+            </a:r>
+            <a:r>
+              <a:rPr lang="ko-KR" altLang="en-US" b="1">
+                <a:solidFill>
+                  <a:schemeClr val="tx1"/>
+                </a:solidFill>
+              </a:rPr>
+              <a:t>완</a:t>
             </a:r>
             <a:r>
               <a:rPr lang="en-US" altLang="ko-KR" b="1" dirty="0" smtClean="0">
@@ -7353,29 +8359,8 @@
                   <a:schemeClr val="tx1"/>
                 </a:solidFill>
               </a:rPr>
-              <a:t>(</a:t>
-            </a:r>
-            <a:r>
-              <a:rPr lang="ko-KR" altLang="en-US" b="1" smtClean="0">
-                <a:solidFill>
-                  <a:schemeClr val="tx1"/>
-                </a:solidFill>
-              </a:rPr>
-              <a:t>완</a:t>
-            </a:r>
-            <a:r>
-              <a:rPr lang="en-US" altLang="ko-KR" b="1" smtClean="0">
-                <a:solidFill>
-                  <a:schemeClr val="tx1"/>
-                </a:solidFill>
-              </a:rPr>
               <a:t>)</a:t>
             </a:r>
-            <a:endParaRPr lang="en-US" altLang="ko-KR" b="1" dirty="0" smtClean="0">
-              <a:solidFill>
-                <a:schemeClr val="tx1"/>
-              </a:solidFill>
-            </a:endParaRPr>
           </a:p>
           <a:p>
             <a:pPr marL="342900" indent="-342900">
@@ -7386,34 +8371,12 @@
               <a:buChar char="-"/>
             </a:pPr>
             <a:r>
-              <a:rPr lang="ko-KR" altLang="en-US" b="1" dirty="0" smtClean="0">
-                <a:solidFill>
-                  <a:schemeClr val="tx1"/>
-                </a:solidFill>
-              </a:rPr>
-              <a:t>구현</a:t>
-            </a:r>
-            <a:endParaRPr lang="en-US" altLang="ko-KR" b="1" dirty="0" smtClean="0">
-              <a:solidFill>
-                <a:schemeClr val="tx1"/>
-              </a:solidFill>
-            </a:endParaRPr>
-          </a:p>
-          <a:p>
-            <a:pPr marL="800100" lvl="1" indent="-342900">
-              <a:lnSpc>
-                <a:spcPct val="150000"/>
-              </a:lnSpc>
-              <a:buFontTx/>
-              <a:buChar char="-"/>
-            </a:pPr>
-            <a:r>
               <a:rPr lang="en-US" altLang="ko-KR" b="1" dirty="0" smtClean="0">
                 <a:solidFill>
                   <a:schemeClr val="tx1"/>
                 </a:solidFill>
               </a:rPr>
-              <a:t>6.12.81 </a:t>
+              <a:t>Clear</a:t>
             </a:r>
             <a:r>
               <a:rPr lang="ko-KR" altLang="en-US" b="1" smtClean="0">
@@ -7421,31 +8384,23 @@
                   <a:schemeClr val="tx1"/>
                 </a:solidFill>
               </a:rPr>
-              <a:t>리눅스 </a:t>
-            </a:r>
-            <a:r>
-              <a:rPr lang="ko-KR" altLang="en-US" b="1" dirty="0" err="1" smtClean="0">
-                <a:solidFill>
-                  <a:schemeClr val="tx1"/>
-                </a:solidFill>
-              </a:rPr>
-              <a:t>커널</a:t>
-            </a:r>
-            <a:r>
-              <a:rPr lang="ko-KR" altLang="en-US" b="1" dirty="0" smtClean="0">
-                <a:solidFill>
-                  <a:schemeClr val="tx1"/>
-                </a:solidFill>
-              </a:rPr>
-              <a:t> 이미지 </a:t>
-            </a:r>
-            <a:r>
-              <a:rPr lang="ko-KR" altLang="en-US" b="1" smtClean="0">
-                <a:solidFill>
-                  <a:schemeClr val="tx1"/>
-                </a:solidFill>
-              </a:rPr>
-              <a:t>보드에 업로드 </a:t>
+              <a:t> 기능</a:t>
+            </a:r>
+            <a:r>
+              <a:rPr lang="en-US" altLang="ko-KR" b="1" dirty="0">
+                <a:solidFill>
+                  <a:schemeClr val="tx1"/>
+                </a:solidFill>
+              </a:rPr>
+              <a:t>(</a:t>
+            </a:r>
+            <a:r>
+              <a:rPr lang="ko-KR" altLang="en-US" b="1">
+                <a:solidFill>
+                  <a:schemeClr val="tx1"/>
+                </a:solidFill>
+              </a:rPr>
+              <a:t>완</a:t>
             </a:r>
             <a:r>
               <a:rPr lang="en-US" altLang="ko-KR" b="1" dirty="0" smtClean="0">
@@ -7453,756 +8408,8 @@
                   <a:schemeClr val="tx1"/>
                 </a:solidFill>
               </a:rPr>
-              <a:t>– BGM </a:t>
-            </a:r>
-            <a:r>
-              <a:rPr lang="ko-KR" altLang="en-US" b="1" smtClean="0">
-                <a:solidFill>
-                  <a:schemeClr val="tx1"/>
-                </a:solidFill>
-              </a:rPr>
-              <a:t>추가</a:t>
-            </a:r>
-            <a:r>
-              <a:rPr lang="en-US" altLang="ko-KR" b="1" dirty="0" smtClean="0">
-                <a:solidFill>
-                  <a:schemeClr val="tx1"/>
-                </a:solidFill>
-              </a:rPr>
-              <a:t> </a:t>
-            </a:r>
-          </a:p>
-          <a:p>
-            <a:pPr marL="800100" lvl="1" indent="-342900">
-              <a:lnSpc>
-                <a:spcPct val="150000"/>
-              </a:lnSpc>
-              <a:buFontTx/>
-              <a:buChar char="-"/>
-            </a:pPr>
-            <a:r>
-              <a:rPr lang="ko-KR" altLang="en-US" b="1" dirty="0" smtClean="0">
-                <a:solidFill>
-                  <a:schemeClr val="tx1"/>
-                </a:solidFill>
-              </a:rPr>
-              <a:t>출제자 화면에 제시어 출력</a:t>
-            </a:r>
-            <a:endParaRPr lang="en-US" altLang="ko-KR" b="1" dirty="0" smtClean="0">
-              <a:solidFill>
-                <a:schemeClr val="tx1"/>
-              </a:solidFill>
-            </a:endParaRPr>
-          </a:p>
-          <a:p>
-            <a:pPr marL="800100" lvl="1" indent="-342900">
-              <a:lnSpc>
-                <a:spcPct val="150000"/>
-              </a:lnSpc>
-              <a:buFontTx/>
-              <a:buChar char="-"/>
-            </a:pPr>
-            <a:r>
-              <a:rPr lang="ko-KR" altLang="en-US" b="1" dirty="0" smtClean="0">
-                <a:solidFill>
-                  <a:schemeClr val="tx1"/>
-                </a:solidFill>
-              </a:rPr>
-              <a:t>참가자 화면에도 지우개 기능</a:t>
-            </a:r>
-            <a:endParaRPr lang="en-US" altLang="ko-KR" b="1" dirty="0" smtClean="0">
-              <a:solidFill>
-                <a:schemeClr val="tx1"/>
-              </a:solidFill>
-            </a:endParaRPr>
-          </a:p>
-          <a:p>
-            <a:pPr marL="800100" lvl="1" indent="-342900">
-              <a:lnSpc>
-                <a:spcPct val="150000"/>
-              </a:lnSpc>
-              <a:buFontTx/>
-              <a:buChar char="-"/>
-            </a:pPr>
-            <a:r>
-              <a:rPr lang="ko-KR" altLang="en-US" b="1" dirty="0" smtClean="0">
-                <a:solidFill>
-                  <a:schemeClr val="tx1"/>
-                </a:solidFill>
-              </a:rPr>
-              <a:t>음악 </a:t>
-            </a:r>
-            <a:r>
-              <a:rPr lang="ko-KR" altLang="en-US" b="1" dirty="0" err="1" smtClean="0">
-                <a:solidFill>
-                  <a:schemeClr val="tx1"/>
-                </a:solidFill>
-              </a:rPr>
-              <a:t>싱크</a:t>
-            </a:r>
-            <a:r>
-              <a:rPr lang="ko-KR" altLang="en-US" b="1" dirty="0" smtClean="0">
-                <a:solidFill>
-                  <a:schemeClr val="tx1"/>
-                </a:solidFill>
-              </a:rPr>
-              <a:t> 맞추기</a:t>
-            </a:r>
-            <a:endParaRPr lang="en-US" altLang="ko-KR" b="1" dirty="0" smtClean="0">
-              <a:solidFill>
-                <a:schemeClr val="tx1"/>
-              </a:solidFill>
-            </a:endParaRPr>
-          </a:p>
-          <a:p>
-            <a:pPr marL="800100" lvl="1" indent="-342900">
-              <a:lnSpc>
-                <a:spcPct val="150000"/>
-              </a:lnSpc>
-              <a:buFontTx/>
-              <a:buChar char="-"/>
-            </a:pPr>
-            <a:r>
-              <a:rPr lang="ko-KR" altLang="en-US" b="1" dirty="0" smtClean="0">
-                <a:solidFill>
-                  <a:schemeClr val="tx1"/>
-                </a:solidFill>
-              </a:rPr>
-              <a:t>일정 </a:t>
-            </a:r>
-            <a:r>
-              <a:rPr lang="ko-KR" altLang="en-US" b="1" dirty="0">
-                <a:solidFill>
-                  <a:schemeClr val="tx1"/>
-                </a:solidFill>
-              </a:rPr>
-              <a:t>시간 못 맞추면 힌트로 카테고리 </a:t>
-            </a:r>
-            <a:r>
-              <a:rPr lang="ko-KR" altLang="en-US" b="1" dirty="0" smtClean="0">
-                <a:solidFill>
-                  <a:schemeClr val="tx1"/>
-                </a:solidFill>
-              </a:rPr>
-              <a:t>출력</a:t>
-            </a:r>
-            <a:endParaRPr lang="en-US" altLang="ko-KR" b="1" dirty="0" smtClean="0">
-              <a:solidFill>
-                <a:schemeClr val="tx1"/>
-              </a:solidFill>
-            </a:endParaRPr>
-          </a:p>
-          <a:p>
-            <a:pPr marL="800100" lvl="1" indent="-342900">
-              <a:lnSpc>
-                <a:spcPct val="150000"/>
-              </a:lnSpc>
-              <a:buFontTx/>
-              <a:buChar char="-"/>
-            </a:pPr>
-            <a:r>
-              <a:rPr lang="en-US" altLang="ko-KR" b="1" dirty="0" smtClean="0">
-                <a:solidFill>
-                  <a:schemeClr val="tx1"/>
-                </a:solidFill>
-              </a:rPr>
-              <a:t>UI </a:t>
-            </a:r>
-            <a:r>
-              <a:rPr lang="ko-KR" altLang="en-US" b="1" smtClean="0">
-                <a:solidFill>
-                  <a:schemeClr val="tx1"/>
-                </a:solidFill>
-              </a:rPr>
-              <a:t>화면 추가</a:t>
-            </a:r>
-            <a:r>
-              <a:rPr lang="en-US" altLang="ko-KR" b="1" dirty="0" smtClean="0">
-                <a:solidFill>
-                  <a:schemeClr val="tx1"/>
-                </a:solidFill>
-              </a:rPr>
-              <a:t>(</a:t>
-            </a:r>
-            <a:r>
-              <a:rPr lang="ko-KR" altLang="en-US" b="1" smtClean="0">
-                <a:solidFill>
-                  <a:schemeClr val="tx1"/>
-                </a:solidFill>
-              </a:rPr>
-              <a:t>게임 시작 화면</a:t>
-            </a:r>
-            <a:r>
-              <a:rPr lang="en-US" altLang="ko-KR" b="1" dirty="0" smtClean="0">
-                <a:solidFill>
-                  <a:schemeClr val="tx1"/>
-                </a:solidFill>
-              </a:rPr>
-              <a:t>, </a:t>
-            </a:r>
-            <a:r>
-              <a:rPr lang="ko-KR" altLang="en-US" b="1" smtClean="0">
-                <a:solidFill>
-                  <a:schemeClr val="tx1"/>
-                </a:solidFill>
-              </a:rPr>
-              <a:t>케릭터 추가</a:t>
-            </a:r>
-            <a:r>
-              <a:rPr lang="en-US" altLang="ko-KR" b="1" dirty="0" smtClean="0">
-                <a:solidFill>
-                  <a:schemeClr val="tx1"/>
-                </a:solidFill>
-              </a:rPr>
-              <a:t>, </a:t>
-            </a:r>
-            <a:r>
-              <a:rPr lang="ko-KR" altLang="en-US" b="1" smtClean="0">
-                <a:solidFill>
-                  <a:schemeClr val="tx1"/>
-                </a:solidFill>
-              </a:rPr>
-              <a:t>제한 시간 </a:t>
-            </a:r>
-            <a:r>
-              <a:rPr lang="en-US" altLang="ko-KR" b="1" dirty="0" smtClean="0">
-                <a:solidFill>
-                  <a:schemeClr val="tx1"/>
-                </a:solidFill>
-              </a:rPr>
-              <a:t>: 30</a:t>
-            </a:r>
-            <a:r>
-              <a:rPr lang="ko-KR" altLang="en-US" b="1" smtClean="0">
-                <a:solidFill>
-                  <a:schemeClr val="tx1"/>
-                </a:solidFill>
-              </a:rPr>
-              <a:t>초</a:t>
-            </a:r>
-            <a:r>
-              <a:rPr lang="en-US" altLang="ko-KR" b="1" dirty="0" smtClean="0">
-                <a:solidFill>
-                  <a:schemeClr val="tx1"/>
-                </a:solidFill>
-              </a:rPr>
               <a:t>)</a:t>
             </a:r>
-            <a:r>
-              <a:rPr lang="ko-KR" altLang="en-US" b="1" smtClean="0">
-                <a:solidFill>
-                  <a:schemeClr val="tx1"/>
-                </a:solidFill>
-              </a:rPr>
-              <a:t> </a:t>
-            </a:r>
-            <a:endParaRPr lang="en-US" altLang="ko-KR" b="1" dirty="0" smtClean="0">
-              <a:solidFill>
-                <a:schemeClr val="tx1"/>
-              </a:solidFill>
-            </a:endParaRPr>
-          </a:p>
-          <a:p>
-            <a:pPr marL="800100" lvl="1" indent="-342900">
-              <a:lnSpc>
-                <a:spcPct val="150000"/>
-              </a:lnSpc>
-              <a:buFontTx/>
-              <a:buChar char="-"/>
-            </a:pPr>
-            <a:r>
-              <a:rPr lang="ko-KR" altLang="en-US" b="1" dirty="0" err="1" smtClean="0">
-                <a:solidFill>
-                  <a:schemeClr val="tx1"/>
-                </a:solidFill>
-              </a:rPr>
-              <a:t>점수제</a:t>
-            </a:r>
-            <a:r>
-              <a:rPr lang="ko-KR" altLang="en-US" b="1" dirty="0" smtClean="0">
-                <a:solidFill>
-                  <a:schemeClr val="tx1"/>
-                </a:solidFill>
-              </a:rPr>
-              <a:t> 룰 </a:t>
-            </a:r>
-            <a:r>
-              <a:rPr lang="en-US" altLang="ko-KR" b="1" dirty="0" smtClean="0">
-                <a:solidFill>
-                  <a:schemeClr val="tx1"/>
-                </a:solidFill>
-              </a:rPr>
-              <a:t>(5</a:t>
-            </a:r>
-            <a:r>
-              <a:rPr lang="ko-KR" altLang="en-US" b="1" smtClean="0">
-                <a:solidFill>
-                  <a:schemeClr val="tx1"/>
-                </a:solidFill>
-              </a:rPr>
-              <a:t>라운드</a:t>
-            </a:r>
-            <a:r>
-              <a:rPr lang="en-US" altLang="ko-KR" b="1" dirty="0" smtClean="0">
-                <a:solidFill>
-                  <a:schemeClr val="tx1"/>
-                </a:solidFill>
-              </a:rPr>
-              <a:t>, 60</a:t>
-            </a:r>
-            <a:r>
-              <a:rPr lang="ko-KR" altLang="en-US" b="1" smtClean="0">
-                <a:solidFill>
-                  <a:schemeClr val="tx1"/>
-                </a:solidFill>
-              </a:rPr>
-              <a:t>초 </a:t>
-            </a:r>
-            <a:r>
-              <a:rPr lang="en-US" altLang="ko-KR" b="1" dirty="0" smtClean="0">
-                <a:solidFill>
-                  <a:schemeClr val="tx1"/>
-                </a:solidFill>
-              </a:rPr>
-              <a:t>-&gt; 0</a:t>
-            </a:r>
-            <a:r>
-              <a:rPr lang="ko-KR" altLang="en-US" b="1" smtClean="0">
-                <a:solidFill>
-                  <a:schemeClr val="tx1"/>
-                </a:solidFill>
-              </a:rPr>
-              <a:t>초</a:t>
-            </a:r>
-            <a:r>
-              <a:rPr lang="en-US" altLang="ko-KR" b="1" dirty="0" smtClean="0">
-                <a:solidFill>
-                  <a:schemeClr val="tx1"/>
-                </a:solidFill>
-              </a:rPr>
-              <a:t>)</a:t>
-            </a:r>
-            <a:endParaRPr lang="en-US" altLang="ko-KR" b="1" dirty="0">
-              <a:solidFill>
-                <a:schemeClr val="tx1"/>
-              </a:solidFill>
-            </a:endParaRPr>
-          </a:p>
-          <a:p>
-            <a:pPr marL="1257300" lvl="2" indent="-342900">
-              <a:lnSpc>
-                <a:spcPct val="150000"/>
-              </a:lnSpc>
-              <a:buFontTx/>
-              <a:buChar char="-"/>
-            </a:pPr>
-            <a:r>
-              <a:rPr lang="ko-KR" altLang="en-US" b="1" dirty="0" smtClean="0">
-                <a:solidFill>
-                  <a:schemeClr val="tx1"/>
-                </a:solidFill>
-              </a:rPr>
-              <a:t>최초 출제자는 선착순</a:t>
-            </a:r>
-            <a:endParaRPr lang="en-US" altLang="ko-KR" b="1" dirty="0" smtClean="0">
-              <a:solidFill>
-                <a:schemeClr val="tx1"/>
-              </a:solidFill>
-            </a:endParaRPr>
-          </a:p>
-          <a:p>
-            <a:pPr marL="1257300" lvl="2" indent="-342900">
-              <a:lnSpc>
-                <a:spcPct val="150000"/>
-              </a:lnSpc>
-              <a:buFontTx/>
-              <a:buChar char="-"/>
-            </a:pPr>
-            <a:r>
-              <a:rPr lang="en-US" altLang="ko-KR" b="1" dirty="0" smtClean="0">
-                <a:solidFill>
-                  <a:schemeClr val="tx1"/>
-                </a:solidFill>
-              </a:rPr>
-              <a:t>60 ~ 30</a:t>
-            </a:r>
-            <a:r>
-              <a:rPr lang="ko-KR" altLang="en-US" b="1" smtClean="0">
-                <a:solidFill>
-                  <a:schemeClr val="tx1"/>
-                </a:solidFill>
-              </a:rPr>
-              <a:t>초 </a:t>
-            </a:r>
-            <a:r>
-              <a:rPr lang="en-US" altLang="ko-KR" b="1" dirty="0" smtClean="0">
-                <a:solidFill>
-                  <a:schemeClr val="tx1"/>
-                </a:solidFill>
-              </a:rPr>
-              <a:t>– </a:t>
-            </a:r>
-            <a:r>
-              <a:rPr lang="ko-KR" altLang="en-US" b="1" smtClean="0">
-                <a:solidFill>
-                  <a:schemeClr val="tx1"/>
-                </a:solidFill>
-              </a:rPr>
-              <a:t>출제자의 문제를 맞추면</a:t>
-            </a:r>
-            <a:r>
-              <a:rPr lang="en-US" altLang="ko-KR" b="1" dirty="0" smtClean="0">
-                <a:solidFill>
-                  <a:schemeClr val="tx1"/>
-                </a:solidFill>
-              </a:rPr>
-              <a:t>,</a:t>
-            </a:r>
-            <a:r>
-              <a:rPr lang="ko-KR" altLang="en-US" b="1" smtClean="0">
-                <a:solidFill>
-                  <a:schemeClr val="tx1"/>
-                </a:solidFill>
-              </a:rPr>
-              <a:t> 출제자가 </a:t>
-            </a:r>
-            <a:r>
-              <a:rPr lang="en-US" altLang="ko-KR" b="1" dirty="0" smtClean="0">
-                <a:solidFill>
-                  <a:schemeClr val="tx1"/>
-                </a:solidFill>
-              </a:rPr>
-              <a:t>2</a:t>
-            </a:r>
-            <a:r>
-              <a:rPr lang="ko-KR" altLang="en-US" b="1" smtClean="0">
-                <a:solidFill>
-                  <a:schemeClr val="tx1"/>
-                </a:solidFill>
-              </a:rPr>
-              <a:t>점 획득</a:t>
-            </a:r>
-            <a:r>
-              <a:rPr lang="en-US" altLang="ko-KR" b="1" dirty="0" smtClean="0">
-                <a:solidFill>
-                  <a:schemeClr val="tx1"/>
-                </a:solidFill>
-              </a:rPr>
-              <a:t>, </a:t>
-            </a:r>
-            <a:r>
-              <a:rPr lang="ko-KR" altLang="en-US" b="1" smtClean="0">
-                <a:solidFill>
-                  <a:schemeClr val="tx1"/>
-                </a:solidFill>
-              </a:rPr>
-              <a:t>참가자는 </a:t>
-            </a:r>
-            <a:r>
-              <a:rPr lang="en-US" altLang="ko-KR" b="1" dirty="0" smtClean="0">
-                <a:solidFill>
-                  <a:schemeClr val="tx1"/>
-                </a:solidFill>
-              </a:rPr>
-              <a:t>3</a:t>
-            </a:r>
-            <a:r>
-              <a:rPr lang="ko-KR" altLang="en-US" b="1" smtClean="0">
-                <a:solidFill>
-                  <a:schemeClr val="tx1"/>
-                </a:solidFill>
-              </a:rPr>
-              <a:t>점 획득</a:t>
-            </a:r>
-            <a:endParaRPr lang="en-US" altLang="ko-KR" b="1" dirty="0" smtClean="0">
-              <a:solidFill>
-                <a:schemeClr val="tx1"/>
-              </a:solidFill>
-            </a:endParaRPr>
-          </a:p>
-          <a:p>
-            <a:pPr marL="1257300" lvl="2" indent="-342900">
-              <a:lnSpc>
-                <a:spcPct val="150000"/>
-              </a:lnSpc>
-              <a:buFontTx/>
-              <a:buChar char="-"/>
-            </a:pPr>
-            <a:r>
-              <a:rPr lang="en-US" altLang="ko-KR" b="1" dirty="0" smtClean="0">
-                <a:solidFill>
-                  <a:schemeClr val="tx1"/>
-                </a:solidFill>
-              </a:rPr>
-              <a:t>30</a:t>
-            </a:r>
-            <a:r>
-              <a:rPr lang="ko-KR" altLang="en-US" b="1">
-                <a:solidFill>
-                  <a:schemeClr val="tx1"/>
-                </a:solidFill>
-              </a:rPr>
-              <a:t> </a:t>
-            </a:r>
-            <a:r>
-              <a:rPr lang="en-US" altLang="ko-KR" b="1" dirty="0" smtClean="0">
-                <a:solidFill>
-                  <a:schemeClr val="tx1"/>
-                </a:solidFill>
-              </a:rPr>
-              <a:t>~ 0</a:t>
-            </a:r>
-            <a:r>
-              <a:rPr lang="ko-KR" altLang="en-US" b="1" smtClean="0">
-                <a:solidFill>
-                  <a:schemeClr val="tx1"/>
-                </a:solidFill>
-              </a:rPr>
-              <a:t>초 </a:t>
-            </a:r>
-            <a:r>
-              <a:rPr lang="en-US" altLang="ko-KR" b="1" dirty="0" smtClean="0">
-                <a:solidFill>
-                  <a:schemeClr val="tx1"/>
-                </a:solidFill>
-              </a:rPr>
-              <a:t>– </a:t>
-            </a:r>
-            <a:r>
-              <a:rPr lang="ko-KR" altLang="en-US" b="1" smtClean="0">
-                <a:solidFill>
-                  <a:schemeClr val="tx1"/>
-                </a:solidFill>
-              </a:rPr>
-              <a:t>힌트 출력</a:t>
-            </a:r>
-            <a:r>
-              <a:rPr lang="en-US" altLang="ko-KR" b="1" dirty="0" smtClean="0">
-                <a:solidFill>
-                  <a:schemeClr val="tx1"/>
-                </a:solidFill>
-              </a:rPr>
-              <a:t>(</a:t>
-            </a:r>
-            <a:r>
-              <a:rPr lang="ko-KR" altLang="en-US" b="1" smtClean="0">
-                <a:solidFill>
-                  <a:schemeClr val="tx1"/>
-                </a:solidFill>
-              </a:rPr>
-              <a:t>카테고리</a:t>
-            </a:r>
-            <a:r>
-              <a:rPr lang="en-US" altLang="ko-KR" b="1" dirty="0" smtClean="0">
-                <a:solidFill>
-                  <a:schemeClr val="tx1"/>
-                </a:solidFill>
-              </a:rPr>
-              <a:t>). </a:t>
-            </a:r>
-            <a:r>
-              <a:rPr lang="ko-KR" altLang="en-US" b="1" smtClean="0">
-                <a:solidFill>
-                  <a:schemeClr val="tx1"/>
-                </a:solidFill>
-              </a:rPr>
-              <a:t>출제자의 </a:t>
-            </a:r>
-            <a:r>
-              <a:rPr lang="ko-KR" altLang="en-US" b="1">
-                <a:solidFill>
-                  <a:schemeClr val="tx1"/>
-                </a:solidFill>
-              </a:rPr>
-              <a:t>문제를 맞추면</a:t>
-            </a:r>
-            <a:r>
-              <a:rPr lang="en-US" altLang="ko-KR" b="1" dirty="0">
-                <a:solidFill>
-                  <a:schemeClr val="tx1"/>
-                </a:solidFill>
-              </a:rPr>
-              <a:t>,</a:t>
-            </a:r>
-            <a:r>
-              <a:rPr lang="ko-KR" altLang="en-US" b="1">
-                <a:solidFill>
-                  <a:schemeClr val="tx1"/>
-                </a:solidFill>
-              </a:rPr>
-              <a:t> 출제자가 </a:t>
-            </a:r>
-            <a:r>
-              <a:rPr lang="en-US" altLang="ko-KR" b="1" dirty="0" smtClean="0">
-                <a:solidFill>
-                  <a:schemeClr val="tx1"/>
-                </a:solidFill>
-              </a:rPr>
-              <a:t>1</a:t>
-            </a:r>
-            <a:r>
-              <a:rPr lang="ko-KR" altLang="en-US" b="1" smtClean="0">
-                <a:solidFill>
-                  <a:schemeClr val="tx1"/>
-                </a:solidFill>
-              </a:rPr>
-              <a:t>점 </a:t>
-            </a:r>
-            <a:r>
-              <a:rPr lang="ko-KR" altLang="en-US" b="1">
-                <a:solidFill>
-                  <a:schemeClr val="tx1"/>
-                </a:solidFill>
-              </a:rPr>
-              <a:t>획득</a:t>
-            </a:r>
-            <a:r>
-              <a:rPr lang="en-US" altLang="ko-KR" b="1" dirty="0">
-                <a:solidFill>
-                  <a:schemeClr val="tx1"/>
-                </a:solidFill>
-              </a:rPr>
-              <a:t>, </a:t>
-            </a:r>
-            <a:r>
-              <a:rPr lang="ko-KR" altLang="en-US" b="1">
-                <a:solidFill>
-                  <a:schemeClr val="tx1"/>
-                </a:solidFill>
-              </a:rPr>
-              <a:t>참가자는 </a:t>
-            </a:r>
-            <a:r>
-              <a:rPr lang="en-US" altLang="ko-KR" b="1" dirty="0" smtClean="0">
-                <a:solidFill>
-                  <a:schemeClr val="tx1"/>
-                </a:solidFill>
-              </a:rPr>
-              <a:t>2</a:t>
-            </a:r>
-            <a:r>
-              <a:rPr lang="ko-KR" altLang="en-US" b="1" smtClean="0">
-                <a:solidFill>
-                  <a:schemeClr val="tx1"/>
-                </a:solidFill>
-              </a:rPr>
-              <a:t>점 획득</a:t>
-            </a:r>
-            <a:endParaRPr lang="en-US" altLang="ko-KR" b="1" dirty="0" smtClean="0">
-              <a:solidFill>
-                <a:schemeClr val="tx1"/>
-              </a:solidFill>
-            </a:endParaRPr>
-          </a:p>
-          <a:p>
-            <a:pPr marL="1257300" lvl="2" indent="-342900">
-              <a:lnSpc>
-                <a:spcPct val="150000"/>
-              </a:lnSpc>
-              <a:buFontTx/>
-              <a:buChar char="-"/>
-            </a:pPr>
-            <a:r>
-              <a:rPr lang="en-US" altLang="ko-KR" b="1" dirty="0" smtClean="0">
-                <a:solidFill>
-                  <a:schemeClr val="tx1"/>
-                </a:solidFill>
-              </a:rPr>
-              <a:t>0</a:t>
-            </a:r>
-            <a:r>
-              <a:rPr lang="ko-KR" altLang="en-US" b="1" smtClean="0">
-                <a:solidFill>
-                  <a:schemeClr val="tx1"/>
-                </a:solidFill>
-              </a:rPr>
-              <a:t>초 이후 </a:t>
-            </a:r>
-            <a:r>
-              <a:rPr lang="en-US" altLang="ko-KR" b="1" dirty="0" smtClean="0">
-                <a:solidFill>
-                  <a:schemeClr val="tx1"/>
-                </a:solidFill>
-              </a:rPr>
-              <a:t>– </a:t>
-            </a:r>
-            <a:r>
-              <a:rPr lang="ko-KR" altLang="en-US" b="1" smtClean="0">
-                <a:solidFill>
-                  <a:schemeClr val="tx1"/>
-                </a:solidFill>
-              </a:rPr>
-              <a:t>바로 종료 후</a:t>
-            </a:r>
-            <a:r>
-              <a:rPr lang="en-US" altLang="ko-KR" b="1" dirty="0" smtClean="0">
-                <a:solidFill>
-                  <a:schemeClr val="tx1"/>
-                </a:solidFill>
-              </a:rPr>
-              <a:t>, </a:t>
-            </a:r>
-            <a:r>
-              <a:rPr lang="ko-KR" altLang="en-US" b="1" smtClean="0">
-                <a:solidFill>
-                  <a:schemeClr val="tx1"/>
-                </a:solidFill>
-              </a:rPr>
-              <a:t>정답 공개</a:t>
-            </a:r>
-            <a:r>
-              <a:rPr lang="en-US" altLang="ko-KR" b="1" dirty="0" smtClean="0">
-                <a:solidFill>
-                  <a:schemeClr val="tx1"/>
-                </a:solidFill>
-              </a:rPr>
-              <a:t>. </a:t>
-            </a:r>
-            <a:r>
-              <a:rPr lang="ko-KR" altLang="en-US" b="1" smtClean="0">
-                <a:solidFill>
-                  <a:schemeClr val="tx1"/>
-                </a:solidFill>
-              </a:rPr>
-              <a:t>출제자 </a:t>
-            </a:r>
-            <a:r>
-              <a:rPr lang="en-US" altLang="ko-KR" b="1" dirty="0" smtClean="0">
-                <a:solidFill>
-                  <a:schemeClr val="tx1"/>
-                </a:solidFill>
-              </a:rPr>
-              <a:t>1</a:t>
-            </a:r>
-            <a:r>
-              <a:rPr lang="ko-KR" altLang="en-US" b="1" smtClean="0">
-                <a:solidFill>
-                  <a:schemeClr val="tx1"/>
-                </a:solidFill>
-              </a:rPr>
-              <a:t>점 감점</a:t>
-            </a:r>
-            <a:r>
-              <a:rPr lang="en-US" altLang="ko-KR" b="1" dirty="0" smtClean="0">
-                <a:solidFill>
-                  <a:schemeClr val="tx1"/>
-                </a:solidFill>
-              </a:rPr>
-              <a:t>, </a:t>
-            </a:r>
-            <a:r>
-              <a:rPr lang="ko-KR" altLang="en-US" b="1" smtClean="0">
-                <a:solidFill>
-                  <a:schemeClr val="tx1"/>
-                </a:solidFill>
-              </a:rPr>
-              <a:t>다음 출제자는 기존 출제자 유지 </a:t>
-            </a:r>
-            <a:endParaRPr lang="en-US" altLang="ko-KR" b="1" dirty="0" smtClean="0">
-              <a:solidFill>
-                <a:schemeClr val="tx1"/>
-              </a:solidFill>
-            </a:endParaRPr>
           </a:p>
           <a:p>
             <a:pPr marL="342900" indent="-342900">
@@ -8213,21 +8420,72 @@
               <a:buChar char="-"/>
             </a:pPr>
             <a:r>
-              <a:rPr lang="ko-KR" altLang="en-US" b="1" dirty="0" smtClean="0">
-                <a:solidFill>
-                  <a:schemeClr val="tx1"/>
-                </a:solidFill>
-              </a:rPr>
-              <a:t>기타</a:t>
-            </a:r>
-            <a:endParaRPr lang="en-US" altLang="ko-KR" b="1" dirty="0" smtClean="0">
-              <a:solidFill>
-                <a:schemeClr val="tx1"/>
-              </a:solidFill>
-            </a:endParaRPr>
-          </a:p>
-          <a:p>
-            <a:pPr marL="800100" lvl="1" indent="-342900">
+              <a:rPr lang="en-US" altLang="ko-KR" b="1" dirty="0" err="1">
+                <a:solidFill>
+                  <a:schemeClr val="tx1"/>
+                </a:solidFill>
+              </a:rPr>
+              <a:t>Github</a:t>
+            </a:r>
+            <a:r>
+              <a:rPr lang="ko-KR" altLang="en-US" b="1">
+                <a:solidFill>
+                  <a:schemeClr val="tx1"/>
+                </a:solidFill>
+              </a:rPr>
+              <a:t> 업로드 </a:t>
+            </a:r>
+            <a:r>
+              <a:rPr lang="ko-KR" altLang="en-US" b="1">
+                <a:solidFill>
+                  <a:schemeClr val="tx1"/>
+                </a:solidFill>
+              </a:rPr>
+              <a:t>방법</a:t>
+            </a:r>
+            <a:r>
+              <a:rPr lang="en-US" altLang="ko-KR" b="1" dirty="0">
+                <a:solidFill>
+                  <a:schemeClr val="tx1"/>
+                </a:solidFill>
+              </a:rPr>
+              <a:t> </a:t>
+            </a:r>
+            <a:r>
+              <a:rPr lang="ko-KR" altLang="en-US" b="1" smtClean="0">
+                <a:solidFill>
+                  <a:schemeClr val="tx1"/>
+                </a:solidFill>
+              </a:rPr>
+              <a:t>찾기</a:t>
+            </a:r>
+            <a:r>
+              <a:rPr lang="en-US" altLang="ko-KR" b="1" dirty="0" smtClean="0">
+                <a:solidFill>
+                  <a:schemeClr val="tx1"/>
+                </a:solidFill>
+              </a:rPr>
+              <a:t>(</a:t>
+            </a:r>
+            <a:r>
+              <a:rPr lang="ko-KR" altLang="en-US" b="1" smtClean="0">
+                <a:solidFill>
+                  <a:schemeClr val="tx1"/>
+                </a:solidFill>
+              </a:rPr>
+              <a:t>완</a:t>
+            </a:r>
+            <a:r>
+              <a:rPr lang="en-US" altLang="ko-KR" b="1" dirty="0" smtClean="0">
+                <a:solidFill>
+                  <a:schemeClr val="tx1"/>
+                </a:solidFill>
+              </a:rPr>
+              <a:t>)</a:t>
+            </a:r>
+          </a:p>
+          <a:p>
+            <a:pPr marL="342900" indent="-342900">
               <a:lnSpc>
                 <a:spcPct val="150000"/>
               </a:lnSpc>
@@ -8235,28 +8493,12 @@
               <a:buChar char="-"/>
             </a:pPr>
             <a:r>
-              <a:rPr lang="ko-KR" altLang="en-US" b="1" dirty="0">
-                <a:solidFill>
-                  <a:schemeClr val="tx1"/>
-                </a:solidFill>
-              </a:rPr>
-              <a:t>팀 소개 영상 </a:t>
-            </a:r>
-            <a:r>
-              <a:rPr lang="en-US" altLang="ko-KR" b="1" dirty="0">
-                <a:solidFill>
-                  <a:schemeClr val="tx1"/>
-                </a:solidFill>
-              </a:rPr>
-              <a:t>– </a:t>
-            </a:r>
-            <a:r>
-              <a:rPr lang="ko-KR" altLang="en-US" b="1">
-                <a:solidFill>
-                  <a:schemeClr val="tx1"/>
-                </a:solidFill>
-              </a:rPr>
-              <a:t>월요일 오후 </a:t>
+              <a:rPr lang="en-US" altLang="ko-KR" b="1" dirty="0" smtClean="0">
+                <a:solidFill>
+                  <a:schemeClr val="tx1"/>
+                </a:solidFill>
+              </a:rPr>
+              <a:t>BGM </a:t>
             </a:r>
             <a:r>
               <a:rPr lang="ko-KR" altLang="en-US" b="1" smtClean="0">
@@ -8264,16 +8506,35 @@
                   <a:schemeClr val="tx1"/>
                 </a:solidFill>
               </a:rPr>
-              <a:t>한시까지 제출</a:t>
-            </a:r>
-            <a:endParaRPr lang="en-US" altLang="ko-KR" b="1" dirty="0" smtClean="0">
-              <a:solidFill>
-                <a:schemeClr val="tx1"/>
-              </a:solidFill>
-            </a:endParaRPr>
-          </a:p>
-          <a:p>
-            <a:pPr marL="800100" lvl="1" indent="-342900">
+              <a:t>추가</a:t>
+            </a:r>
+            <a:r>
+              <a:rPr lang="en-US" altLang="ko-KR" b="1" dirty="0" smtClean="0">
+                <a:solidFill>
+                  <a:schemeClr val="tx1"/>
+                </a:solidFill>
+              </a:rPr>
+              <a:t>(</a:t>
+            </a:r>
+            <a:r>
+              <a:rPr lang="ko-KR" altLang="en-US" b="1" smtClean="0">
+                <a:solidFill>
+                  <a:schemeClr val="tx1"/>
+                </a:solidFill>
+              </a:rPr>
+              <a:t>완</a:t>
+            </a:r>
+            <a:r>
+              <a:rPr lang="en-US" altLang="ko-KR" b="1" dirty="0" smtClean="0">
+                <a:solidFill>
+                  <a:schemeClr val="tx1"/>
+                </a:solidFill>
+              </a:rPr>
+              <a:t>)</a:t>
+            </a:r>
+          </a:p>
+          <a:p>
+            <a:pPr marL="342900" indent="-342900">
               <a:lnSpc>
                 <a:spcPct val="150000"/>
               </a:lnSpc>
@@ -8281,20 +8542,66 @@
               <a:buChar char="-"/>
             </a:pPr>
             <a:r>
+              <a:rPr lang="ko-KR" altLang="en-US" b="1" dirty="0">
+                <a:solidFill>
+                  <a:schemeClr val="tx1"/>
+                </a:solidFill>
+              </a:rPr>
+              <a:t>출제자 화면에 제시어 </a:t>
+            </a:r>
+            <a:r>
               <a:rPr lang="ko-KR" altLang="en-US" b="1" dirty="0" smtClean="0">
                 <a:solidFill>
                   <a:schemeClr val="tx1"/>
                 </a:solidFill>
               </a:rPr>
-              <a:t>전시회 </a:t>
-            </a:r>
+              <a:t>출력</a:t>
+            </a:r>
+            <a:r>
+              <a:rPr lang="en-US" altLang="ko-KR" b="1" dirty="0" smtClean="0">
+                <a:solidFill>
+                  <a:schemeClr val="tx1"/>
+                </a:solidFill>
+              </a:rPr>
+              <a:t>(</a:t>
+            </a:r>
+            <a:r>
+              <a:rPr lang="ko-KR" altLang="en-US" b="1" smtClean="0">
+                <a:solidFill>
+                  <a:schemeClr val="tx1"/>
+                </a:solidFill>
+              </a:rPr>
+              <a:t>완</a:t>
+            </a:r>
+            <a:r>
+              <a:rPr lang="en-US" altLang="ko-KR" b="1" dirty="0" smtClean="0">
+                <a:solidFill>
+                  <a:schemeClr val="tx1"/>
+                </a:solidFill>
+              </a:rPr>
+              <a:t>)</a:t>
+            </a:r>
+            <a:endParaRPr lang="en-US" altLang="ko-KR" b="1" dirty="0">
+              <a:solidFill>
+                <a:schemeClr val="tx1"/>
+              </a:solidFill>
+            </a:endParaRPr>
+          </a:p>
+          <a:p>
+            <a:pPr marL="342900" indent="-342900">
+              <a:lnSpc>
+                <a:spcPct val="150000"/>
+              </a:lnSpc>
+              <a:buFontTx/>
+              <a:buChar char="-"/>
+            </a:pPr>
             <a:r>
               <a:rPr lang="ko-KR" altLang="en-US" b="1" dirty="0" smtClean="0">
                 <a:solidFill>
                   <a:schemeClr val="tx1"/>
                 </a:solidFill>
               </a:rPr>
-              <a:t>시연 고려 </a:t>
+              <a:t>제한 시간 설정 </a:t>
             </a:r>
             <a:r>
               <a:rPr lang="en-US" altLang="ko-KR" b="1" dirty="0" smtClean="0">
@@ -8302,7 +8609,7 @@
                   <a:schemeClr val="tx1"/>
                 </a:solidFill>
               </a:rPr>
-              <a:t>– PC </a:t>
+              <a:t>– </a:t>
             </a:r>
             <a:r>
               <a:rPr lang="ko-KR" altLang="en-US" b="1" smtClean="0">
@@ -8310,7 +8617,15 @@
                   <a:schemeClr val="tx1"/>
                 </a:solidFill>
               </a:rPr>
-              <a:t>모니터에 띄울 수 </a:t>
+              <a:t>현재 </a:t>
+            </a:r>
+            <a:r>
+              <a:rPr lang="en-US" altLang="ko-KR" b="1" dirty="0" smtClean="0">
+                <a:solidFill>
+                  <a:schemeClr val="tx1"/>
+                </a:solidFill>
+              </a:rPr>
+              <a:t>1</a:t>
             </a:r>
             <a:r>
               <a:rPr lang="ko-KR" altLang="en-US" b="1" smtClean="0">
@@ -8318,9 +8633,33 @@
                   <a:schemeClr val="tx1"/>
                 </a:solidFill>
               </a:rPr>
-              <a:t>있는지</a:t>
-            </a:r>
-            <a:endParaRPr lang="en-US" altLang="ko-KR" sz="2800" b="1" dirty="0" smtClean="0">
+              <a:t>분</a:t>
+            </a:r>
+            <a:r>
+              <a:rPr lang="en-US" altLang="ko-KR" b="1" dirty="0" smtClean="0">
+                <a:solidFill>
+                  <a:schemeClr val="tx1"/>
+                </a:solidFill>
+              </a:rPr>
+              <a:t>(</a:t>
+            </a:r>
+            <a:r>
+              <a:rPr lang="ko-KR" altLang="en-US" b="1" smtClean="0">
+                <a:solidFill>
+                  <a:schemeClr val="tx1"/>
+                </a:solidFill>
+              </a:rPr>
+              <a:t>완</a:t>
+            </a:r>
+            <a:r>
+              <a:rPr lang="en-US" altLang="ko-KR" b="1" dirty="0" smtClean="0">
+                <a:solidFill>
+                  <a:schemeClr val="tx1"/>
+                </a:solidFill>
+              </a:rPr>
+              <a:t>)</a:t>
+            </a:r>
+            <a:endParaRPr lang="en-US" altLang="ko-KR" b="1" dirty="0" smtClean="0">
               <a:solidFill>
                 <a:schemeClr val="tx1"/>
               </a:solidFill>
@@ -8336,7 +8675,7 @@
         </p:nvGrpSpPr>
         <p:grpSpPr>
           <a:xfrm>
-            <a:off x="11739591" y="2631786"/>
+            <a:off x="1965916" y="5764804"/>
             <a:ext cx="4655366" cy="3357592"/>
             <a:chOff x="11739591" y="2631786"/>
             <a:chExt cx="4655366" cy="3357592"/>
@@ -8643,8 +8982,8 @@
           </p:nvSpPr>
           <p:spPr>
             <a:xfrm>
-              <a:off x="11758716" y="3050176"/>
-              <a:ext cx="876627" cy="2939201"/>
+              <a:off x="11758716" y="3056709"/>
+              <a:ext cx="876627" cy="2926080"/>
             </a:xfrm>
             <a:prstGeom prst="rect">
               <a:avLst/>
@@ -8706,10 +9045,10 @@
             <a:lstStyle/>
             <a:p>
               <a:r>
-                <a:rPr lang="ko-KR" altLang="en-US" sz="1400" b="1" smtClean="0"/>
+                <a:rPr lang="ko-KR" altLang="en-US" sz="1400" b="1" dirty="0" smtClean="0"/>
                 <a:t>남은 시간</a:t>
               </a:r>
-              <a:endParaRPr lang="ko-KR" altLang="en-US" sz="1400" b="1"/>
+              <a:endParaRPr lang="ko-KR" altLang="en-US" sz="1400" b="1" dirty="0"/>
             </a:p>
           </p:txBody>
         </p:sp>
@@ -8736,7 +9075,7 @@
             <a:lstStyle/>
             <a:p>
               <a:r>
-                <a:rPr lang="ko-KR" altLang="en-US" sz="1400" b="1" smtClean="0"/>
+                <a:rPr lang="ko-KR" altLang="en-US" sz="1400" b="1" dirty="0" smtClean="0"/>
                 <a:t>라운드</a:t>
               </a:r>
               <a:endParaRPr lang="ko-KR" altLang="en-US" sz="1400" b="1" dirty="0"/>

--- a/LG_부트캠프_12기_C반_프로젝트일정_및_최종제출결과물_3팀/4.LG_부트캠프_12기_C반_결과보고서(3팀)_v1.pptx
+++ b/LG_부트캠프_12기_C반_프로젝트일정_및_최종제출결과물_3팀/4.LG_부트캠프_12기_C반_결과보고서(3팀)_v1.pptx
@@ -5,7 +5,7 @@
     <p:sldMasterId id="2147483648" r:id="rId1"/>
   </p:sldMasterIdLst>
   <p:notesMasterIdLst>
-    <p:notesMasterId r:id="rId22"/>
+    <p:notesMasterId r:id="rId23"/>
   </p:notesMasterIdLst>
   <p:sldIdLst>
     <p:sldId id="257" r:id="rId2"/>
@@ -14,20 +14,21 @@
     <p:sldId id="266" r:id="rId5"/>
     <p:sldId id="267" r:id="rId6"/>
     <p:sldId id="277" r:id="rId7"/>
-    <p:sldId id="269" r:id="rId8"/>
-    <p:sldId id="271" r:id="rId9"/>
-    <p:sldId id="272" r:id="rId10"/>
-    <p:sldId id="274" r:id="rId11"/>
-    <p:sldId id="275" r:id="rId12"/>
-    <p:sldId id="276" r:id="rId13"/>
-    <p:sldId id="270" r:id="rId14"/>
-    <p:sldId id="273" r:id="rId15"/>
-    <p:sldId id="268" r:id="rId16"/>
-    <p:sldId id="260" r:id="rId17"/>
-    <p:sldId id="261" r:id="rId18"/>
-    <p:sldId id="262" r:id="rId19"/>
-    <p:sldId id="263" r:id="rId20"/>
-    <p:sldId id="264" r:id="rId21"/>
+    <p:sldId id="278" r:id="rId8"/>
+    <p:sldId id="269" r:id="rId9"/>
+    <p:sldId id="271" r:id="rId10"/>
+    <p:sldId id="272" r:id="rId11"/>
+    <p:sldId id="274" r:id="rId12"/>
+    <p:sldId id="275" r:id="rId13"/>
+    <p:sldId id="276" r:id="rId14"/>
+    <p:sldId id="270" r:id="rId15"/>
+    <p:sldId id="273" r:id="rId16"/>
+    <p:sldId id="268" r:id="rId17"/>
+    <p:sldId id="260" r:id="rId18"/>
+    <p:sldId id="261" r:id="rId19"/>
+    <p:sldId id="262" r:id="rId20"/>
+    <p:sldId id="263" r:id="rId21"/>
+    <p:sldId id="264" r:id="rId22"/>
   </p:sldIdLst>
   <p:sldSz cx="17556163" cy="9875838"/>
   <p:notesSz cx="9875838" cy="17556163"/>
@@ -1335,7 +1336,32 @@
           <a:bodyPr/>
           <a:lstStyle/>
           <a:p>
-            <a:endParaRPr lang="ko-KR" altLang="en-US"/>
+            <a:r>
+              <a:rPr lang="ko-KR" altLang="en-US" dirty="0" smtClean="0"/>
+              <a:t>다중 클라이언트 실시간 </a:t>
+            </a:r>
+            <a:r>
+              <a:rPr lang="en-US" altLang="ko-KR" dirty="0" smtClean="0"/>
+              <a:t>UDP </a:t>
+            </a:r>
+            <a:r>
+              <a:rPr lang="ko-KR" altLang="en-US" smtClean="0"/>
+              <a:t>통신</a:t>
+            </a:r>
+            <a:endParaRPr lang="en-US" altLang="ko-KR" dirty="0" smtClean="0"/>
+          </a:p>
+          <a:p>
+            <a:r>
+              <a:rPr lang="ko-KR" altLang="en-US" dirty="0" smtClean="0"/>
+              <a:t>출제자와 참가자 화면 동기화</a:t>
+            </a:r>
+            <a:endParaRPr lang="en-US" altLang="ko-KR" dirty="0" smtClean="0"/>
+          </a:p>
+          <a:p>
+            <a:endParaRPr lang="en-US" altLang="ko-KR" dirty="0" smtClean="0"/>
+          </a:p>
+          <a:p>
+            <a:endParaRPr lang="ko-KR" altLang="en-US" dirty="0"/>
           </a:p>
         </p:txBody>
       </p:sp>
@@ -1369,7 +1395,7 @@
                 <a:latin typeface="LG스마트체2.0 Regular" panose="020B0600000101010101" pitchFamily="50" charset="-127"/>
                 <a:ea typeface="LG스마트체2.0 Regular" panose="020B0600000101010101" pitchFamily="50" charset="-127"/>
               </a:rPr>
-              <a:t>4. </a:t>
+              <a:t>3. </a:t>
             </a:r>
             <a:r>
               <a:rPr lang="ko-KR" altLang="en-US" sz="5400" b="1" dirty="0">
@@ -1379,7 +1405,7 @@
                 <a:latin typeface="LG스마트체2.0 Regular" panose="020B0600000101010101" pitchFamily="50" charset="-127"/>
                 <a:ea typeface="LG스마트체2.0 Regular" panose="020B0600000101010101" pitchFamily="50" charset="-127"/>
               </a:rPr>
-              <a:t>결과 분석 및 기대 효과</a:t>
+              <a:t>핵심 기술</a:t>
             </a:r>
           </a:p>
         </p:txBody>
@@ -1392,8 +1418,8 @@
         </p:nvSpPr>
         <p:spPr>
           <a:xfrm>
-            <a:off x="884420" y="2488367"/>
-            <a:ext cx="11092721" cy="2458388"/>
+            <a:off x="-690380" y="7570611"/>
+            <a:ext cx="11092721" cy="2188564"/>
           </a:xfrm>
           <a:prstGeom prst="rect">
             <a:avLst/>
@@ -1432,7 +1458,7 @@
                   <a:schemeClr val="tx1"/>
                 </a:solidFill>
               </a:rPr>
-              <a:t>결과물에 대한 성능측정 또는 목표달성 여부 등 평가</a:t>
+              <a:t>개발에 사용된 가장 핵심적으로 구현된 기술 소개</a:t>
             </a:r>
             <a:endParaRPr lang="en-US" altLang="ko-KR" sz="3200" b="1" dirty="0">
               <a:solidFill>
@@ -1451,7 +1477,7 @@
                   <a:schemeClr val="tx1"/>
                 </a:solidFill>
               </a:rPr>
-              <a:t>성능이 낮을 경우 원인 분석 및 개선책 검토 기록</a:t>
+              <a:t>기술 내용 또는 소스코드 등 다양한 방법으로 핵심을 소개</a:t>
             </a:r>
             <a:endParaRPr lang="en-US" altLang="ko-KR" sz="3200" b="1" dirty="0">
               <a:solidFill>
@@ -1470,42 +1496,7 @@
                   <a:schemeClr val="tx1"/>
                 </a:solidFill>
               </a:rPr>
-              <a:t>성능이 만족했을 경우 향후 활용 가능한 기대효과 기록</a:t>
-            </a:r>
-            <a:endParaRPr lang="en-US" altLang="ko-KR" sz="3200" b="1" dirty="0">
-              <a:solidFill>
-                <a:schemeClr val="tx1"/>
-              </a:solidFill>
-            </a:endParaRPr>
-          </a:p>
-          <a:p>
-            <a:pPr marL="457200" indent="-457200">
-              <a:buFontTx/>
-              <a:buChar char="-"/>
-            </a:pPr>
-            <a:r>
-              <a:rPr lang="ko-KR" altLang="en-US" sz="3200" b="1" dirty="0">
-                <a:solidFill>
-                  <a:schemeClr val="tx1"/>
-                </a:solidFill>
-              </a:rPr>
-              <a:t>가급적 </a:t>
-            </a:r>
-            <a:r>
-              <a:rPr lang="en-US" altLang="ko-KR" sz="3200" b="1" dirty="0">
-                <a:solidFill>
-                  <a:schemeClr val="tx1"/>
-                </a:solidFill>
-              </a:rPr>
-              <a:t>1 </a:t>
-            </a:r>
-            <a:r>
-              <a:rPr lang="ko-KR" altLang="en-US" sz="3200" b="1" dirty="0">
-                <a:solidFill>
-                  <a:schemeClr val="tx1"/>
-                </a:solidFill>
-              </a:rPr>
-              <a:t>페이지로 정리</a:t>
+              <a:t>페이지 수 무관</a:t>
             </a:r>
           </a:p>
         </p:txBody>
@@ -1513,7 +1504,7 @@
     </p:spTree>
     <p:extLst>
       <p:ext uri="{BB962C8B-B14F-4D97-AF65-F5344CB8AC3E}">
-        <p14:creationId xmlns:p14="http://schemas.microsoft.com/office/powerpoint/2010/main" val="442290376"/>
+        <p14:creationId xmlns:p14="http://schemas.microsoft.com/office/powerpoint/2010/main" val="3138293880"/>
       </p:ext>
     </p:extLst>
   </p:cSld>
@@ -1596,7 +1587,7 @@
                 <a:latin typeface="LG스마트체2.0 Regular" panose="020B0600000101010101" pitchFamily="50" charset="-127"/>
                 <a:ea typeface="LG스마트체2.0 Regular" panose="020B0600000101010101" pitchFamily="50" charset="-127"/>
               </a:rPr>
-              <a:t>5. </a:t>
+              <a:t>4. </a:t>
             </a:r>
             <a:r>
               <a:rPr lang="ko-KR" altLang="en-US" sz="5400" b="1" dirty="0">
@@ -1606,7 +1597,7 @@
                 <a:latin typeface="LG스마트체2.0 Regular" panose="020B0600000101010101" pitchFamily="50" charset="-127"/>
                 <a:ea typeface="LG스마트체2.0 Regular" panose="020B0600000101010101" pitchFamily="50" charset="-127"/>
               </a:rPr>
-              <a:t>향후 연구 과제</a:t>
+              <a:t>결과 분석 및 기대 효과</a:t>
             </a:r>
           </a:p>
         </p:txBody>
@@ -1620,7 +1611,7 @@
         <p:spPr>
           <a:xfrm>
             <a:off x="884420" y="2488367"/>
-            <a:ext cx="11092721" cy="1798820"/>
+            <a:ext cx="11092721" cy="2458388"/>
           </a:xfrm>
           <a:prstGeom prst="rect">
             <a:avLst/>
@@ -1659,23 +1650,7 @@
                   <a:schemeClr val="tx1"/>
                 </a:solidFill>
               </a:rPr>
-              <a:t>개발 결과물의 추후 개선점</a:t>
-            </a:r>
-            <a:r>
-              <a:rPr lang="en-US" altLang="ko-KR" sz="3200" b="1" dirty="0">
-                <a:solidFill>
-                  <a:schemeClr val="tx1"/>
-                </a:solidFill>
-              </a:rPr>
-              <a:t>, </a:t>
-            </a:r>
-            <a:r>
-              <a:rPr lang="ko-KR" altLang="en-US" sz="3200" b="1" dirty="0">
-                <a:solidFill>
-                  <a:schemeClr val="tx1"/>
-                </a:solidFill>
-              </a:rPr>
-              <a:t>후속 개발 주제 등에 대한 내용</a:t>
+              <a:t>결과물에 대한 성능측정 또는 목표달성 여부 등 평가</a:t>
             </a:r>
             <a:endParaRPr lang="en-US" altLang="ko-KR" sz="3200" b="1" dirty="0">
               <a:solidFill>
@@ -1694,6 +1669,44 @@
                   <a:schemeClr val="tx1"/>
                 </a:solidFill>
               </a:rPr>
+              <a:t>성능이 낮을 경우 원인 분석 및 개선책 검토 기록</a:t>
+            </a:r>
+            <a:endParaRPr lang="en-US" altLang="ko-KR" sz="3200" b="1" dirty="0">
+              <a:solidFill>
+                <a:schemeClr val="tx1"/>
+              </a:solidFill>
+            </a:endParaRPr>
+          </a:p>
+          <a:p>
+            <a:pPr marL="457200" indent="-457200">
+              <a:buFontTx/>
+              <a:buChar char="-"/>
+            </a:pPr>
+            <a:r>
+              <a:rPr lang="ko-KR" altLang="en-US" sz="3200" b="1" dirty="0">
+                <a:solidFill>
+                  <a:schemeClr val="tx1"/>
+                </a:solidFill>
+              </a:rPr>
+              <a:t>성능이 만족했을 경우 향후 활용 가능한 기대효과 기록</a:t>
+            </a:r>
+            <a:endParaRPr lang="en-US" altLang="ko-KR" sz="3200" b="1" dirty="0">
+              <a:solidFill>
+                <a:schemeClr val="tx1"/>
+              </a:solidFill>
+            </a:endParaRPr>
+          </a:p>
+          <a:p>
+            <a:pPr marL="457200" indent="-457200">
+              <a:buFontTx/>
+              <a:buChar char="-"/>
+            </a:pPr>
+            <a:r>
+              <a:rPr lang="ko-KR" altLang="en-US" sz="3200" b="1" dirty="0">
+                <a:solidFill>
+                  <a:schemeClr val="tx1"/>
+                </a:solidFill>
+              </a:rPr>
               <a:t>가급적 </a:t>
             </a:r>
             <a:r>
@@ -1702,7 +1715,7 @@
                   <a:schemeClr val="tx1"/>
                 </a:solidFill>
               </a:rPr>
-              <a:t>1</a:t>
+              <a:t>1 </a:t>
             </a:r>
             <a:r>
               <a:rPr lang="ko-KR" altLang="en-US" sz="3200" b="1" dirty="0">
@@ -1710,7 +1723,7 @@
                   <a:schemeClr val="tx1"/>
                 </a:solidFill>
               </a:rPr>
-              <a:t>페이지로 요약</a:t>
+              <a:t>페이지로 정리</a:t>
             </a:r>
           </a:p>
         </p:txBody>
@@ -1718,7 +1731,7 @@
     </p:spTree>
     <p:extLst>
       <p:ext uri="{BB962C8B-B14F-4D97-AF65-F5344CB8AC3E}">
-        <p14:creationId xmlns:p14="http://schemas.microsoft.com/office/powerpoint/2010/main" val="2998846418"/>
+        <p14:creationId xmlns:p14="http://schemas.microsoft.com/office/powerpoint/2010/main" val="442290376"/>
       </p:ext>
     </p:extLst>
   </p:cSld>
@@ -1801,7 +1814,7 @@
                 <a:latin typeface="LG스마트체2.0 Regular" panose="020B0600000101010101" pitchFamily="50" charset="-127"/>
                 <a:ea typeface="LG스마트체2.0 Regular" panose="020B0600000101010101" pitchFamily="50" charset="-127"/>
               </a:rPr>
-              <a:t>6. </a:t>
+              <a:t>5. </a:t>
             </a:r>
             <a:r>
               <a:rPr lang="ko-KR" altLang="en-US" sz="5400" b="1" dirty="0">
@@ -1811,7 +1824,7 @@
                 <a:latin typeface="LG스마트체2.0 Regular" panose="020B0600000101010101" pitchFamily="50" charset="-127"/>
                 <a:ea typeface="LG스마트체2.0 Regular" panose="020B0600000101010101" pitchFamily="50" charset="-127"/>
               </a:rPr>
-              <a:t>프로젝트 수행 후기</a:t>
+              <a:t>향후 연구 과제</a:t>
             </a:r>
           </a:p>
         </p:txBody>
@@ -1825,7 +1838,7 @@
         <p:spPr>
           <a:xfrm>
             <a:off x="884420" y="2488367"/>
-            <a:ext cx="11092721" cy="2203554"/>
+            <a:ext cx="11092721" cy="1798820"/>
           </a:xfrm>
           <a:prstGeom prst="rect">
             <a:avLst/>
@@ -1864,15 +1877,23 @@
                   <a:schemeClr val="tx1"/>
                 </a:solidFill>
               </a:rPr>
-              <a:t>프로젝트 수행에 따른 </a:t>
-            </a:r>
-            <a:r>
-              <a:rPr lang="ko-KR" altLang="en-US" sz="3200" b="1" dirty="0" err="1">
-                <a:solidFill>
-                  <a:schemeClr val="tx1"/>
-                </a:solidFill>
-              </a:rPr>
-              <a:t>느낀점</a:t>
+              <a:t>개발 결과물의 추후 개선점</a:t>
+            </a:r>
+            <a:r>
+              <a:rPr lang="en-US" altLang="ko-KR" sz="3200" b="1" dirty="0">
+                <a:solidFill>
+                  <a:schemeClr val="tx1"/>
+                </a:solidFill>
+              </a:rPr>
+              <a:t>, </a:t>
+            </a:r>
+            <a:r>
+              <a:rPr lang="ko-KR" altLang="en-US" sz="3200" b="1" dirty="0">
+                <a:solidFill>
+                  <a:schemeClr val="tx1"/>
+                </a:solidFill>
+              </a:rPr>
+              <a:t>후속 개발 주제 등에 대한 내용</a:t>
             </a:r>
             <a:endParaRPr lang="en-US" altLang="ko-KR" sz="3200" b="1" dirty="0">
               <a:solidFill>
@@ -1886,55 +1907,28 @@
               <a:buChar char="-"/>
             </a:pPr>
             <a:r>
-              <a:rPr lang="ko-KR" altLang="en-US" sz="3200" b="1" dirty="0" err="1">
-                <a:solidFill>
-                  <a:schemeClr val="tx1"/>
-                </a:solidFill>
-              </a:rPr>
-              <a:t>개발중</a:t>
-            </a:r>
-            <a:r>
               <a:rPr lang="ko-KR" altLang="en-US" sz="3200" b="1" dirty="0">
                 <a:solidFill>
                   <a:schemeClr val="tx1"/>
                 </a:solidFill>
               </a:rPr>
-              <a:t> 어려웠던 점 그리고 이를 극복한 사연 등</a:t>
-            </a:r>
-            <a:endParaRPr lang="en-US" altLang="ko-KR" sz="3200" b="1" dirty="0">
-              <a:solidFill>
-                <a:schemeClr val="tx1"/>
-              </a:solidFill>
-            </a:endParaRPr>
-          </a:p>
-          <a:p>
-            <a:pPr marL="457200" indent="-457200">
-              <a:buFontTx/>
-              <a:buChar char="-"/>
-            </a:pPr>
+              <a:t>가급적 </a:t>
+            </a:r>
+            <a:r>
+              <a:rPr lang="en-US" altLang="ko-KR" sz="3200" b="1" dirty="0">
+                <a:solidFill>
+                  <a:schemeClr val="tx1"/>
+                </a:solidFill>
+              </a:rPr>
+              <a:t>1</a:t>
+            </a:r>
             <a:r>
               <a:rPr lang="ko-KR" altLang="en-US" sz="3200" b="1" dirty="0">
                 <a:solidFill>
                   <a:schemeClr val="tx1"/>
                 </a:solidFill>
               </a:rPr>
-              <a:t>교육과 프로젝트를 마무리한 소회 등</a:t>
-            </a:r>
-            <a:r>
-              <a:rPr lang="en-US" altLang="ko-KR" sz="3200" b="1" dirty="0">
-                <a:solidFill>
-                  <a:schemeClr val="tx1"/>
-                </a:solidFill>
-              </a:rPr>
-              <a:t>… 1</a:t>
-            </a:r>
-            <a:r>
-              <a:rPr lang="ko-KR" altLang="en-US" sz="3200" b="1" dirty="0">
-                <a:solidFill>
-                  <a:schemeClr val="tx1"/>
-                </a:solidFill>
-              </a:rPr>
-              <a:t>페이지로 정리 </a:t>
+              <a:t>페이지로 요약</a:t>
             </a:r>
           </a:p>
         </p:txBody>
@@ -1942,7 +1936,7 @@
     </p:spTree>
     <p:extLst>
       <p:ext uri="{BB962C8B-B14F-4D97-AF65-F5344CB8AC3E}">
-        <p14:creationId xmlns:p14="http://schemas.microsoft.com/office/powerpoint/2010/main" val="693654044"/>
+        <p14:creationId xmlns:p14="http://schemas.microsoft.com/office/powerpoint/2010/main" val="2998846418"/>
       </p:ext>
     </p:extLst>
   </p:cSld>
@@ -1991,21 +1985,182 @@
           <a:bodyPr/>
           <a:lstStyle/>
           <a:p>
-            <a:pPr marL="0" indent="0" algn="ctr">
-              <a:buNone/>
+            <a:endParaRPr lang="ko-KR" altLang="en-US"/>
+          </a:p>
+        </p:txBody>
+      </p:sp>
+      <p:sp>
+        <p:nvSpPr>
+          <p:cNvPr id="3" name="TextBox 2"/>
+          <p:cNvSpPr txBox="1"/>
+          <p:nvPr/>
+        </p:nvSpPr>
+        <p:spPr>
+          <a:xfrm>
+            <a:off x="244862" y="238662"/>
+            <a:ext cx="14190667" cy="923330"/>
+          </a:xfrm>
+          <a:prstGeom prst="rect">
+            <a:avLst/>
+          </a:prstGeom>
+          <a:noFill/>
+        </p:spPr>
+        <p:txBody>
+          <a:bodyPr wrap="square" rtlCol="0">
+            <a:spAutoFit/>
+          </a:bodyPr>
+          <a:lstStyle/>
+          <a:p>
+            <a:r>
+              <a:rPr lang="en-US" altLang="ko-KR" sz="5400" b="1" dirty="0">
+                <a:solidFill>
+                  <a:schemeClr val="bg1"/>
+                </a:solidFill>
+                <a:latin typeface="LG스마트체2.0 Regular" panose="020B0600000101010101" pitchFamily="50" charset="-127"/>
+                <a:ea typeface="LG스마트체2.0 Regular" panose="020B0600000101010101" pitchFamily="50" charset="-127"/>
+              </a:rPr>
+              <a:t>6. </a:t>
+            </a:r>
+            <a:r>
+              <a:rPr lang="ko-KR" altLang="en-US" sz="5400" b="1" dirty="0">
+                <a:solidFill>
+                  <a:schemeClr val="bg1"/>
+                </a:solidFill>
+                <a:latin typeface="LG스마트체2.0 Regular" panose="020B0600000101010101" pitchFamily="50" charset="-127"/>
+                <a:ea typeface="LG스마트체2.0 Regular" panose="020B0600000101010101" pitchFamily="50" charset="-127"/>
+              </a:rPr>
+              <a:t>프로젝트 수행 후기</a:t>
+            </a:r>
+          </a:p>
+        </p:txBody>
+      </p:sp>
+      <p:sp>
+        <p:nvSpPr>
+          <p:cNvPr id="4" name="직사각형 3"/>
+          <p:cNvSpPr/>
+          <p:nvPr/>
+        </p:nvSpPr>
+        <p:spPr>
+          <a:xfrm>
+            <a:off x="884420" y="2488367"/>
+            <a:ext cx="11092721" cy="2203554"/>
+          </a:xfrm>
+          <a:prstGeom prst="rect">
+            <a:avLst/>
+          </a:prstGeom>
+          <a:solidFill>
+            <a:srgbClr val="FFFF00"/>
+          </a:solidFill>
+        </p:spPr>
+        <p:style>
+          <a:lnRef idx="2">
+            <a:schemeClr val="accent1">
+              <a:shade val="50000"/>
+            </a:schemeClr>
+          </a:lnRef>
+          <a:fillRef idx="1">
+            <a:schemeClr val="accent1"/>
+          </a:fillRef>
+          <a:effectRef idx="0">
+            <a:schemeClr val="accent1"/>
+          </a:effectRef>
+          <a:fontRef idx="minor">
+            <a:schemeClr val="lt1"/>
+          </a:fontRef>
+        </p:style>
+        <p:txBody>
+          <a:bodyPr rtlCol="0" anchor="ctr"/>
+          <a:lstStyle/>
+          <a:p>
+            <a:pPr marL="457200" indent="-457200">
+              <a:buFontTx/>
+              <a:buChar char="-"/>
             </a:pPr>
             <a:r>
-              <a:rPr lang="en-US" altLang="ko-KR" sz="19900" dirty="0" smtClean="0"/>
-              <a:t>APPENDIX</a:t>
-            </a:r>
-            <a:endParaRPr lang="ko-KR" altLang="en-US"/>
+              <a:rPr lang="ko-KR" altLang="en-US" sz="3200" b="1" dirty="0">
+                <a:solidFill>
+                  <a:schemeClr val="tx1"/>
+                </a:solidFill>
+              </a:rPr>
+              <a:t>프로젝트 수행에 따른 </a:t>
+            </a:r>
+            <a:r>
+              <a:rPr lang="ko-KR" altLang="en-US" sz="3200" b="1" dirty="0" err="1">
+                <a:solidFill>
+                  <a:schemeClr val="tx1"/>
+                </a:solidFill>
+              </a:rPr>
+              <a:t>느낀점</a:t>
+            </a:r>
+            <a:endParaRPr lang="en-US" altLang="ko-KR" sz="3200" b="1" dirty="0">
+              <a:solidFill>
+                <a:schemeClr val="tx1"/>
+              </a:solidFill>
+            </a:endParaRPr>
+          </a:p>
+          <a:p>
+            <a:pPr marL="457200" indent="-457200">
+              <a:buFontTx/>
+              <a:buChar char="-"/>
+            </a:pPr>
+            <a:r>
+              <a:rPr lang="ko-KR" altLang="en-US" sz="3200" b="1" dirty="0" err="1">
+                <a:solidFill>
+                  <a:schemeClr val="tx1"/>
+                </a:solidFill>
+              </a:rPr>
+              <a:t>개발중</a:t>
+            </a:r>
+            <a:r>
+              <a:rPr lang="ko-KR" altLang="en-US" sz="3200" b="1" dirty="0">
+                <a:solidFill>
+                  <a:schemeClr val="tx1"/>
+                </a:solidFill>
+              </a:rPr>
+              <a:t> 어려웠던 점 그리고 이를 극복한 사연 등</a:t>
+            </a:r>
+            <a:endParaRPr lang="en-US" altLang="ko-KR" sz="3200" b="1" dirty="0">
+              <a:solidFill>
+                <a:schemeClr val="tx1"/>
+              </a:solidFill>
+            </a:endParaRPr>
+          </a:p>
+          <a:p>
+            <a:pPr marL="457200" indent="-457200">
+              <a:buFontTx/>
+              <a:buChar char="-"/>
+            </a:pPr>
+            <a:r>
+              <a:rPr lang="ko-KR" altLang="en-US" sz="3200" b="1" dirty="0">
+                <a:solidFill>
+                  <a:schemeClr val="tx1"/>
+                </a:solidFill>
+              </a:rPr>
+              <a:t>교육과 프로젝트를 마무리한 소회 등</a:t>
+            </a:r>
+            <a:r>
+              <a:rPr lang="en-US" altLang="ko-KR" sz="3200" b="1" dirty="0">
+                <a:solidFill>
+                  <a:schemeClr val="tx1"/>
+                </a:solidFill>
+              </a:rPr>
+              <a:t>… 1</a:t>
+            </a:r>
+            <a:r>
+              <a:rPr lang="ko-KR" altLang="en-US" sz="3200" b="1" dirty="0">
+                <a:solidFill>
+                  <a:schemeClr val="tx1"/>
+                </a:solidFill>
+              </a:rPr>
+              <a:t>페이지로 정리 </a:t>
+            </a:r>
           </a:p>
         </p:txBody>
       </p:sp>
     </p:spTree>
     <p:extLst>
       <p:ext uri="{BB962C8B-B14F-4D97-AF65-F5344CB8AC3E}">
-        <p14:creationId xmlns:p14="http://schemas.microsoft.com/office/powerpoint/2010/main" val="1390112942"/>
+        <p14:creationId xmlns:p14="http://schemas.microsoft.com/office/powerpoint/2010/main" val="693654044"/>
       </p:ext>
     </p:extLst>
   </p:cSld>
@@ -2049,575 +2204,26 @@
             <p:ph type="body" sz="quarter" idx="10"/>
           </p:nvPr>
         </p:nvSpPr>
-        <p:spPr>
-          <a:xfrm>
-            <a:off x="393700" y="177800"/>
-            <a:ext cx="16560800" cy="9525000"/>
-          </a:xfrm>
-          <a:solidFill>
-            <a:schemeClr val="bg1"/>
-          </a:solidFill>
-        </p:spPr>
+        <p:spPr/>
         <p:txBody>
           <a:bodyPr/>
           <a:lstStyle/>
           <a:p>
-            <a:r>
-              <a:rPr lang="en-US" altLang="ko-KR" sz="1400" dirty="0"/>
-              <a:t>===================================</a:t>
-            </a:r>
-          </a:p>
-          <a:p>
-            <a:r>
-              <a:rPr lang="en-US" altLang="ko-KR" sz="1400" dirty="0"/>
-              <a:t>MAC </a:t>
-            </a:r>
-            <a:r>
-              <a:rPr lang="ko-KR" altLang="en-US" sz="1400"/>
-              <a:t>주소 변경 방법</a:t>
-            </a:r>
-          </a:p>
-          <a:p>
-            <a:r>
-              <a:rPr lang="en-US" altLang="ko-KR" sz="1400" dirty="0"/>
-              <a:t>===================================</a:t>
-            </a:r>
-          </a:p>
-          <a:p>
-            <a:r>
-              <a:rPr lang="en-US" altLang="ko-KR" sz="1400" dirty="0"/>
-              <a:t>1. MAC </a:t>
-            </a:r>
-            <a:r>
-              <a:rPr lang="ko-KR" altLang="en-US" sz="1400"/>
-              <a:t>주소란 이더넷 장치의 하드웨어 주소임 </a:t>
-            </a:r>
-            <a:r>
-              <a:rPr lang="en-US" altLang="ko-KR" sz="1400" dirty="0"/>
-              <a:t>-&gt; </a:t>
-            </a:r>
-            <a:r>
-              <a:rPr lang="ko-KR" altLang="en-US" sz="1400"/>
-              <a:t>동일한 네트워크에서는 </a:t>
-            </a:r>
-            <a:r>
-              <a:rPr lang="en-US" altLang="ko-KR" sz="1400" dirty="0"/>
-              <a:t>IP </a:t>
-            </a:r>
-            <a:r>
-              <a:rPr lang="ko-KR" altLang="en-US" sz="1400"/>
-              <a:t>주소가 아니라 </a:t>
-            </a:r>
-            <a:r>
-              <a:rPr lang="en-US" altLang="ko-KR" sz="1400" dirty="0"/>
-              <a:t>MAC </a:t>
-            </a:r>
-            <a:r>
-              <a:rPr lang="ko-KR" altLang="en-US" sz="1400"/>
-              <a:t>주소를 이용하여 통신이 이루어짐</a:t>
-            </a:r>
-          </a:p>
-          <a:p>
-            <a:r>
-              <a:rPr lang="en-US" altLang="ko-KR" sz="1400" dirty="0"/>
-              <a:t>2. WT2837</a:t>
-            </a:r>
-            <a:r>
-              <a:rPr lang="ko-KR" altLang="en-US" sz="1400"/>
-              <a:t>은 </a:t>
-            </a:r>
-            <a:r>
-              <a:rPr lang="en-US" altLang="ko-KR" sz="1400" dirty="0"/>
-              <a:t>U-Boot</a:t>
-            </a:r>
-            <a:r>
-              <a:rPr lang="ko-KR" altLang="en-US" sz="1400"/>
-              <a:t>의 환경변수 </a:t>
-            </a:r>
-            <a:r>
-              <a:rPr lang="en-US" altLang="ko-KR" sz="1400" dirty="0" err="1"/>
-              <a:t>ethaddr</a:t>
-            </a:r>
-            <a:r>
-              <a:rPr lang="ko-KR" altLang="en-US" sz="1400"/>
-              <a:t>에 저장된 </a:t>
-            </a:r>
-            <a:r>
-              <a:rPr lang="en-US" altLang="ko-KR" sz="1400" dirty="0"/>
-              <a:t>MAC </a:t>
-            </a:r>
-            <a:r>
-              <a:rPr lang="ko-KR" altLang="en-US" sz="1400"/>
-              <a:t>주소를 커널이 받아서 사용함</a:t>
-            </a:r>
-          </a:p>
-          <a:p>
-            <a:r>
-              <a:rPr lang="en-US" altLang="ko-KR" sz="1400" dirty="0"/>
-              <a:t>3. </a:t>
-            </a:r>
-            <a:r>
-              <a:rPr lang="ko-KR" altLang="en-US" sz="1400"/>
-              <a:t>따라서 현재 커널이 부팅완료된 후 </a:t>
-            </a:r>
-            <a:r>
-              <a:rPr lang="en-US" altLang="ko-KR" sz="1400" dirty="0"/>
-              <a:t>MAC </a:t>
-            </a:r>
-            <a:r>
-              <a:rPr lang="ko-KR" altLang="en-US" sz="1400"/>
-              <a:t>주소를 보면 다음과 같이 모두 </a:t>
-            </a:r>
-            <a:r>
-              <a:rPr lang="en-US" altLang="ko-KR" sz="1400" dirty="0"/>
-              <a:t>B8:27:EB:9D:E5:C8 </a:t>
-            </a:r>
-            <a:r>
-              <a:rPr lang="ko-KR" altLang="en-US" sz="1400"/>
-              <a:t>로 되어 있음</a:t>
-            </a:r>
-          </a:p>
-          <a:p>
-            <a:endParaRPr lang="ko-KR" altLang="en-US" sz="1400" dirty="0"/>
-          </a:p>
-          <a:p>
-            <a:r>
-              <a:rPr lang="en-US" altLang="ko-KR" sz="1400" dirty="0"/>
-              <a:t>root@WT2837:~# </a:t>
-            </a:r>
-            <a:r>
-              <a:rPr lang="en-US" altLang="ko-KR" sz="1400" dirty="0" err="1"/>
-              <a:t>ifconfig</a:t>
-            </a:r>
-            <a:r>
-              <a:rPr lang="en-US" altLang="ko-KR" sz="1400" dirty="0"/>
-              <a:t>                                                         </a:t>
-            </a:r>
-          </a:p>
-          <a:p>
-            <a:r>
-              <a:rPr lang="en-US" altLang="ko-KR" sz="1400" dirty="0"/>
-              <a:t>eth0      Link </a:t>
-            </a:r>
-            <a:r>
-              <a:rPr lang="en-US" altLang="ko-KR" sz="1400" dirty="0" err="1"/>
-              <a:t>encap:Ethernet</a:t>
-            </a:r>
-            <a:r>
-              <a:rPr lang="en-US" altLang="ko-KR" sz="1400" dirty="0"/>
-              <a:t>  </a:t>
-            </a:r>
-            <a:r>
-              <a:rPr lang="en-US" altLang="ko-KR" sz="1400" dirty="0" err="1"/>
-              <a:t>HWaddr</a:t>
-            </a:r>
-            <a:r>
-              <a:rPr lang="en-US" altLang="ko-KR" sz="1400" dirty="0"/>
-              <a:t> B8:27:EB:9D:E5:C8                         </a:t>
-            </a:r>
-          </a:p>
-          <a:p>
-            <a:r>
-              <a:rPr lang="en-US" altLang="ko-KR" sz="1400" dirty="0"/>
-              <a:t>          </a:t>
-            </a:r>
-            <a:r>
-              <a:rPr lang="en-US" altLang="ko-KR" sz="1400" dirty="0" err="1"/>
-              <a:t>inet</a:t>
-            </a:r>
-            <a:r>
-              <a:rPr lang="en-US" altLang="ko-KR" sz="1400" dirty="0"/>
-              <a:t> addr:192.168.10.3  Bcast:0.0.0.0  Mask:255.255.255.0             </a:t>
-            </a:r>
-          </a:p>
-          <a:p>
-            <a:r>
-              <a:rPr lang="en-US" altLang="ko-KR" sz="1400" dirty="0"/>
-              <a:t>          UP BROADCAST RUNNING MULTICAST  MTU:1500  Metric:1                    </a:t>
-            </a:r>
-          </a:p>
-          <a:p>
-            <a:r>
-              <a:rPr lang="en-US" altLang="ko-KR" sz="1400" dirty="0"/>
-              <a:t>          RX packets:37 errors:0 dropped:0 overruns:0 frame:0                   </a:t>
-            </a:r>
-          </a:p>
-          <a:p>
-            <a:r>
-              <a:rPr lang="en-US" altLang="ko-KR" sz="1400" dirty="0"/>
-              <a:t>          TX packets:31 errors:0 dropped:0 overruns:0 carrier:0                 </a:t>
-            </a:r>
-          </a:p>
-          <a:p>
-            <a:r>
-              <a:rPr lang="en-US" altLang="ko-KR" sz="1400" dirty="0"/>
-              <a:t>          collisions:0 txqueuelen:1000                                          </a:t>
-            </a:r>
-          </a:p>
-          <a:p>
-            <a:r>
-              <a:rPr lang="en-US" altLang="ko-KR" sz="1400" dirty="0"/>
-              <a:t>          RX bytes:3710 (3.6 KiB)  TX bytes:3334 (3.2 KiB) </a:t>
-            </a:r>
-          </a:p>
-          <a:p>
-            <a:r>
-              <a:rPr lang="en-US" altLang="ko-KR" sz="1400" dirty="0"/>
-              <a:t>		  </a:t>
-            </a:r>
-          </a:p>
-          <a:p>
-            <a:r>
-              <a:rPr lang="en-US" altLang="ko-KR" sz="1400" dirty="0"/>
-              <a:t>4. </a:t>
-            </a:r>
-            <a:r>
-              <a:rPr lang="ko-KR" altLang="en-US" sz="1400"/>
-              <a:t>동일한 네트워크에 있는 보드들의 </a:t>
-            </a:r>
-            <a:r>
-              <a:rPr lang="en-US" altLang="ko-KR" sz="1400" dirty="0"/>
-              <a:t>MAC </a:t>
-            </a:r>
-            <a:r>
-              <a:rPr lang="ko-KR" altLang="en-US" sz="1400"/>
-              <a:t>주소가 동일하면 통신이 안됨 </a:t>
-            </a:r>
-            <a:r>
-              <a:rPr lang="en-US" altLang="ko-KR" sz="1400" dirty="0"/>
-              <a:t>-&gt; </a:t>
-            </a:r>
-            <a:r>
-              <a:rPr lang="ko-KR" altLang="en-US" sz="1400"/>
-              <a:t>따라서 보드들의 </a:t>
-            </a:r>
-            <a:r>
-              <a:rPr lang="en-US" altLang="ko-KR" sz="1400" dirty="0"/>
-              <a:t>MAC </a:t>
-            </a:r>
-            <a:r>
-              <a:rPr lang="ko-KR" altLang="en-US" sz="1400"/>
-              <a:t>주소를 다르게 설정해야 함</a:t>
-            </a:r>
-          </a:p>
-          <a:p>
-            <a:endParaRPr lang="ko-KR" altLang="en-US" sz="1400" dirty="0"/>
-          </a:p>
-          <a:p>
-            <a:r>
-              <a:rPr lang="en-US" altLang="ko-KR" sz="1400" dirty="0"/>
-              <a:t>5. WT2837 </a:t>
-            </a:r>
-            <a:r>
-              <a:rPr lang="ko-KR" altLang="en-US" sz="1400"/>
-              <a:t>보드의 </a:t>
-            </a:r>
-            <a:r>
-              <a:rPr lang="en-US" altLang="ko-KR" sz="1400" dirty="0"/>
-              <a:t>MAC </a:t>
-            </a:r>
-            <a:r>
-              <a:rPr lang="ko-KR" altLang="en-US" sz="1400"/>
-              <a:t>주소 변경 방법 </a:t>
-            </a:r>
-            <a:r>
-              <a:rPr lang="en-US" altLang="ko-KR" sz="1400" dirty="0"/>
-              <a:t>(U-Boot</a:t>
-            </a:r>
-            <a:r>
-              <a:rPr lang="ko-KR" altLang="en-US" sz="1400"/>
-              <a:t>에서 진행해야 함</a:t>
-            </a:r>
-            <a:r>
-              <a:rPr lang="en-US" altLang="ko-KR" sz="1400" dirty="0"/>
-              <a:t>)</a:t>
-            </a:r>
-          </a:p>
-          <a:p>
-            <a:r>
-              <a:rPr lang="en-US" altLang="ko-KR" sz="1400" dirty="0" err="1"/>
-              <a:t>setenv</a:t>
-            </a:r>
-            <a:r>
-              <a:rPr lang="en-US" altLang="ko-KR" sz="1400" dirty="0"/>
-              <a:t> -f </a:t>
-            </a:r>
-            <a:r>
-              <a:rPr lang="en-US" altLang="ko-KR" sz="1400" dirty="0" err="1"/>
-              <a:t>ethaddr</a:t>
-            </a:r>
-            <a:r>
-              <a:rPr lang="en-US" altLang="ko-KR" sz="1400" dirty="0"/>
-              <a:t> B8:27:EB:9D:E5:C9</a:t>
-            </a:r>
-          </a:p>
-          <a:p>
-            <a:r>
-              <a:rPr lang="en-US" altLang="ko-KR" sz="1400" dirty="0" err="1"/>
-              <a:t>saveenv</a:t>
-            </a:r>
-            <a:endParaRPr lang="en-US" altLang="ko-KR" sz="1400" dirty="0"/>
-          </a:p>
-          <a:p>
-            <a:endParaRPr lang="en-US" altLang="ko-KR" sz="1400" dirty="0"/>
-          </a:p>
-          <a:p>
-            <a:r>
-              <a:rPr lang="en-US" altLang="ko-KR" sz="1400" dirty="0"/>
-              <a:t>6. </a:t>
-            </a:r>
-            <a:r>
-              <a:rPr lang="ko-KR" altLang="en-US" sz="1400"/>
-              <a:t>예를 들어 보드가 </a:t>
-            </a:r>
-            <a:r>
-              <a:rPr lang="en-US" altLang="ko-KR" sz="1400" dirty="0"/>
-              <a:t>4</a:t>
-            </a:r>
-            <a:r>
-              <a:rPr lang="ko-KR" altLang="en-US" sz="1400"/>
-              <a:t>대인 경우 아래와 같이 </a:t>
-            </a:r>
-            <a:r>
-              <a:rPr lang="en-US" altLang="ko-KR" sz="1400" dirty="0"/>
-              <a:t>MAC </a:t>
-            </a:r>
-            <a:r>
-              <a:rPr lang="ko-KR" altLang="en-US" sz="1400"/>
-              <a:t>주소를 설정하면 됨</a:t>
-            </a:r>
-          </a:p>
-          <a:p>
-            <a:r>
-              <a:rPr lang="ko-KR" altLang="en-US" sz="1400" dirty="0"/>
-              <a:t>보드</a:t>
-            </a:r>
-            <a:r>
-              <a:rPr lang="en-US" altLang="ko-KR" sz="1400" dirty="0"/>
-              <a:t>1: B8:27:EB:9D:E5:C8</a:t>
-            </a:r>
-          </a:p>
-          <a:p>
-            <a:r>
-              <a:rPr lang="ko-KR" altLang="en-US" sz="1400" dirty="0"/>
-              <a:t>보드</a:t>
-            </a:r>
-            <a:r>
-              <a:rPr lang="en-US" altLang="ko-KR" sz="1400" dirty="0"/>
-              <a:t>2: B8:27:EB:9D:E5:C9</a:t>
-            </a:r>
-          </a:p>
-          <a:p>
-            <a:r>
-              <a:rPr lang="ko-KR" altLang="en-US" sz="1400" dirty="0"/>
-              <a:t>보드</a:t>
-            </a:r>
-            <a:r>
-              <a:rPr lang="en-US" altLang="ko-KR" sz="1400" dirty="0"/>
-              <a:t>3: B8:27:EB:9D:E5:CA</a:t>
-            </a:r>
-          </a:p>
-          <a:p>
-            <a:r>
-              <a:rPr lang="ko-KR" altLang="en-US" sz="1400" dirty="0"/>
-              <a:t>보드</a:t>
-            </a:r>
-            <a:r>
-              <a:rPr lang="en-US" altLang="ko-KR" sz="1400" dirty="0"/>
-              <a:t>4: B8:27:EB:9D:E5:CB</a:t>
-            </a:r>
-          </a:p>
-          <a:p>
-            <a:endParaRPr lang="en-US" altLang="ko-KR" sz="1400" dirty="0"/>
-          </a:p>
-          <a:p>
-            <a:r>
-              <a:rPr lang="en-US" altLang="ko-KR" sz="1400" dirty="0"/>
-              <a:t>===================================</a:t>
-            </a:r>
-          </a:p>
-          <a:p>
-            <a:r>
-              <a:rPr lang="en-US" altLang="ko-KR" sz="1400" dirty="0"/>
-              <a:t>IP </a:t>
-            </a:r>
-            <a:r>
-              <a:rPr lang="ko-KR" altLang="en-US" sz="1400"/>
-              <a:t>주소 변경 방법</a:t>
-            </a:r>
-          </a:p>
-          <a:p>
-            <a:r>
-              <a:rPr lang="en-US" altLang="ko-KR" sz="1400" dirty="0"/>
-              <a:t>===================================</a:t>
-            </a:r>
-          </a:p>
-          <a:p>
-            <a:r>
-              <a:rPr lang="en-US" altLang="ko-KR" sz="1400" dirty="0"/>
-              <a:t>1. ~/work/</a:t>
-            </a:r>
-            <a:r>
-              <a:rPr lang="en-US" altLang="ko-KR" sz="1400" dirty="0" err="1"/>
-              <a:t>myrootfs</a:t>
-            </a:r>
-            <a:r>
-              <a:rPr lang="en-US" altLang="ko-KR" sz="1400" dirty="0"/>
-              <a:t>/</a:t>
-            </a:r>
-            <a:r>
-              <a:rPr lang="en-US" altLang="ko-KR" sz="1400" dirty="0" err="1"/>
-              <a:t>rootfs</a:t>
-            </a:r>
-            <a:r>
-              <a:rPr lang="en-US" altLang="ko-KR" sz="1400" dirty="0"/>
-              <a:t>/</a:t>
-            </a:r>
-            <a:r>
-              <a:rPr lang="en-US" altLang="ko-KR" sz="1400" dirty="0" err="1"/>
-              <a:t>etc</a:t>
-            </a:r>
-            <a:r>
-              <a:rPr lang="en-US" altLang="ko-KR" sz="1400" dirty="0"/>
-              <a:t>/network/interfaces</a:t>
-            </a:r>
-            <a:r>
-              <a:rPr lang="ko-KR" altLang="en-US" sz="1400"/>
-              <a:t>에서 </a:t>
-            </a:r>
-            <a:r>
-              <a:rPr lang="en-US" altLang="ko-KR" sz="1400" dirty="0"/>
-              <a:t>192.168.10.3</a:t>
-            </a:r>
-            <a:r>
-              <a:rPr lang="ko-KR" altLang="en-US" sz="1400"/>
-              <a:t>을 희망하는 </a:t>
-            </a:r>
-            <a:r>
-              <a:rPr lang="en-US" altLang="ko-KR" sz="1400" dirty="0"/>
-              <a:t>IP </a:t>
-            </a:r>
-            <a:r>
-              <a:rPr lang="ko-KR" altLang="en-US" sz="1400"/>
-              <a:t>주소로 변경 후 </a:t>
-            </a:r>
-            <a:r>
-              <a:rPr lang="en-US" altLang="ko-KR" sz="1400" dirty="0"/>
-              <a:t>ext2img.gz</a:t>
-            </a:r>
-            <a:r>
-              <a:rPr lang="ko-KR" altLang="en-US" sz="1400"/>
-              <a:t>을 새로 생성하고 </a:t>
-            </a:r>
-            <a:r>
-              <a:rPr lang="en-US" altLang="ko-KR" sz="1400" dirty="0"/>
-              <a:t>SD </a:t>
-            </a:r>
-            <a:r>
-              <a:rPr lang="ko-KR" altLang="en-US" sz="1400"/>
-              <a:t>카드에 구움</a:t>
-            </a:r>
-          </a:p>
-          <a:p>
-            <a:r>
-              <a:rPr lang="en-US" altLang="ko-KR" sz="1400" dirty="0"/>
-              <a:t>2. </a:t>
-            </a:r>
-            <a:r>
-              <a:rPr lang="ko-KR" altLang="en-US" sz="1400"/>
-              <a:t>보드 부팅 후 </a:t>
-            </a:r>
-            <a:r>
-              <a:rPr lang="en-US" altLang="ko-KR" sz="1400" dirty="0" err="1"/>
-              <a:t>ifconfig</a:t>
-            </a:r>
-            <a:r>
-              <a:rPr lang="en-US" altLang="ko-KR" sz="1400" dirty="0"/>
-              <a:t> </a:t>
-            </a:r>
-            <a:r>
-              <a:rPr lang="ko-KR" altLang="en-US" sz="1400"/>
-              <a:t>명령으로 변경된 </a:t>
-            </a:r>
-            <a:r>
-              <a:rPr lang="en-US" altLang="ko-KR" sz="1400" dirty="0"/>
-              <a:t>IP </a:t>
-            </a:r>
-            <a:r>
-              <a:rPr lang="ko-KR" altLang="en-US" sz="1400"/>
-              <a:t>주소 확인</a:t>
-            </a:r>
-          </a:p>
-          <a:p>
-            <a:endParaRPr lang="ko-KR" altLang="en-US" sz="1400" dirty="0"/>
-          </a:p>
-          <a:p>
-            <a:r>
-              <a:rPr lang="en-US" altLang="ko-KR" sz="1400" dirty="0"/>
-              <a:t>===================================</a:t>
-            </a:r>
-          </a:p>
-          <a:p>
-            <a:r>
-              <a:rPr lang="en-US" altLang="ko-KR" sz="1400" dirty="0"/>
-              <a:t>telnet </a:t>
-            </a:r>
-            <a:r>
-              <a:rPr lang="ko-KR" altLang="en-US" sz="1400"/>
-              <a:t>접속 방법</a:t>
-            </a:r>
-          </a:p>
-          <a:p>
-            <a:r>
-              <a:rPr lang="en-US" altLang="ko-KR" sz="1400" dirty="0"/>
-              <a:t>===================================</a:t>
-            </a:r>
-          </a:p>
-          <a:p>
-            <a:r>
-              <a:rPr lang="en-US" altLang="ko-KR" sz="1400" dirty="0"/>
-              <a:t>1. </a:t>
-            </a:r>
-            <a:r>
-              <a:rPr lang="ko-KR" altLang="en-US" sz="1400"/>
-              <a:t>보드 부팅 후 </a:t>
-            </a:r>
-            <a:r>
-              <a:rPr lang="en-US" altLang="ko-KR" sz="1400" dirty="0"/>
-              <a:t>Ubuntu</a:t>
-            </a:r>
-            <a:r>
-              <a:rPr lang="ko-KR" altLang="en-US" sz="1400"/>
-              <a:t>에서 아래와 같이 명령</a:t>
-            </a:r>
-          </a:p>
-          <a:p>
-            <a:r>
-              <a:rPr lang="en-US" altLang="ko-KR" sz="1400" dirty="0"/>
-              <a:t>telnet </a:t>
-            </a:r>
-            <a:r>
-              <a:rPr lang="en-US" altLang="ko-KR" sz="1400" dirty="0" smtClean="0"/>
-              <a:t>192.168.10.3</a:t>
-            </a:r>
-          </a:p>
-          <a:p>
-            <a:r>
-              <a:rPr lang="ko-KR" altLang="en-US" sz="1400" dirty="0"/>
-              <a:t>root@WT2837:~# telnetd -F -l /bin/sh -p </a:t>
-            </a:r>
-            <a:r>
-              <a:rPr lang="ko-KR" altLang="en-US" sz="1400" dirty="0" smtClean="0"/>
-              <a:t>23</a:t>
-            </a:r>
-            <a:endParaRPr lang="ko-KR" altLang="en-US" sz="1400" dirty="0"/>
+            <a:pPr marL="0" indent="0" algn="ctr">
+              <a:buNone/>
+            </a:pPr>
+            <a:r>
+              <a:rPr lang="en-US" altLang="ko-KR" sz="19900" dirty="0" smtClean="0"/>
+              <a:t>APPENDIX</a:t>
+            </a:r>
+            <a:endParaRPr lang="ko-KR" altLang="en-US"/>
           </a:p>
         </p:txBody>
       </p:sp>
     </p:spTree>
     <p:extLst>
       <p:ext uri="{BB962C8B-B14F-4D97-AF65-F5344CB8AC3E}">
-        <p14:creationId xmlns:p14="http://schemas.microsoft.com/office/powerpoint/2010/main" val="2548557888"/>
+        <p14:creationId xmlns:p14="http://schemas.microsoft.com/office/powerpoint/2010/main" val="1390112942"/>
       </p:ext>
     </p:extLst>
   </p:cSld>
@@ -2653,150 +2259,583 @@
       </p:grpSpPr>
       <p:sp>
         <p:nvSpPr>
-          <p:cNvPr id="2" name="TextBox 1"/>
-          <p:cNvSpPr txBox="1"/>
-          <p:nvPr/>
+          <p:cNvPr id="2" name="텍스트 개체 틀 1"/>
+          <p:cNvSpPr>
+            <a:spLocks noGrp="1"/>
+          </p:cNvSpPr>
+          <p:nvPr>
+            <p:ph type="body" sz="quarter" idx="10"/>
+          </p:nvPr>
         </p:nvSpPr>
         <p:spPr>
           <a:xfrm>
-            <a:off x="244862" y="238662"/>
-            <a:ext cx="14190667" cy="923330"/>
+            <a:off x="393700" y="177800"/>
+            <a:ext cx="16560800" cy="9525000"/>
           </a:xfrm>
-          <a:prstGeom prst="rect">
-            <a:avLst/>
-          </a:prstGeom>
-          <a:noFill/>
+          <a:solidFill>
+            <a:schemeClr val="bg1"/>
+          </a:solidFill>
         </p:spPr>
         <p:txBody>
-          <a:bodyPr wrap="square" rtlCol="0">
-            <a:spAutoFit/>
-          </a:bodyPr>
+          <a:bodyPr/>
           <a:lstStyle/>
           <a:p>
             <a:r>
-              <a:rPr lang="en-US" altLang="ko-KR" sz="5400" b="1" dirty="0">
-                <a:solidFill>
-                  <a:schemeClr val="bg1"/>
-                </a:solidFill>
-                <a:latin typeface="LG스마트체2.0 Regular" panose="020B0600000101010101" pitchFamily="50" charset="-127"/>
-                <a:ea typeface="LG스마트체2.0 Regular" panose="020B0600000101010101" pitchFamily="50" charset="-127"/>
-              </a:rPr>
+              <a:rPr lang="en-US" altLang="ko-KR" sz="1400" dirty="0"/>
+              <a:t>===================================</a:t>
+            </a:r>
+          </a:p>
+          <a:p>
+            <a:r>
+              <a:rPr lang="en-US" altLang="ko-KR" sz="1400" dirty="0"/>
+              <a:t>MAC </a:t>
+            </a:r>
+            <a:r>
+              <a:rPr lang="ko-KR" altLang="en-US" sz="1400"/>
+              <a:t>주소 변경 방법</a:t>
+            </a:r>
+          </a:p>
+          <a:p>
+            <a:r>
+              <a:rPr lang="en-US" altLang="ko-KR" sz="1400" dirty="0"/>
+              <a:t>===================================</a:t>
+            </a:r>
+          </a:p>
+          <a:p>
+            <a:r>
+              <a:rPr lang="en-US" altLang="ko-KR" sz="1400" dirty="0"/>
+              <a:t>1. MAC </a:t>
+            </a:r>
+            <a:r>
+              <a:rPr lang="ko-KR" altLang="en-US" sz="1400"/>
+              <a:t>주소란 이더넷 장치의 하드웨어 주소임 </a:t>
+            </a:r>
+            <a:r>
+              <a:rPr lang="en-US" altLang="ko-KR" sz="1400" dirty="0"/>
+              <a:t>-&gt; </a:t>
+            </a:r>
+            <a:r>
+              <a:rPr lang="ko-KR" altLang="en-US" sz="1400"/>
+              <a:t>동일한 네트워크에서는 </a:t>
+            </a:r>
+            <a:r>
+              <a:rPr lang="en-US" altLang="ko-KR" sz="1400" dirty="0"/>
+              <a:t>IP </a:t>
+            </a:r>
+            <a:r>
+              <a:rPr lang="ko-KR" altLang="en-US" sz="1400"/>
+              <a:t>주소가 아니라 </a:t>
+            </a:r>
+            <a:r>
+              <a:rPr lang="en-US" altLang="ko-KR" sz="1400" dirty="0"/>
+              <a:t>MAC </a:t>
+            </a:r>
+            <a:r>
+              <a:rPr lang="ko-KR" altLang="en-US" sz="1400"/>
+              <a:t>주소를 이용하여 통신이 이루어짐</a:t>
+            </a:r>
+          </a:p>
+          <a:p>
+            <a:r>
+              <a:rPr lang="en-US" altLang="ko-KR" sz="1400" dirty="0"/>
+              <a:t>2. WT2837</a:t>
+            </a:r>
+            <a:r>
+              <a:rPr lang="ko-KR" altLang="en-US" sz="1400"/>
+              <a:t>은 </a:t>
+            </a:r>
+            <a:r>
+              <a:rPr lang="en-US" altLang="ko-KR" sz="1400" dirty="0"/>
+              <a:t>U-Boot</a:t>
+            </a:r>
+            <a:r>
+              <a:rPr lang="ko-KR" altLang="en-US" sz="1400"/>
+              <a:t>의 환경변수 </a:t>
+            </a:r>
+            <a:r>
+              <a:rPr lang="en-US" altLang="ko-KR" sz="1400" dirty="0" err="1"/>
+              <a:t>ethaddr</a:t>
+            </a:r>
+            <a:r>
+              <a:rPr lang="ko-KR" altLang="en-US" sz="1400"/>
+              <a:t>에 저장된 </a:t>
+            </a:r>
+            <a:r>
+              <a:rPr lang="en-US" altLang="ko-KR" sz="1400" dirty="0"/>
+              <a:t>MAC </a:t>
+            </a:r>
+            <a:r>
+              <a:rPr lang="ko-KR" altLang="en-US" sz="1400"/>
+              <a:t>주소를 커널이 받아서 사용함</a:t>
+            </a:r>
+          </a:p>
+          <a:p>
+            <a:r>
+              <a:rPr lang="en-US" altLang="ko-KR" sz="1400" dirty="0"/>
+              <a:t>3. </a:t>
+            </a:r>
+            <a:r>
+              <a:rPr lang="ko-KR" altLang="en-US" sz="1400"/>
+              <a:t>따라서 현재 커널이 부팅완료된 후 </a:t>
+            </a:r>
+            <a:r>
+              <a:rPr lang="en-US" altLang="ko-KR" sz="1400" dirty="0"/>
+              <a:t>MAC </a:t>
+            </a:r>
+            <a:r>
+              <a:rPr lang="ko-KR" altLang="en-US" sz="1400"/>
+              <a:t>주소를 보면 다음과 같이 모두 </a:t>
+            </a:r>
+            <a:r>
+              <a:rPr lang="en-US" altLang="ko-KR" sz="1400" dirty="0"/>
+              <a:t>B8:27:EB:9D:E5:C8 </a:t>
+            </a:r>
+            <a:r>
+              <a:rPr lang="ko-KR" altLang="en-US" sz="1400"/>
+              <a:t>로 되어 있음</a:t>
+            </a:r>
+          </a:p>
+          <a:p>
+            <a:endParaRPr lang="ko-KR" altLang="en-US" sz="1400" dirty="0"/>
+          </a:p>
+          <a:p>
+            <a:r>
+              <a:rPr lang="en-US" altLang="ko-KR" sz="1400" dirty="0"/>
+              <a:t>root@WT2837:~# </a:t>
+            </a:r>
+            <a:r>
+              <a:rPr lang="en-US" altLang="ko-KR" sz="1400" dirty="0" err="1"/>
+              <a:t>ifconfig</a:t>
+            </a:r>
+            <a:r>
+              <a:rPr lang="en-US" altLang="ko-KR" sz="1400" dirty="0"/>
+              <a:t>                                                         </a:t>
+            </a:r>
+          </a:p>
+          <a:p>
+            <a:r>
+              <a:rPr lang="en-US" altLang="ko-KR" sz="1400" dirty="0"/>
+              <a:t>eth0      Link </a:t>
+            </a:r>
+            <a:r>
+              <a:rPr lang="en-US" altLang="ko-KR" sz="1400" dirty="0" err="1"/>
+              <a:t>encap:Ethernet</a:t>
+            </a:r>
+            <a:r>
+              <a:rPr lang="en-US" altLang="ko-KR" sz="1400" dirty="0"/>
+              <a:t>  </a:t>
+            </a:r>
+            <a:r>
+              <a:rPr lang="en-US" altLang="ko-KR" sz="1400" dirty="0" err="1"/>
+              <a:t>HWaddr</a:t>
+            </a:r>
+            <a:r>
+              <a:rPr lang="en-US" altLang="ko-KR" sz="1400" dirty="0"/>
+              <a:t> B8:27:EB:9D:E5:C8                         </a:t>
+            </a:r>
+          </a:p>
+          <a:p>
+            <a:r>
+              <a:rPr lang="en-US" altLang="ko-KR" sz="1400" dirty="0"/>
+              <a:t>          </a:t>
+            </a:r>
+            <a:r>
+              <a:rPr lang="en-US" altLang="ko-KR" sz="1400" dirty="0" err="1"/>
+              <a:t>inet</a:t>
+            </a:r>
+            <a:r>
+              <a:rPr lang="en-US" altLang="ko-KR" sz="1400" dirty="0"/>
+              <a:t> addr:192.168.10.3  Bcast:0.0.0.0  Mask:255.255.255.0             </a:t>
+            </a:r>
+          </a:p>
+          <a:p>
+            <a:r>
+              <a:rPr lang="en-US" altLang="ko-KR" sz="1400" dirty="0"/>
+              <a:t>          UP BROADCAST RUNNING MULTICAST  MTU:1500  Metric:1                    </a:t>
+            </a:r>
+          </a:p>
+          <a:p>
+            <a:r>
+              <a:rPr lang="en-US" altLang="ko-KR" sz="1400" dirty="0"/>
+              <a:t>          RX packets:37 errors:0 dropped:0 overruns:0 frame:0                   </a:t>
+            </a:r>
+          </a:p>
+          <a:p>
+            <a:r>
+              <a:rPr lang="en-US" altLang="ko-KR" sz="1400" dirty="0"/>
+              <a:t>          TX packets:31 errors:0 dropped:0 overruns:0 carrier:0                 </a:t>
+            </a:r>
+          </a:p>
+          <a:p>
+            <a:r>
+              <a:rPr lang="en-US" altLang="ko-KR" sz="1400" dirty="0"/>
+              <a:t>          collisions:0 txqueuelen:1000                                          </a:t>
+            </a:r>
+          </a:p>
+          <a:p>
+            <a:r>
+              <a:rPr lang="en-US" altLang="ko-KR" sz="1400" dirty="0"/>
+              <a:t>          RX bytes:3710 (3.6 KiB)  TX bytes:3334 (3.2 KiB) </a:t>
+            </a:r>
+          </a:p>
+          <a:p>
+            <a:r>
+              <a:rPr lang="en-US" altLang="ko-KR" sz="1400" dirty="0"/>
+              <a:t>		  </a:t>
+            </a:r>
+          </a:p>
+          <a:p>
+            <a:r>
+              <a:rPr lang="en-US" altLang="ko-KR" sz="1400" dirty="0"/>
+              <a:t>4. </a:t>
+            </a:r>
+            <a:r>
+              <a:rPr lang="ko-KR" altLang="en-US" sz="1400"/>
+              <a:t>동일한 네트워크에 있는 보드들의 </a:t>
+            </a:r>
+            <a:r>
+              <a:rPr lang="en-US" altLang="ko-KR" sz="1400" dirty="0"/>
+              <a:t>MAC </a:t>
+            </a:r>
+            <a:r>
+              <a:rPr lang="ko-KR" altLang="en-US" sz="1400"/>
+              <a:t>주소가 동일하면 통신이 안됨 </a:t>
+            </a:r>
+            <a:r>
+              <a:rPr lang="en-US" altLang="ko-KR" sz="1400" dirty="0"/>
+              <a:t>-&gt; </a:t>
+            </a:r>
+            <a:r>
+              <a:rPr lang="ko-KR" altLang="en-US" sz="1400"/>
+              <a:t>따라서 보드들의 </a:t>
+            </a:r>
+            <a:r>
+              <a:rPr lang="en-US" altLang="ko-KR" sz="1400" dirty="0"/>
+              <a:t>MAC </a:t>
+            </a:r>
+            <a:r>
+              <a:rPr lang="ko-KR" altLang="en-US" sz="1400"/>
+              <a:t>주소를 다르게 설정해야 함</a:t>
+            </a:r>
+          </a:p>
+          <a:p>
+            <a:endParaRPr lang="ko-KR" altLang="en-US" sz="1400" dirty="0"/>
+          </a:p>
+          <a:p>
+            <a:r>
+              <a:rPr lang="en-US" altLang="ko-KR" sz="1400" dirty="0"/>
+              <a:t>5. WT2837 </a:t>
+            </a:r>
+            <a:r>
+              <a:rPr lang="ko-KR" altLang="en-US" sz="1400"/>
+              <a:t>보드의 </a:t>
+            </a:r>
+            <a:r>
+              <a:rPr lang="en-US" altLang="ko-KR" sz="1400" dirty="0"/>
+              <a:t>MAC </a:t>
+            </a:r>
+            <a:r>
+              <a:rPr lang="ko-KR" altLang="en-US" sz="1400"/>
+              <a:t>주소 변경 방법 </a:t>
+            </a:r>
+            <a:r>
+              <a:rPr lang="en-US" altLang="ko-KR" sz="1400" dirty="0"/>
+              <a:t>(U-Boot</a:t>
+            </a:r>
+            <a:r>
+              <a:rPr lang="ko-KR" altLang="en-US" sz="1400"/>
+              <a:t>에서 진행해야 함</a:t>
+            </a:r>
+            <a:r>
+              <a:rPr lang="en-US" altLang="ko-KR" sz="1400" dirty="0"/>
+              <a:t>)</a:t>
+            </a:r>
+          </a:p>
+          <a:p>
+            <a:r>
+              <a:rPr lang="en-US" altLang="ko-KR" sz="1400" dirty="0" err="1"/>
+              <a:t>setenv</a:t>
+            </a:r>
+            <a:r>
+              <a:rPr lang="en-US" altLang="ko-KR" sz="1400" dirty="0"/>
+              <a:t> -f </a:t>
+            </a:r>
+            <a:r>
+              <a:rPr lang="en-US" altLang="ko-KR" sz="1400" dirty="0" err="1"/>
+              <a:t>ethaddr</a:t>
+            </a:r>
+            <a:r>
+              <a:rPr lang="en-US" altLang="ko-KR" sz="1400" dirty="0"/>
+              <a:t> B8:27:EB:9D:E5:C9</a:t>
+            </a:r>
+          </a:p>
+          <a:p>
+            <a:r>
+              <a:rPr lang="en-US" altLang="ko-KR" sz="1400" dirty="0" err="1"/>
+              <a:t>saveenv</a:t>
+            </a:r>
+            <a:endParaRPr lang="en-US" altLang="ko-KR" sz="1400" dirty="0"/>
+          </a:p>
+          <a:p>
+            <a:endParaRPr lang="en-US" altLang="ko-KR" sz="1400" dirty="0"/>
+          </a:p>
+          <a:p>
+            <a:r>
+              <a:rPr lang="en-US" altLang="ko-KR" sz="1400" dirty="0"/>
+              <a:t>6. </a:t>
+            </a:r>
+            <a:r>
+              <a:rPr lang="ko-KR" altLang="en-US" sz="1400"/>
+              <a:t>예를 들어 보드가 </a:t>
+            </a:r>
+            <a:r>
+              <a:rPr lang="en-US" altLang="ko-KR" sz="1400" dirty="0"/>
+              <a:t>4</a:t>
+            </a:r>
+            <a:r>
+              <a:rPr lang="ko-KR" altLang="en-US" sz="1400"/>
+              <a:t>대인 경우 아래와 같이 </a:t>
+            </a:r>
+            <a:r>
+              <a:rPr lang="en-US" altLang="ko-KR" sz="1400" dirty="0"/>
+              <a:t>MAC </a:t>
+            </a:r>
+            <a:r>
+              <a:rPr lang="ko-KR" altLang="en-US" sz="1400"/>
+              <a:t>주소를 설정하면 됨</a:t>
+            </a:r>
+          </a:p>
+          <a:p>
+            <a:r>
+              <a:rPr lang="ko-KR" altLang="en-US" sz="1400" dirty="0"/>
+              <a:t>보드</a:t>
+            </a:r>
+            <a:r>
+              <a:rPr lang="en-US" altLang="ko-KR" sz="1400" dirty="0"/>
+              <a:t>1: B8:27:EB:9D:E5:C8</a:t>
+            </a:r>
+          </a:p>
+          <a:p>
+            <a:r>
+              <a:rPr lang="ko-KR" altLang="en-US" sz="1400" dirty="0"/>
+              <a:t>보드</a:t>
+            </a:r>
+            <a:r>
+              <a:rPr lang="en-US" altLang="ko-KR" sz="1400" dirty="0"/>
+              <a:t>2: B8:27:EB:9D:E5:C9</a:t>
+            </a:r>
+          </a:p>
+          <a:p>
+            <a:r>
+              <a:rPr lang="ko-KR" altLang="en-US" sz="1400" dirty="0"/>
+              <a:t>보드</a:t>
+            </a:r>
+            <a:r>
+              <a:rPr lang="en-US" altLang="ko-KR" sz="1400" dirty="0"/>
+              <a:t>3: B8:27:EB:9D:E5:CA</a:t>
+            </a:r>
+          </a:p>
+          <a:p>
+            <a:r>
+              <a:rPr lang="ko-KR" altLang="en-US" sz="1400" dirty="0"/>
+              <a:t>보드</a:t>
+            </a:r>
+            <a:r>
+              <a:rPr lang="en-US" altLang="ko-KR" sz="1400" dirty="0"/>
+              <a:t>4: B8:27:EB:9D:E5:CB</a:t>
+            </a:r>
+          </a:p>
+          <a:p>
+            <a:endParaRPr lang="en-US" altLang="ko-KR" sz="1400" dirty="0"/>
+          </a:p>
+          <a:p>
+            <a:r>
+              <a:rPr lang="en-US" altLang="ko-KR" sz="1400" dirty="0"/>
+              <a:t>===================================</a:t>
+            </a:r>
+          </a:p>
+          <a:p>
+            <a:r>
+              <a:rPr lang="en-US" altLang="ko-KR" sz="1400" dirty="0"/>
+              <a:t>IP </a:t>
+            </a:r>
+            <a:r>
+              <a:rPr lang="ko-KR" altLang="en-US" sz="1400"/>
+              <a:t>주소 변경 방법</a:t>
+            </a:r>
+          </a:p>
+          <a:p>
+            <a:r>
+              <a:rPr lang="en-US" altLang="ko-KR" sz="1400" dirty="0"/>
+              <a:t>===================================</a:t>
+            </a:r>
+          </a:p>
+          <a:p>
+            <a:r>
+              <a:rPr lang="en-US" altLang="ko-KR" sz="1400" dirty="0"/>
+              <a:t>1. ~/work/</a:t>
+            </a:r>
+            <a:r>
+              <a:rPr lang="en-US" altLang="ko-KR" sz="1400" dirty="0" err="1"/>
+              <a:t>myrootfs</a:t>
+            </a:r>
+            <a:r>
+              <a:rPr lang="en-US" altLang="ko-KR" sz="1400" dirty="0"/>
+              <a:t>/</a:t>
+            </a:r>
+            <a:r>
+              <a:rPr lang="en-US" altLang="ko-KR" sz="1400" dirty="0" err="1"/>
+              <a:t>rootfs</a:t>
+            </a:r>
+            <a:r>
+              <a:rPr lang="en-US" altLang="ko-KR" sz="1400" dirty="0"/>
+              <a:t>/</a:t>
+            </a:r>
+            <a:r>
+              <a:rPr lang="en-US" altLang="ko-KR" sz="1400" dirty="0" err="1"/>
+              <a:t>etc</a:t>
+            </a:r>
+            <a:r>
+              <a:rPr lang="en-US" altLang="ko-KR" sz="1400" dirty="0"/>
+              <a:t>/network/interfaces</a:t>
+            </a:r>
+            <a:r>
+              <a:rPr lang="ko-KR" altLang="en-US" sz="1400"/>
+              <a:t>에서 </a:t>
+            </a:r>
+            <a:r>
+              <a:rPr lang="en-US" altLang="ko-KR" sz="1400" dirty="0"/>
+              <a:t>192.168.10.3</a:t>
+            </a:r>
+            <a:r>
+              <a:rPr lang="ko-KR" altLang="en-US" sz="1400"/>
+              <a:t>을 희망하는 </a:t>
+            </a:r>
+            <a:r>
+              <a:rPr lang="en-US" altLang="ko-KR" sz="1400" dirty="0"/>
+              <a:t>IP </a:t>
+            </a:r>
+            <a:r>
+              <a:rPr lang="ko-KR" altLang="en-US" sz="1400"/>
+              <a:t>주소로 변경 후 </a:t>
+            </a:r>
+            <a:r>
+              <a:rPr lang="en-US" altLang="ko-KR" sz="1400" dirty="0"/>
+              <a:t>ext2img.gz</a:t>
+            </a:r>
+            <a:r>
+              <a:rPr lang="ko-KR" altLang="en-US" sz="1400"/>
+              <a:t>을 새로 생성하고 </a:t>
+            </a:r>
+            <a:r>
+              <a:rPr lang="en-US" altLang="ko-KR" sz="1400" dirty="0"/>
+              <a:t>SD </a:t>
+            </a:r>
+            <a:r>
+              <a:rPr lang="ko-KR" altLang="en-US" sz="1400"/>
+              <a:t>카드에 구움</a:t>
+            </a:r>
+          </a:p>
+          <a:p>
+            <a:r>
+              <a:rPr lang="en-US" altLang="ko-KR" sz="1400" dirty="0"/>
+              <a:t>2. </a:t>
+            </a:r>
+            <a:r>
+              <a:rPr lang="ko-KR" altLang="en-US" sz="1400"/>
+              <a:t>보드 부팅 후 </a:t>
+            </a:r>
+            <a:r>
+              <a:rPr lang="en-US" altLang="ko-KR" sz="1400" dirty="0" err="1"/>
+              <a:t>ifconfig</a:t>
+            </a:r>
+            <a:r>
+              <a:rPr lang="en-US" altLang="ko-KR" sz="1400" dirty="0"/>
+              <a:t> </a:t>
+            </a:r>
+            <a:r>
+              <a:rPr lang="ko-KR" altLang="en-US" sz="1400"/>
+              <a:t>명령으로 변경된 </a:t>
+            </a:r>
+            <a:r>
+              <a:rPr lang="en-US" altLang="ko-KR" sz="1400" dirty="0"/>
+              <a:t>IP </a:t>
+            </a:r>
+            <a:r>
+              <a:rPr lang="ko-KR" altLang="en-US" sz="1400"/>
+              <a:t>주소 확인</a:t>
+            </a:r>
+          </a:p>
+          <a:p>
+            <a:endParaRPr lang="ko-KR" altLang="en-US" sz="1400" dirty="0"/>
+          </a:p>
+          <a:p>
+            <a:r>
+              <a:rPr lang="en-US" altLang="ko-KR" sz="1400" dirty="0"/>
+              <a:t>===================================</a:t>
+            </a:r>
+          </a:p>
+          <a:p>
+            <a:r>
+              <a:rPr lang="en-US" altLang="ko-KR" sz="1400" dirty="0"/>
+              <a:t>telnet </a:t>
+            </a:r>
+            <a:r>
+              <a:rPr lang="ko-KR" altLang="en-US" sz="1400"/>
+              <a:t>접속 방법</a:t>
+            </a:r>
+          </a:p>
+          <a:p>
+            <a:r>
+              <a:rPr lang="en-US" altLang="ko-KR" sz="1400" dirty="0"/>
+              <a:t>===================================</a:t>
+            </a:r>
+          </a:p>
+          <a:p>
+            <a:r>
+              <a:rPr lang="en-US" altLang="ko-KR" sz="1400" dirty="0"/>
               <a:t>1. </a:t>
             </a:r>
             <a:r>
-              <a:rPr lang="ko-KR" altLang="en-US" sz="5400" b="1" dirty="0">
-                <a:solidFill>
-                  <a:schemeClr val="bg1"/>
-                </a:solidFill>
-                <a:latin typeface="LG스마트체2.0 Regular" panose="020B0600000101010101" pitchFamily="50" charset="-127"/>
-                <a:ea typeface="LG스마트체2.0 Regular" panose="020B0600000101010101" pitchFamily="50" charset="-127"/>
-              </a:rPr>
-              <a:t>주제 및 결과 요약</a:t>
-            </a:r>
-          </a:p>
-        </p:txBody>
-      </p:sp>
-      <p:sp>
-        <p:nvSpPr>
-          <p:cNvPr id="3" name="직사각형 2"/>
-          <p:cNvSpPr/>
-          <p:nvPr/>
-        </p:nvSpPr>
-        <p:spPr>
-          <a:xfrm>
-            <a:off x="884420" y="2488367"/>
-            <a:ext cx="11092721" cy="1124263"/>
-          </a:xfrm>
-          <a:prstGeom prst="rect">
-            <a:avLst/>
-          </a:prstGeom>
-          <a:solidFill>
-            <a:srgbClr val="FFFF00"/>
-          </a:solidFill>
-        </p:spPr>
-        <p:style>
-          <a:lnRef idx="2">
-            <a:schemeClr val="accent1">
-              <a:shade val="50000"/>
-            </a:schemeClr>
-          </a:lnRef>
-          <a:fillRef idx="1">
-            <a:schemeClr val="accent1"/>
-          </a:fillRef>
-          <a:effectRef idx="0">
-            <a:schemeClr val="accent1"/>
-          </a:effectRef>
-          <a:fontRef idx="minor">
-            <a:schemeClr val="lt1"/>
-          </a:fontRef>
-        </p:style>
-        <p:txBody>
-          <a:bodyPr rtlCol="0" anchor="ctr"/>
-          <a:lstStyle/>
-          <a:p>
-            <a:r>
-              <a:rPr lang="ko-KR" altLang="en-US" sz="3200" b="1" dirty="0">
-                <a:solidFill>
-                  <a:schemeClr val="tx1"/>
-                </a:solidFill>
-              </a:rPr>
-              <a:t>간략하게 </a:t>
-            </a:r>
-            <a:r>
-              <a:rPr lang="en-US" altLang="ko-KR" sz="3200" b="1" dirty="0">
-                <a:solidFill>
-                  <a:schemeClr val="tx1"/>
-                </a:solidFill>
-              </a:rPr>
-              <a:t>1 </a:t>
-            </a:r>
-            <a:r>
-              <a:rPr lang="ko-KR" altLang="en-US" sz="3200" b="1" dirty="0">
-                <a:solidFill>
-                  <a:schemeClr val="tx1"/>
-                </a:solidFill>
-              </a:rPr>
-              <a:t>페이지에 프로젝트의 주제</a:t>
-            </a:r>
-            <a:r>
-              <a:rPr lang="en-US" altLang="ko-KR" sz="3200" b="1" dirty="0">
-                <a:solidFill>
-                  <a:schemeClr val="tx1"/>
-                </a:solidFill>
-              </a:rPr>
-              <a:t>, </a:t>
-            </a:r>
-            <a:r>
-              <a:rPr lang="ko-KR" altLang="en-US" sz="3200" b="1" dirty="0">
-                <a:solidFill>
-                  <a:schemeClr val="tx1"/>
-                </a:solidFill>
-              </a:rPr>
-              <a:t>목표</a:t>
-            </a:r>
-            <a:r>
-              <a:rPr lang="en-US" altLang="ko-KR" sz="3200" b="1" dirty="0">
-                <a:solidFill>
-                  <a:schemeClr val="tx1"/>
-                </a:solidFill>
-              </a:rPr>
-              <a:t>, </a:t>
-            </a:r>
-            <a:r>
-              <a:rPr lang="ko-KR" altLang="en-US" sz="3200" b="1" dirty="0">
-                <a:solidFill>
-                  <a:schemeClr val="tx1"/>
-                </a:solidFill>
-              </a:rPr>
-              <a:t>결과를 요약</a:t>
-            </a:r>
+              <a:rPr lang="ko-KR" altLang="en-US" sz="1400"/>
+              <a:t>보드 부팅 후 </a:t>
+            </a:r>
+            <a:r>
+              <a:rPr lang="en-US" altLang="ko-KR" sz="1400" dirty="0"/>
+              <a:t>Ubuntu</a:t>
+            </a:r>
+            <a:r>
+              <a:rPr lang="ko-KR" altLang="en-US" sz="1400"/>
+              <a:t>에서 아래와 같이 명령</a:t>
+            </a:r>
+          </a:p>
+          <a:p>
+            <a:r>
+              <a:rPr lang="en-US" altLang="ko-KR" sz="1400" dirty="0"/>
+              <a:t>telnet </a:t>
+            </a:r>
+            <a:r>
+              <a:rPr lang="en-US" altLang="ko-KR" sz="1400" dirty="0" smtClean="0"/>
+              <a:t>192.168.10.3</a:t>
+            </a:r>
+          </a:p>
+          <a:p>
+            <a:r>
+              <a:rPr lang="ko-KR" altLang="en-US" sz="1400" dirty="0"/>
+              <a:t>root@WT2837:~# telnetd -F -l /bin/sh -p </a:t>
+            </a:r>
+            <a:r>
+              <a:rPr lang="ko-KR" altLang="en-US" sz="1400" dirty="0" smtClean="0"/>
+              <a:t>23</a:t>
+            </a:r>
+            <a:endParaRPr lang="ko-KR" altLang="en-US" sz="1400" dirty="0"/>
           </a:p>
         </p:txBody>
       </p:sp>
     </p:spTree>
     <p:extLst>
       <p:ext uri="{BB962C8B-B14F-4D97-AF65-F5344CB8AC3E}">
-        <p14:creationId xmlns:p14="http://schemas.microsoft.com/office/powerpoint/2010/main" val="819906418"/>
+        <p14:creationId xmlns:p14="http://schemas.microsoft.com/office/powerpoint/2010/main" val="2548557888"/>
       </p:ext>
     </p:extLst>
   </p:cSld>
@@ -2860,7 +2899,7 @@
                 <a:latin typeface="LG스마트체2.0 Regular" panose="020B0600000101010101" pitchFamily="50" charset="-127"/>
                 <a:ea typeface="LG스마트체2.0 Regular" panose="020B0600000101010101" pitchFamily="50" charset="-127"/>
               </a:rPr>
-              <a:t>2. </a:t>
+              <a:t>1. </a:t>
             </a:r>
             <a:r>
               <a:rPr lang="ko-KR" altLang="en-US" sz="5400" b="1" dirty="0">
@@ -2870,7 +2909,7 @@
                 <a:latin typeface="LG스마트체2.0 Regular" panose="020B0600000101010101" pitchFamily="50" charset="-127"/>
                 <a:ea typeface="LG스마트체2.0 Regular" panose="020B0600000101010101" pitchFamily="50" charset="-127"/>
               </a:rPr>
-              <a:t>개발 목표 및 개발 결과</a:t>
+              <a:t>주제 및 결과 요약</a:t>
             </a:r>
           </a:p>
         </p:txBody>
@@ -2884,7 +2923,7 @@
         <p:spPr>
           <a:xfrm>
             <a:off x="884420" y="2488367"/>
-            <a:ext cx="11092721" cy="2548328"/>
+            <a:ext cx="11092721" cy="1124263"/>
           </a:xfrm>
           <a:prstGeom prst="rect">
             <a:avLst/>
@@ -2913,74 +2952,61 @@
           <a:bodyPr rtlCol="0" anchor="ctr"/>
           <a:lstStyle/>
           <a:p>
-            <a:pPr marL="457200" indent="-457200">
-              <a:buFontTx/>
-              <a:buChar char="-"/>
-            </a:pPr>
             <a:r>
               <a:rPr lang="ko-KR" altLang="en-US" sz="3200" b="1" dirty="0">
                 <a:solidFill>
                   <a:schemeClr val="tx1"/>
                 </a:solidFill>
               </a:rPr>
-              <a:t>처음 기획한 개발 목표</a:t>
-            </a:r>
-            <a:endParaRPr lang="en-US" altLang="ko-KR" sz="3200" b="1" dirty="0">
-              <a:solidFill>
-                <a:schemeClr val="tx1"/>
-              </a:solidFill>
-            </a:endParaRPr>
-          </a:p>
-          <a:p>
-            <a:pPr marL="457200" indent="-457200">
-              <a:buFontTx/>
-              <a:buChar char="-"/>
-            </a:pPr>
+              <a:t>간략하게 </a:t>
+            </a:r>
+            <a:r>
+              <a:rPr lang="en-US" altLang="ko-KR" sz="3200" b="1" dirty="0">
+                <a:solidFill>
+                  <a:schemeClr val="tx1"/>
+                </a:solidFill>
+              </a:rPr>
+              <a:t>1 </a:t>
+            </a:r>
             <a:r>
               <a:rPr lang="ko-KR" altLang="en-US" sz="3200" b="1" dirty="0">
                 <a:solidFill>
                   <a:schemeClr val="tx1"/>
                 </a:solidFill>
               </a:rPr>
-              <a:t>실제 개발 결과 소개</a:t>
-            </a:r>
-            <a:endParaRPr lang="en-US" altLang="ko-KR" sz="3200" b="1" dirty="0">
-              <a:solidFill>
-                <a:schemeClr val="tx1"/>
-              </a:solidFill>
-            </a:endParaRPr>
-          </a:p>
-          <a:p>
-            <a:pPr marL="457200" indent="-457200">
-              <a:buFontTx/>
-              <a:buChar char="-"/>
-            </a:pPr>
+              <a:t>페이지에 프로젝트의 주제</a:t>
+            </a:r>
+            <a:r>
+              <a:rPr lang="en-US" altLang="ko-KR" sz="3200" b="1" dirty="0">
+                <a:solidFill>
+                  <a:schemeClr val="tx1"/>
+                </a:solidFill>
+              </a:rPr>
+              <a:t>, </a:t>
+            </a:r>
             <a:r>
               <a:rPr lang="ko-KR" altLang="en-US" sz="3200" b="1" dirty="0">
                 <a:solidFill>
                   <a:schemeClr val="tx1"/>
                 </a:solidFill>
               </a:rPr>
-              <a:t>가급적 결과 내용을 상세히 기술</a:t>
-            </a:r>
-            <a:endParaRPr lang="en-US" altLang="ko-KR" sz="3200" b="1" dirty="0">
-              <a:solidFill>
-                <a:schemeClr val="tx1"/>
-              </a:solidFill>
-            </a:endParaRPr>
-          </a:p>
-          <a:p>
-            <a:pPr marL="457200" indent="-457200">
-              <a:buFontTx/>
-              <a:buChar char="-"/>
-            </a:pPr>
+              <a:t>목표</a:t>
+            </a:r>
+            <a:r>
+              <a:rPr lang="en-US" altLang="ko-KR" sz="3200" b="1" dirty="0">
+                <a:solidFill>
+                  <a:schemeClr val="tx1"/>
+                </a:solidFill>
+              </a:rPr>
+              <a:t>, </a:t>
+            </a:r>
             <a:r>
               <a:rPr lang="ko-KR" altLang="en-US" sz="3200" b="1" dirty="0">
                 <a:solidFill>
                   <a:schemeClr val="tx1"/>
                 </a:solidFill>
               </a:rPr>
-              <a:t>페이지 수 무관</a:t>
+              <a:t>결과를 요약</a:t>
             </a:r>
           </a:p>
         </p:txBody>
@@ -2988,7 +3014,7 @@
     </p:spTree>
     <p:extLst>
       <p:ext uri="{BB962C8B-B14F-4D97-AF65-F5344CB8AC3E}">
-        <p14:creationId xmlns:p14="http://schemas.microsoft.com/office/powerpoint/2010/main" val="73432356"/>
+        <p14:creationId xmlns:p14="http://schemas.microsoft.com/office/powerpoint/2010/main" val="819906418"/>
       </p:ext>
     </p:extLst>
   </p:cSld>
@@ -3052,7 +3078,7 @@
                 <a:latin typeface="LG스마트체2.0 Regular" panose="020B0600000101010101" pitchFamily="50" charset="-127"/>
                 <a:ea typeface="LG스마트체2.0 Regular" panose="020B0600000101010101" pitchFamily="50" charset="-127"/>
               </a:rPr>
-              <a:t>3. </a:t>
+              <a:t>2. </a:t>
             </a:r>
             <a:r>
               <a:rPr lang="ko-KR" altLang="en-US" sz="5400" b="1" dirty="0">
@@ -3062,7 +3088,7 @@
                 <a:latin typeface="LG스마트체2.0 Regular" panose="020B0600000101010101" pitchFamily="50" charset="-127"/>
                 <a:ea typeface="LG스마트체2.0 Regular" panose="020B0600000101010101" pitchFamily="50" charset="-127"/>
               </a:rPr>
-              <a:t>핵심 기술</a:t>
+              <a:t>개발 목표 및 개발 결과</a:t>
             </a:r>
           </a:p>
         </p:txBody>
@@ -3076,7 +3102,7 @@
         <p:spPr>
           <a:xfrm>
             <a:off x="884420" y="2488367"/>
-            <a:ext cx="11092721" cy="2188564"/>
+            <a:ext cx="11092721" cy="2548328"/>
           </a:xfrm>
           <a:prstGeom prst="rect">
             <a:avLst/>
@@ -3115,7 +3141,7 @@
                   <a:schemeClr val="tx1"/>
                 </a:solidFill>
               </a:rPr>
-              <a:t>개발에 사용된 가장 핵심적으로 구현된 기술 소개</a:t>
+              <a:t>처음 기획한 개발 목표</a:t>
             </a:r>
             <a:endParaRPr lang="en-US" altLang="ko-KR" sz="3200" b="1" dirty="0">
               <a:solidFill>
@@ -3134,7 +3160,7 @@
                   <a:schemeClr val="tx1"/>
                 </a:solidFill>
               </a:rPr>
-              <a:t>기술 내용 또는 소스코드 등 다양한 방법으로 핵심을 소개</a:t>
+              <a:t>실제 개발 결과 소개</a:t>
             </a:r>
             <a:endParaRPr lang="en-US" altLang="ko-KR" sz="3200" b="1" dirty="0">
               <a:solidFill>
@@ -3153,6 +3179,25 @@
                   <a:schemeClr val="tx1"/>
                 </a:solidFill>
               </a:rPr>
+              <a:t>가급적 결과 내용을 상세히 기술</a:t>
+            </a:r>
+            <a:endParaRPr lang="en-US" altLang="ko-KR" sz="3200" b="1" dirty="0">
+              <a:solidFill>
+                <a:schemeClr val="tx1"/>
+              </a:solidFill>
+            </a:endParaRPr>
+          </a:p>
+          <a:p>
+            <a:pPr marL="457200" indent="-457200">
+              <a:buFontTx/>
+              <a:buChar char="-"/>
+            </a:pPr>
+            <a:r>
+              <a:rPr lang="ko-KR" altLang="en-US" sz="3200" b="1" dirty="0">
+                <a:solidFill>
+                  <a:schemeClr val="tx1"/>
+                </a:solidFill>
+              </a:rPr>
               <a:t>페이지 수 무관</a:t>
             </a:r>
           </a:p>
@@ -3161,7 +3206,7 @@
     </p:spTree>
     <p:extLst>
       <p:ext uri="{BB962C8B-B14F-4D97-AF65-F5344CB8AC3E}">
-        <p14:creationId xmlns:p14="http://schemas.microsoft.com/office/powerpoint/2010/main" val="3341560732"/>
+        <p14:creationId xmlns:p14="http://schemas.microsoft.com/office/powerpoint/2010/main" val="73432356"/>
       </p:ext>
     </p:extLst>
   </p:cSld>
@@ -3225,7 +3270,7 @@
                 <a:latin typeface="LG스마트체2.0 Regular" panose="020B0600000101010101" pitchFamily="50" charset="-127"/>
                 <a:ea typeface="LG스마트체2.0 Regular" panose="020B0600000101010101" pitchFamily="50" charset="-127"/>
               </a:rPr>
-              <a:t>4. </a:t>
+              <a:t>3. </a:t>
             </a:r>
             <a:r>
               <a:rPr lang="ko-KR" altLang="en-US" sz="5400" b="1" dirty="0">
@@ -3235,7 +3280,7 @@
                 <a:latin typeface="LG스마트체2.0 Regular" panose="020B0600000101010101" pitchFamily="50" charset="-127"/>
                 <a:ea typeface="LG스마트체2.0 Regular" panose="020B0600000101010101" pitchFamily="50" charset="-127"/>
               </a:rPr>
-              <a:t>결과 분석 및 기대 효과</a:t>
+              <a:t>핵심 기술</a:t>
             </a:r>
           </a:p>
         </p:txBody>
@@ -3249,7 +3294,7 @@
         <p:spPr>
           <a:xfrm>
             <a:off x="884420" y="2488367"/>
-            <a:ext cx="11092721" cy="2458388"/>
+            <a:ext cx="11092721" cy="2188564"/>
           </a:xfrm>
           <a:prstGeom prst="rect">
             <a:avLst/>
@@ -3288,7 +3333,7 @@
                   <a:schemeClr val="tx1"/>
                 </a:solidFill>
               </a:rPr>
-              <a:t>결과물에 대한 성능측정 또는 목표달성 여부 등 평가</a:t>
+              <a:t>개발에 사용된 가장 핵심적으로 구현된 기술 소개</a:t>
             </a:r>
             <a:endParaRPr lang="en-US" altLang="ko-KR" sz="3200" b="1" dirty="0">
               <a:solidFill>
@@ -3307,7 +3352,7 @@
                   <a:schemeClr val="tx1"/>
                 </a:solidFill>
               </a:rPr>
-              <a:t>성능이 낮을 경우 원인 분석 및 개선책 검토 기록</a:t>
+              <a:t>기술 내용 또는 소스코드 등 다양한 방법으로 핵심을 소개</a:t>
             </a:r>
             <a:endParaRPr lang="en-US" altLang="ko-KR" sz="3200" b="1" dirty="0">
               <a:solidFill>
@@ -3326,42 +3371,7 @@
                   <a:schemeClr val="tx1"/>
                 </a:solidFill>
               </a:rPr>
-              <a:t>성능이 만족했을 경우 향후 활용 가능한 기대효과 기록</a:t>
-            </a:r>
-            <a:endParaRPr lang="en-US" altLang="ko-KR" sz="3200" b="1" dirty="0">
-              <a:solidFill>
-                <a:schemeClr val="tx1"/>
-              </a:solidFill>
-            </a:endParaRPr>
-          </a:p>
-          <a:p>
-            <a:pPr marL="457200" indent="-457200">
-              <a:buFontTx/>
-              <a:buChar char="-"/>
-            </a:pPr>
-            <a:r>
-              <a:rPr lang="ko-KR" altLang="en-US" sz="3200" b="1" dirty="0">
-                <a:solidFill>
-                  <a:schemeClr val="tx1"/>
-                </a:solidFill>
-              </a:rPr>
-              <a:t>가급적 </a:t>
-            </a:r>
-            <a:r>
-              <a:rPr lang="en-US" altLang="ko-KR" sz="3200" b="1" dirty="0">
-                <a:solidFill>
-                  <a:schemeClr val="tx1"/>
-                </a:solidFill>
-              </a:rPr>
-              <a:t>1 </a:t>
-            </a:r>
-            <a:r>
-              <a:rPr lang="ko-KR" altLang="en-US" sz="3200" b="1" dirty="0">
-                <a:solidFill>
-                  <a:schemeClr val="tx1"/>
-                </a:solidFill>
-              </a:rPr>
-              <a:t>페이지로 정리</a:t>
+              <a:t>페이지 수 무관</a:t>
             </a:r>
           </a:p>
         </p:txBody>
@@ -3369,7 +3379,7 @@
     </p:spTree>
     <p:extLst>
       <p:ext uri="{BB962C8B-B14F-4D97-AF65-F5344CB8AC3E}">
-        <p14:creationId xmlns:p14="http://schemas.microsoft.com/office/powerpoint/2010/main" val="3256740301"/>
+        <p14:creationId xmlns:p14="http://schemas.microsoft.com/office/powerpoint/2010/main" val="3341560732"/>
       </p:ext>
     </p:extLst>
   </p:cSld>
@@ -3433,7 +3443,7 @@
                 <a:latin typeface="LG스마트체2.0 Regular" panose="020B0600000101010101" pitchFamily="50" charset="-127"/>
                 <a:ea typeface="LG스마트체2.0 Regular" panose="020B0600000101010101" pitchFamily="50" charset="-127"/>
               </a:rPr>
-              <a:t>5. </a:t>
+              <a:t>4. </a:t>
             </a:r>
             <a:r>
               <a:rPr lang="ko-KR" altLang="en-US" sz="5400" b="1" dirty="0">
@@ -3443,7 +3453,7 @@
                 <a:latin typeface="LG스마트체2.0 Regular" panose="020B0600000101010101" pitchFamily="50" charset="-127"/>
                 <a:ea typeface="LG스마트체2.0 Regular" panose="020B0600000101010101" pitchFamily="50" charset="-127"/>
               </a:rPr>
-              <a:t>향후 연구 과제</a:t>
+              <a:t>결과 분석 및 기대 효과</a:t>
             </a:r>
           </a:p>
         </p:txBody>
@@ -3457,7 +3467,7 @@
         <p:spPr>
           <a:xfrm>
             <a:off x="884420" y="2488367"/>
-            <a:ext cx="11092721" cy="1798820"/>
+            <a:ext cx="11092721" cy="2458388"/>
           </a:xfrm>
           <a:prstGeom prst="rect">
             <a:avLst/>
@@ -3496,23 +3506,7 @@
                   <a:schemeClr val="tx1"/>
                 </a:solidFill>
               </a:rPr>
-              <a:t>개발 결과물의 추후 개선점</a:t>
-            </a:r>
-            <a:r>
-              <a:rPr lang="en-US" altLang="ko-KR" sz="3200" b="1" dirty="0">
-                <a:solidFill>
-                  <a:schemeClr val="tx1"/>
-                </a:solidFill>
-              </a:rPr>
-              <a:t>, </a:t>
-            </a:r>
-            <a:r>
-              <a:rPr lang="ko-KR" altLang="en-US" sz="3200" b="1" dirty="0">
-                <a:solidFill>
-                  <a:schemeClr val="tx1"/>
-                </a:solidFill>
-              </a:rPr>
-              <a:t>후속 개발 주제 등에 대한 내용</a:t>
+              <a:t>결과물에 대한 성능측정 또는 목표달성 여부 등 평가</a:t>
             </a:r>
             <a:endParaRPr lang="en-US" altLang="ko-KR" sz="3200" b="1" dirty="0">
               <a:solidFill>
@@ -3531,6 +3525,44 @@
                   <a:schemeClr val="tx1"/>
                 </a:solidFill>
               </a:rPr>
+              <a:t>성능이 낮을 경우 원인 분석 및 개선책 검토 기록</a:t>
+            </a:r>
+            <a:endParaRPr lang="en-US" altLang="ko-KR" sz="3200" b="1" dirty="0">
+              <a:solidFill>
+                <a:schemeClr val="tx1"/>
+              </a:solidFill>
+            </a:endParaRPr>
+          </a:p>
+          <a:p>
+            <a:pPr marL="457200" indent="-457200">
+              <a:buFontTx/>
+              <a:buChar char="-"/>
+            </a:pPr>
+            <a:r>
+              <a:rPr lang="ko-KR" altLang="en-US" sz="3200" b="1" dirty="0">
+                <a:solidFill>
+                  <a:schemeClr val="tx1"/>
+                </a:solidFill>
+              </a:rPr>
+              <a:t>성능이 만족했을 경우 향후 활용 가능한 기대효과 기록</a:t>
+            </a:r>
+            <a:endParaRPr lang="en-US" altLang="ko-KR" sz="3200" b="1" dirty="0">
+              <a:solidFill>
+                <a:schemeClr val="tx1"/>
+              </a:solidFill>
+            </a:endParaRPr>
+          </a:p>
+          <a:p>
+            <a:pPr marL="457200" indent="-457200">
+              <a:buFontTx/>
+              <a:buChar char="-"/>
+            </a:pPr>
+            <a:r>
+              <a:rPr lang="ko-KR" altLang="en-US" sz="3200" b="1" dirty="0">
+                <a:solidFill>
+                  <a:schemeClr val="tx1"/>
+                </a:solidFill>
+              </a:rPr>
               <a:t>가급적 </a:t>
             </a:r>
             <a:r>
@@ -3539,7 +3571,7 @@
                   <a:schemeClr val="tx1"/>
                 </a:solidFill>
               </a:rPr>
-              <a:t>1</a:t>
+              <a:t>1 </a:t>
             </a:r>
             <a:r>
               <a:rPr lang="ko-KR" altLang="en-US" sz="3200" b="1" dirty="0">
@@ -3547,7 +3579,7 @@
                   <a:schemeClr val="tx1"/>
                 </a:solidFill>
               </a:rPr>
-              <a:t>페이지로 요약</a:t>
+              <a:t>페이지로 정리</a:t>
             </a:r>
           </a:p>
         </p:txBody>
@@ -3555,7 +3587,7 @@
     </p:spTree>
     <p:extLst>
       <p:ext uri="{BB962C8B-B14F-4D97-AF65-F5344CB8AC3E}">
-        <p14:creationId xmlns:p14="http://schemas.microsoft.com/office/powerpoint/2010/main" val="3019012668"/>
+        <p14:creationId xmlns:p14="http://schemas.microsoft.com/office/powerpoint/2010/main" val="3256740301"/>
       </p:ext>
     </p:extLst>
   </p:cSld>
@@ -3898,6 +3930,192 @@
 </file>
 
 <file path=ppt/slides/slide20.xml><?xml version="1.0" encoding="utf-8"?>
+<p:sld xmlns:a="http://schemas.openxmlformats.org/drawingml/2006/main" xmlns:r="http://schemas.openxmlformats.org/officeDocument/2006/relationships" xmlns:p="http://schemas.openxmlformats.org/presentationml/2006/main">
+  <p:cSld>
+    <p:spTree>
+      <p:nvGrpSpPr>
+        <p:cNvPr id="1" name=""/>
+        <p:cNvGrpSpPr/>
+        <p:nvPr/>
+      </p:nvGrpSpPr>
+      <p:grpSpPr>
+        <a:xfrm>
+          <a:off x="0" y="0"/>
+          <a:ext cx="0" cy="0"/>
+          <a:chOff x="0" y="0"/>
+          <a:chExt cx="0" cy="0"/>
+        </a:xfrm>
+      </p:grpSpPr>
+      <p:sp>
+        <p:nvSpPr>
+          <p:cNvPr id="2" name="TextBox 1"/>
+          <p:cNvSpPr txBox="1"/>
+          <p:nvPr/>
+        </p:nvSpPr>
+        <p:spPr>
+          <a:xfrm>
+            <a:off x="244862" y="238662"/>
+            <a:ext cx="14190667" cy="923330"/>
+          </a:xfrm>
+          <a:prstGeom prst="rect">
+            <a:avLst/>
+          </a:prstGeom>
+          <a:noFill/>
+        </p:spPr>
+        <p:txBody>
+          <a:bodyPr wrap="square" rtlCol="0">
+            <a:spAutoFit/>
+          </a:bodyPr>
+          <a:lstStyle/>
+          <a:p>
+            <a:r>
+              <a:rPr lang="en-US" altLang="ko-KR" sz="5400" b="1" dirty="0">
+                <a:solidFill>
+                  <a:schemeClr val="bg1"/>
+                </a:solidFill>
+                <a:latin typeface="LG스마트체2.0 Regular" panose="020B0600000101010101" pitchFamily="50" charset="-127"/>
+                <a:ea typeface="LG스마트체2.0 Regular" panose="020B0600000101010101" pitchFamily="50" charset="-127"/>
+              </a:rPr>
+              <a:t>5. </a:t>
+            </a:r>
+            <a:r>
+              <a:rPr lang="ko-KR" altLang="en-US" sz="5400" b="1" dirty="0">
+                <a:solidFill>
+                  <a:schemeClr val="bg1"/>
+                </a:solidFill>
+                <a:latin typeface="LG스마트체2.0 Regular" panose="020B0600000101010101" pitchFamily="50" charset="-127"/>
+                <a:ea typeface="LG스마트체2.0 Regular" panose="020B0600000101010101" pitchFamily="50" charset="-127"/>
+              </a:rPr>
+              <a:t>향후 연구 과제</a:t>
+            </a:r>
+          </a:p>
+        </p:txBody>
+      </p:sp>
+      <p:sp>
+        <p:nvSpPr>
+          <p:cNvPr id="3" name="직사각형 2"/>
+          <p:cNvSpPr/>
+          <p:nvPr/>
+        </p:nvSpPr>
+        <p:spPr>
+          <a:xfrm>
+            <a:off x="884420" y="2488367"/>
+            <a:ext cx="11092721" cy="1798820"/>
+          </a:xfrm>
+          <a:prstGeom prst="rect">
+            <a:avLst/>
+          </a:prstGeom>
+          <a:solidFill>
+            <a:srgbClr val="FFFF00"/>
+          </a:solidFill>
+        </p:spPr>
+        <p:style>
+          <a:lnRef idx="2">
+            <a:schemeClr val="accent1">
+              <a:shade val="50000"/>
+            </a:schemeClr>
+          </a:lnRef>
+          <a:fillRef idx="1">
+            <a:schemeClr val="accent1"/>
+          </a:fillRef>
+          <a:effectRef idx="0">
+            <a:schemeClr val="accent1"/>
+          </a:effectRef>
+          <a:fontRef idx="minor">
+            <a:schemeClr val="lt1"/>
+          </a:fontRef>
+        </p:style>
+        <p:txBody>
+          <a:bodyPr rtlCol="0" anchor="ctr"/>
+          <a:lstStyle/>
+          <a:p>
+            <a:pPr marL="457200" indent="-457200">
+              <a:buFontTx/>
+              <a:buChar char="-"/>
+            </a:pPr>
+            <a:r>
+              <a:rPr lang="ko-KR" altLang="en-US" sz="3200" b="1" dirty="0">
+                <a:solidFill>
+                  <a:schemeClr val="tx1"/>
+                </a:solidFill>
+              </a:rPr>
+              <a:t>개발 결과물의 추후 개선점</a:t>
+            </a:r>
+            <a:r>
+              <a:rPr lang="en-US" altLang="ko-KR" sz="3200" b="1" dirty="0">
+                <a:solidFill>
+                  <a:schemeClr val="tx1"/>
+                </a:solidFill>
+              </a:rPr>
+              <a:t>, </a:t>
+            </a:r>
+            <a:r>
+              <a:rPr lang="ko-KR" altLang="en-US" sz="3200" b="1" dirty="0">
+                <a:solidFill>
+                  <a:schemeClr val="tx1"/>
+                </a:solidFill>
+              </a:rPr>
+              <a:t>후속 개발 주제 등에 대한 내용</a:t>
+            </a:r>
+            <a:endParaRPr lang="en-US" altLang="ko-KR" sz="3200" b="1" dirty="0">
+              <a:solidFill>
+                <a:schemeClr val="tx1"/>
+              </a:solidFill>
+            </a:endParaRPr>
+          </a:p>
+          <a:p>
+            <a:pPr marL="457200" indent="-457200">
+              <a:buFontTx/>
+              <a:buChar char="-"/>
+            </a:pPr>
+            <a:r>
+              <a:rPr lang="ko-KR" altLang="en-US" sz="3200" b="1" dirty="0">
+                <a:solidFill>
+                  <a:schemeClr val="tx1"/>
+                </a:solidFill>
+              </a:rPr>
+              <a:t>가급적 </a:t>
+            </a:r>
+            <a:r>
+              <a:rPr lang="en-US" altLang="ko-KR" sz="3200" b="1" dirty="0">
+                <a:solidFill>
+                  <a:schemeClr val="tx1"/>
+                </a:solidFill>
+              </a:rPr>
+              <a:t>1</a:t>
+            </a:r>
+            <a:r>
+              <a:rPr lang="ko-KR" altLang="en-US" sz="3200" b="1" dirty="0">
+                <a:solidFill>
+                  <a:schemeClr val="tx1"/>
+                </a:solidFill>
+              </a:rPr>
+              <a:t>페이지로 요약</a:t>
+            </a:r>
+          </a:p>
+        </p:txBody>
+      </p:sp>
+    </p:spTree>
+    <p:extLst>
+      <p:ext uri="{BB962C8B-B14F-4D97-AF65-F5344CB8AC3E}">
+        <p14:creationId xmlns:p14="http://schemas.microsoft.com/office/powerpoint/2010/main" val="3019012668"/>
+      </p:ext>
+    </p:extLst>
+  </p:cSld>
+  <p:clrMapOvr>
+    <a:masterClrMapping/>
+  </p:clrMapOvr>
+  <p:timing>
+    <p:tnLst>
+      <p:par>
+        <p:cTn id="1" dur="indefinite" restart="never" nodeType="tmRoot"/>
+      </p:par>
+    </p:tnLst>
+  </p:timing>
+</p:sld>
+</file>
+
+<file path=ppt/slides/slide21.xml><?xml version="1.0" encoding="utf-8"?>
 <p:sld xmlns:a="http://schemas.openxmlformats.org/drawingml/2006/main" xmlns:r="http://schemas.openxmlformats.org/officeDocument/2006/relationships" xmlns:p="http://schemas.openxmlformats.org/presentationml/2006/main">
   <p:cSld>
     <p:spTree>
@@ -7357,15 +7575,7 @@
                   <a:schemeClr val="tx1"/>
                 </a:solidFill>
               </a:rPr>
-              <a:t>케릭터 </a:t>
-            </a:r>
-            <a:r>
-              <a:rPr lang="ko-KR" altLang="en-US" b="1" smtClean="0">
-                <a:solidFill>
-                  <a:schemeClr val="tx1"/>
-                </a:solidFill>
-              </a:rPr>
-              <a:t>추가</a:t>
+              <a:t>케릭터 추가</a:t>
             </a:r>
             <a:r>
               <a:rPr lang="en-US" altLang="ko-KR" b="1" dirty="0" smtClean="0">
@@ -7411,15 +7621,7 @@
                   <a:schemeClr val="tx1"/>
                 </a:solidFill>
               </a:rPr>
-              <a:t> </a:t>
-            </a:r>
-            <a:r>
-              <a:rPr lang="ko-KR" altLang="en-US" b="1" dirty="0" smtClean="0">
-                <a:solidFill>
-                  <a:schemeClr val="tx1"/>
-                </a:solidFill>
-              </a:rPr>
-              <a:t>룰 </a:t>
+              <a:t> 룰 </a:t>
             </a:r>
             <a:r>
               <a:rPr lang="en-US" altLang="ko-KR" b="1" dirty="0" smtClean="0">
@@ -7981,15 +8183,7 @@
                   <a:schemeClr val="tx1"/>
                 </a:solidFill>
               </a:rPr>
-              <a:t>전시회 </a:t>
-            </a:r>
-            <a:r>
-              <a:rPr lang="ko-KR" altLang="en-US" b="1" dirty="0" smtClean="0">
-                <a:solidFill>
-                  <a:schemeClr val="tx1"/>
-                </a:solidFill>
-              </a:rPr>
-              <a:t>시연 고려 </a:t>
+              <a:t>전시회 시연 고려 </a:t>
             </a:r>
             <a:r>
               <a:rPr lang="en-US" altLang="ko-KR" b="1" dirty="0" smtClean="0">
@@ -8005,15 +8199,7 @@
                   <a:schemeClr val="tx1"/>
                 </a:solidFill>
               </a:rPr>
-              <a:t>모니터에 띄울 수 </a:t>
-            </a:r>
-            <a:r>
-              <a:rPr lang="ko-KR" altLang="en-US" b="1" smtClean="0">
-                <a:solidFill>
-                  <a:schemeClr val="tx1"/>
-                </a:solidFill>
-              </a:rPr>
-              <a:t>있는지</a:t>
+              <a:t>모니터에 띄울 수 있는지</a:t>
             </a:r>
             <a:endParaRPr lang="en-US" altLang="ko-KR" sz="2800" b="1" dirty="0" smtClean="0">
               <a:solidFill>
@@ -8433,15 +8619,7 @@
                   <a:schemeClr val="tx1"/>
                 </a:solidFill>
               </a:rPr>
-              <a:t> 업로드 </a:t>
-            </a:r>
-            <a:r>
-              <a:rPr lang="ko-KR" altLang="en-US" b="1">
-                <a:solidFill>
-                  <a:schemeClr val="tx1"/>
-                </a:solidFill>
-              </a:rPr>
-              <a:t>방법</a:t>
+              <a:t> 업로드 방법</a:t>
             </a:r>
             <a:r>
               <a:rPr lang="en-US" altLang="ko-KR" b="1" dirty="0">
@@ -8659,11 +8837,6 @@
               </a:rPr>
               <a:t>)</a:t>
             </a:r>
-            <a:endParaRPr lang="en-US" altLang="ko-KR" b="1" dirty="0" smtClean="0">
-              <a:solidFill>
-                <a:schemeClr val="tx1"/>
-              </a:solidFill>
-            </a:endParaRPr>
           </a:p>
         </p:txBody>
       </p:sp>
@@ -9152,308 +9325,1079 @@
       </p:grpSpPr>
       <p:sp>
         <p:nvSpPr>
-          <p:cNvPr id="2" name="텍스트 개체 틀 1"/>
-          <p:cNvSpPr>
-            <a:spLocks noGrp="1"/>
-          </p:cNvSpPr>
-          <p:nvPr>
-            <p:ph type="body" sz="quarter" idx="10"/>
-          </p:nvPr>
+          <p:cNvPr id="21" name="직사각형 20"/>
+          <p:cNvSpPr/>
+          <p:nvPr/>
         </p:nvSpPr>
-        <p:spPr/>
+        <p:spPr>
+          <a:xfrm>
+            <a:off x="8857633" y="1561514"/>
+            <a:ext cx="7743960" cy="8653640"/>
+          </a:xfrm>
+          <a:prstGeom prst="rect">
+            <a:avLst/>
+          </a:prstGeom>
+          <a:solidFill>
+            <a:srgbClr val="FFFF00"/>
+          </a:solidFill>
+        </p:spPr>
+        <p:style>
+          <a:lnRef idx="2">
+            <a:schemeClr val="accent1">
+              <a:shade val="50000"/>
+            </a:schemeClr>
+          </a:lnRef>
+          <a:fillRef idx="1">
+            <a:schemeClr val="accent1"/>
+          </a:fillRef>
+          <a:effectRef idx="0">
+            <a:schemeClr val="accent1"/>
+          </a:effectRef>
+          <a:fontRef idx="minor">
+            <a:schemeClr val="lt1"/>
+          </a:fontRef>
+        </p:style>
         <p:txBody>
-          <a:bodyPr/>
+          <a:bodyPr rtlCol="0" anchor="t"/>
           <a:lstStyle/>
           <a:p>
-            <a:r>
-              <a:rPr lang="ko-KR" altLang="en-US" dirty="0" smtClean="0"/>
-              <a:t>프로젝트 주제 </a:t>
-            </a:r>
-            <a:r>
-              <a:rPr lang="en-US" altLang="ko-KR" dirty="0"/>
-              <a:t>: </a:t>
-            </a:r>
-            <a:r>
-              <a:rPr lang="ko-KR" altLang="en-US"/>
-              <a:t>캐치 마인드</a:t>
-            </a:r>
-          </a:p>
-          <a:p>
-            <a:pPr lvl="1"/>
-            <a:r>
-              <a:rPr lang="ko-KR" altLang="en-US" dirty="0"/>
-              <a:t>필요 인원 </a:t>
-            </a:r>
-            <a:r>
-              <a:rPr lang="en-US" altLang="ko-KR" dirty="0"/>
+            <a:pPr marL="342900" indent="-342900">
+              <a:lnSpc>
+                <a:spcPct val="150000"/>
+              </a:lnSpc>
+              <a:buFontTx/>
+              <a:buChar char="-"/>
+            </a:pPr>
+            <a:r>
+              <a:rPr lang="ko-KR" altLang="en-US" b="1" dirty="0" smtClean="0">
+                <a:solidFill>
+                  <a:schemeClr val="tx1"/>
+                </a:solidFill>
+              </a:rPr>
+              <a:t>구현</a:t>
+            </a:r>
+            <a:endParaRPr lang="en-US" altLang="ko-KR" b="1" dirty="0" smtClean="0">
+              <a:solidFill>
+                <a:schemeClr val="tx1"/>
+              </a:solidFill>
+            </a:endParaRPr>
+          </a:p>
+          <a:p>
+            <a:pPr marL="800100" lvl="1" indent="-342900">
+              <a:lnSpc>
+                <a:spcPct val="150000"/>
+              </a:lnSpc>
+              <a:buFontTx/>
+              <a:buChar char="-"/>
+            </a:pPr>
+            <a:r>
+              <a:rPr lang="ko-KR" altLang="en-US" b="1" dirty="0">
+                <a:solidFill>
+                  <a:schemeClr val="tx1"/>
+                </a:solidFill>
+              </a:rPr>
+              <a:t>참가자 </a:t>
+            </a:r>
+            <a:r>
+              <a:rPr lang="en-US" altLang="ko-KR" b="1" dirty="0">
+                <a:solidFill>
+                  <a:schemeClr val="tx1"/>
+                </a:solidFill>
+              </a:rPr>
+              <a:t>1</a:t>
+            </a:r>
+            <a:r>
+              <a:rPr lang="ko-KR" altLang="en-US" b="1">
+                <a:solidFill>
+                  <a:schemeClr val="tx1"/>
+                </a:solidFill>
+              </a:rPr>
+              <a:t>이 제출한 상태에서 참가자 </a:t>
+            </a:r>
+            <a:r>
+              <a:rPr lang="en-US" altLang="ko-KR" b="1" dirty="0">
+                <a:solidFill>
+                  <a:schemeClr val="tx1"/>
+                </a:solidFill>
+              </a:rPr>
+              <a:t>2</a:t>
+            </a:r>
+            <a:r>
+              <a:rPr lang="ko-KR" altLang="en-US" b="1">
+                <a:solidFill>
+                  <a:schemeClr val="tx1"/>
+                </a:solidFill>
+              </a:rPr>
+              <a:t>가 제출하고 </a:t>
+            </a:r>
+            <a:r>
+              <a:rPr lang="en-US" altLang="ko-KR" b="1" dirty="0">
+                <a:solidFill>
+                  <a:schemeClr val="tx1"/>
+                </a:solidFill>
+              </a:rPr>
+              <a:t>NG </a:t>
+            </a:r>
+            <a:r>
+              <a:rPr lang="ko-KR" altLang="en-US" b="1">
+                <a:solidFill>
+                  <a:schemeClr val="tx1"/>
+                </a:solidFill>
+              </a:rPr>
+              <a:t>터치하면 참가자 </a:t>
+            </a:r>
+            <a:r>
+              <a:rPr lang="en-US" altLang="ko-KR" b="1" dirty="0">
+                <a:solidFill>
+                  <a:schemeClr val="tx1"/>
+                </a:solidFill>
+              </a:rPr>
+              <a:t>2</a:t>
+            </a:r>
+            <a:r>
+              <a:rPr lang="ko-KR" altLang="en-US" b="1">
+                <a:solidFill>
+                  <a:schemeClr val="tx1"/>
+                </a:solidFill>
+              </a:rPr>
+              <a:t>가 </a:t>
+            </a:r>
+            <a:r>
+              <a:rPr lang="ko-KR" altLang="en-US" b="1" smtClean="0">
+                <a:solidFill>
+                  <a:schemeClr val="tx1"/>
+                </a:solidFill>
+              </a:rPr>
+              <a:t>끊김</a:t>
+            </a:r>
+            <a:r>
+              <a:rPr lang="en-US" altLang="ko-KR" b="1" dirty="0">
+                <a:solidFill>
+                  <a:schemeClr val="tx1"/>
+                </a:solidFill>
+              </a:rPr>
+              <a:t/>
+            </a:r>
+            <a:br>
+              <a:rPr lang="en-US" altLang="ko-KR" b="1" dirty="0">
+                <a:solidFill>
+                  <a:schemeClr val="tx1"/>
+                </a:solidFill>
+              </a:rPr>
+            </a:br>
+            <a:r>
+              <a:rPr lang="ko-KR" altLang="en-US" b="1" smtClean="0">
+                <a:solidFill>
+                  <a:schemeClr val="tx1"/>
+                </a:solidFill>
+              </a:rPr>
+              <a:t>참가자 </a:t>
+            </a:r>
+            <a:r>
+              <a:rPr lang="en-US" altLang="ko-KR" b="1" dirty="0" smtClean="0">
+                <a:solidFill>
+                  <a:schemeClr val="tx1"/>
+                </a:solidFill>
+              </a:rPr>
+              <a:t>1</a:t>
+            </a:r>
+            <a:r>
+              <a:rPr lang="ko-KR" altLang="en-US" b="1" smtClean="0">
+                <a:solidFill>
+                  <a:schemeClr val="tx1"/>
+                </a:solidFill>
+              </a:rPr>
+              <a:t>이 제출한 상태에서 참가자 </a:t>
+            </a:r>
+            <a:r>
+              <a:rPr lang="en-US" altLang="ko-KR" b="1" dirty="0" smtClean="0">
+                <a:solidFill>
+                  <a:schemeClr val="tx1"/>
+                </a:solidFill>
+              </a:rPr>
+              <a:t>2</a:t>
+            </a:r>
+            <a:r>
+              <a:rPr lang="ko-KR" altLang="en-US" b="1" smtClean="0">
+                <a:solidFill>
+                  <a:schemeClr val="tx1"/>
+                </a:solidFill>
+              </a:rPr>
+              <a:t>가 제출 못하도록 원복하자</a:t>
+            </a:r>
+            <a:endParaRPr lang="en-US" altLang="ko-KR" b="1" dirty="0" smtClean="0">
+              <a:solidFill>
+                <a:schemeClr val="tx1"/>
+              </a:solidFill>
+            </a:endParaRPr>
+          </a:p>
+          <a:p>
+            <a:pPr marL="800100" lvl="1" indent="-342900">
+              <a:lnSpc>
+                <a:spcPct val="150000"/>
+              </a:lnSpc>
+              <a:buFontTx/>
+              <a:buChar char="-"/>
+            </a:pPr>
+            <a:r>
+              <a:rPr lang="en-US" altLang="ko-KR" b="1" dirty="0" smtClean="0">
+                <a:solidFill>
+                  <a:schemeClr val="tx1"/>
+                </a:solidFill>
+              </a:rPr>
+              <a:t>6.12.81 </a:t>
+            </a:r>
+            <a:r>
+              <a:rPr lang="ko-KR" altLang="en-US" b="1" smtClean="0">
+                <a:solidFill>
+                  <a:schemeClr val="tx1"/>
+                </a:solidFill>
+              </a:rPr>
+              <a:t>리눅스 </a:t>
+            </a:r>
+            <a:r>
+              <a:rPr lang="ko-KR" altLang="en-US" b="1" dirty="0" err="1" smtClean="0">
+                <a:solidFill>
+                  <a:schemeClr val="tx1"/>
+                </a:solidFill>
+              </a:rPr>
+              <a:t>커널</a:t>
+            </a:r>
+            <a:r>
+              <a:rPr lang="ko-KR" altLang="en-US" b="1" dirty="0" smtClean="0">
+                <a:solidFill>
+                  <a:schemeClr val="tx1"/>
+                </a:solidFill>
+              </a:rPr>
+              <a:t> 이미지 </a:t>
+            </a:r>
+            <a:r>
+              <a:rPr lang="ko-KR" altLang="en-US" b="1" smtClean="0">
+                <a:solidFill>
+                  <a:schemeClr val="tx1"/>
+                </a:solidFill>
+              </a:rPr>
+              <a:t>보드에 업로드 </a:t>
+            </a:r>
+            <a:endParaRPr lang="en-US" altLang="ko-KR" b="1" dirty="0" smtClean="0">
+              <a:solidFill>
+                <a:schemeClr val="tx1"/>
+              </a:solidFill>
+            </a:endParaRPr>
+          </a:p>
+          <a:p>
+            <a:pPr marL="800100" lvl="1" indent="-342900">
+              <a:lnSpc>
+                <a:spcPct val="150000"/>
+              </a:lnSpc>
+              <a:buFontTx/>
+              <a:buChar char="-"/>
+            </a:pPr>
+            <a:r>
+              <a:rPr lang="ko-KR" altLang="en-US" b="1" dirty="0" smtClean="0">
+                <a:solidFill>
+                  <a:schemeClr val="tx1"/>
+                </a:solidFill>
+              </a:rPr>
+              <a:t>참가자</a:t>
+            </a:r>
+            <a:r>
+              <a:rPr lang="en-US" altLang="ko-KR" b="1" dirty="0" smtClean="0">
+                <a:solidFill>
+                  <a:schemeClr val="tx1"/>
+                </a:solidFill>
+              </a:rPr>
+              <a:t>/</a:t>
+            </a:r>
+            <a:r>
+              <a:rPr lang="ko-KR" altLang="en-US" b="1" smtClean="0">
+                <a:solidFill>
+                  <a:schemeClr val="tx1"/>
+                </a:solidFill>
+              </a:rPr>
+              <a:t>출제자 화면에 </a:t>
+            </a:r>
+            <a:r>
+              <a:rPr lang="ko-KR" altLang="en-US" b="1" dirty="0" smtClean="0">
+                <a:solidFill>
+                  <a:schemeClr val="tx1"/>
+                </a:solidFill>
+              </a:rPr>
+              <a:t>지우개 기능</a:t>
+            </a:r>
+            <a:endParaRPr lang="en-US" altLang="ko-KR" b="1" dirty="0" smtClean="0">
+              <a:solidFill>
+                <a:schemeClr val="tx1"/>
+              </a:solidFill>
+            </a:endParaRPr>
+          </a:p>
+          <a:p>
+            <a:pPr marL="800100" lvl="1" indent="-342900">
+              <a:lnSpc>
+                <a:spcPct val="150000"/>
+              </a:lnSpc>
+              <a:buFontTx/>
+              <a:buChar char="-"/>
+            </a:pPr>
+            <a:r>
+              <a:rPr lang="ko-KR" altLang="en-US" b="1" dirty="0" smtClean="0">
+                <a:solidFill>
+                  <a:schemeClr val="tx1"/>
+                </a:solidFill>
+              </a:rPr>
+              <a:t>음악 </a:t>
+            </a:r>
+            <a:r>
+              <a:rPr lang="ko-KR" altLang="en-US" b="1" dirty="0" err="1" smtClean="0">
+                <a:solidFill>
+                  <a:schemeClr val="tx1"/>
+                </a:solidFill>
+              </a:rPr>
+              <a:t>싱크</a:t>
+            </a:r>
+            <a:r>
+              <a:rPr lang="ko-KR" altLang="en-US" b="1" dirty="0" smtClean="0">
+                <a:solidFill>
+                  <a:schemeClr val="tx1"/>
+                </a:solidFill>
+              </a:rPr>
+              <a:t> 맞추기</a:t>
+            </a:r>
+            <a:endParaRPr lang="en-US" altLang="ko-KR" b="1" dirty="0" smtClean="0">
+              <a:solidFill>
+                <a:schemeClr val="tx1"/>
+              </a:solidFill>
+            </a:endParaRPr>
+          </a:p>
+          <a:p>
+            <a:pPr marL="800100" lvl="1" indent="-342900">
+              <a:lnSpc>
+                <a:spcPct val="150000"/>
+              </a:lnSpc>
+              <a:buFontTx/>
+              <a:buChar char="-"/>
+            </a:pPr>
+            <a:r>
+              <a:rPr lang="ko-KR" altLang="en-US" b="1" dirty="0" smtClean="0">
+                <a:solidFill>
+                  <a:schemeClr val="tx1"/>
+                </a:solidFill>
+              </a:rPr>
+              <a:t>일정 </a:t>
+            </a:r>
+            <a:r>
+              <a:rPr lang="ko-KR" altLang="en-US" b="1" dirty="0">
+                <a:solidFill>
+                  <a:schemeClr val="tx1"/>
+                </a:solidFill>
+              </a:rPr>
+              <a:t>시간 못 맞추면 힌트로 카테고리 </a:t>
+            </a:r>
+            <a:r>
+              <a:rPr lang="ko-KR" altLang="en-US" b="1" dirty="0" smtClean="0">
+                <a:solidFill>
+                  <a:schemeClr val="tx1"/>
+                </a:solidFill>
+              </a:rPr>
+              <a:t>출력</a:t>
+            </a:r>
+            <a:endParaRPr lang="en-US" altLang="ko-KR" b="1" dirty="0" smtClean="0">
+              <a:solidFill>
+                <a:schemeClr val="tx1"/>
+              </a:solidFill>
+            </a:endParaRPr>
+          </a:p>
+          <a:p>
+            <a:pPr marL="800100" lvl="1" indent="-342900">
+              <a:lnSpc>
+                <a:spcPct val="150000"/>
+              </a:lnSpc>
+              <a:buFontTx/>
+              <a:buChar char="-"/>
+            </a:pPr>
+            <a:r>
+              <a:rPr lang="en-US" altLang="ko-KR" b="1" dirty="0" smtClean="0">
+                <a:solidFill>
+                  <a:schemeClr val="tx1"/>
+                </a:solidFill>
+              </a:rPr>
+              <a:t>UI </a:t>
+            </a:r>
+            <a:r>
+              <a:rPr lang="ko-KR" altLang="en-US" b="1" smtClean="0">
+                <a:solidFill>
+                  <a:schemeClr val="tx1"/>
+                </a:solidFill>
+              </a:rPr>
+              <a:t>화면 추가</a:t>
+            </a:r>
+            <a:r>
+              <a:rPr lang="en-US" altLang="ko-KR" b="1" dirty="0" smtClean="0">
+                <a:solidFill>
+                  <a:schemeClr val="tx1"/>
+                </a:solidFill>
+              </a:rPr>
+              <a:t>(</a:t>
+            </a:r>
+            <a:r>
+              <a:rPr lang="ko-KR" altLang="en-US" b="1" smtClean="0">
+                <a:solidFill>
+                  <a:schemeClr val="tx1"/>
+                </a:solidFill>
+              </a:rPr>
+              <a:t>게임 시작 화면</a:t>
+            </a:r>
+            <a:r>
+              <a:rPr lang="en-US" altLang="ko-KR" b="1" dirty="0" smtClean="0">
+                <a:solidFill>
+                  <a:schemeClr val="tx1"/>
+                </a:solidFill>
+              </a:rPr>
+              <a:t>, </a:t>
+            </a:r>
+            <a:r>
+              <a:rPr lang="ko-KR" altLang="en-US" b="1" smtClean="0">
+                <a:solidFill>
+                  <a:schemeClr val="tx1"/>
+                </a:solidFill>
+              </a:rPr>
+              <a:t>케릭터 추가</a:t>
+            </a:r>
+            <a:r>
+              <a:rPr lang="en-US" altLang="ko-KR" b="1" dirty="0" smtClean="0">
+                <a:solidFill>
+                  <a:schemeClr val="tx1"/>
+                </a:solidFill>
+              </a:rPr>
+              <a:t>)</a:t>
+            </a:r>
+            <a:r>
+              <a:rPr lang="ko-KR" altLang="en-US" b="1" smtClean="0">
+                <a:solidFill>
+                  <a:schemeClr val="tx1"/>
+                </a:solidFill>
+              </a:rPr>
+              <a:t> </a:t>
+            </a:r>
+            <a:endParaRPr lang="en-US" altLang="ko-KR" b="1" dirty="0" smtClean="0">
+              <a:solidFill>
+                <a:schemeClr val="tx1"/>
+              </a:solidFill>
+            </a:endParaRPr>
+          </a:p>
+          <a:p>
+            <a:pPr marL="800100" lvl="1" indent="-342900">
+              <a:lnSpc>
+                <a:spcPct val="150000"/>
+              </a:lnSpc>
+              <a:buFontTx/>
+              <a:buChar char="-"/>
+            </a:pPr>
+            <a:r>
+              <a:rPr lang="ko-KR" altLang="en-US" b="1" dirty="0" err="1" smtClean="0">
+                <a:solidFill>
+                  <a:schemeClr val="tx1"/>
+                </a:solidFill>
+              </a:rPr>
+              <a:t>점수제</a:t>
+            </a:r>
+            <a:r>
+              <a:rPr lang="ko-KR" altLang="en-US" b="1" dirty="0" smtClean="0">
+                <a:solidFill>
+                  <a:schemeClr val="tx1"/>
+                </a:solidFill>
+              </a:rPr>
+              <a:t> 룰 </a:t>
+            </a:r>
+            <a:r>
+              <a:rPr lang="en-US" altLang="ko-KR" b="1" dirty="0" smtClean="0">
+                <a:solidFill>
+                  <a:schemeClr val="tx1"/>
+                </a:solidFill>
+              </a:rPr>
+              <a:t>(5</a:t>
+            </a:r>
+            <a:r>
+              <a:rPr lang="ko-KR" altLang="en-US" b="1" smtClean="0">
+                <a:solidFill>
+                  <a:schemeClr val="tx1"/>
+                </a:solidFill>
+              </a:rPr>
+              <a:t>라운드</a:t>
+            </a:r>
+            <a:r>
+              <a:rPr lang="en-US" altLang="ko-KR" b="1" dirty="0" smtClean="0">
+                <a:solidFill>
+                  <a:schemeClr val="tx1"/>
+                </a:solidFill>
+              </a:rPr>
+              <a:t>, 60</a:t>
+            </a:r>
+            <a:r>
+              <a:rPr lang="ko-KR" altLang="en-US" b="1" smtClean="0">
+                <a:solidFill>
+                  <a:schemeClr val="tx1"/>
+                </a:solidFill>
+              </a:rPr>
+              <a:t>초 </a:t>
+            </a:r>
+            <a:r>
+              <a:rPr lang="en-US" altLang="ko-KR" b="1" dirty="0" smtClean="0">
+                <a:solidFill>
+                  <a:schemeClr val="tx1"/>
+                </a:solidFill>
+              </a:rPr>
+              <a:t>-&gt; 0</a:t>
+            </a:r>
+            <a:r>
+              <a:rPr lang="ko-KR" altLang="en-US" b="1" smtClean="0">
+                <a:solidFill>
+                  <a:schemeClr val="tx1"/>
+                </a:solidFill>
+              </a:rPr>
+              <a:t>초</a:t>
+            </a:r>
+            <a:r>
+              <a:rPr lang="en-US" altLang="ko-KR" b="1" dirty="0" smtClean="0">
+                <a:solidFill>
+                  <a:schemeClr val="tx1"/>
+                </a:solidFill>
+              </a:rPr>
+              <a:t>)</a:t>
+            </a:r>
+            <a:endParaRPr lang="en-US" altLang="ko-KR" b="1" dirty="0">
+              <a:solidFill>
+                <a:schemeClr val="tx1"/>
+              </a:solidFill>
+            </a:endParaRPr>
+          </a:p>
+          <a:p>
+            <a:pPr marL="1257300" lvl="2" indent="-342900">
+              <a:lnSpc>
+                <a:spcPct val="150000"/>
+              </a:lnSpc>
+              <a:buFontTx/>
+              <a:buChar char="-"/>
+            </a:pPr>
+            <a:r>
+              <a:rPr lang="ko-KR" altLang="en-US" b="1" dirty="0" smtClean="0">
+                <a:solidFill>
+                  <a:schemeClr val="tx1"/>
+                </a:solidFill>
+              </a:rPr>
+              <a:t>최초 출제자는 선착순</a:t>
+            </a:r>
+            <a:endParaRPr lang="en-US" altLang="ko-KR" b="1" dirty="0" smtClean="0">
+              <a:solidFill>
+                <a:schemeClr val="tx1"/>
+              </a:solidFill>
+            </a:endParaRPr>
+          </a:p>
+          <a:p>
+            <a:pPr marL="1257300" lvl="2" indent="-342900">
+              <a:lnSpc>
+                <a:spcPct val="150000"/>
+              </a:lnSpc>
+              <a:buFontTx/>
+              <a:buChar char="-"/>
+            </a:pPr>
+            <a:r>
+              <a:rPr lang="en-US" altLang="ko-KR" b="1" dirty="0" smtClean="0">
+                <a:solidFill>
+                  <a:schemeClr val="tx1"/>
+                </a:solidFill>
+              </a:rPr>
+              <a:t>60 ~ 30</a:t>
+            </a:r>
+            <a:r>
+              <a:rPr lang="ko-KR" altLang="en-US" b="1" smtClean="0">
+                <a:solidFill>
+                  <a:schemeClr val="tx1"/>
+                </a:solidFill>
+              </a:rPr>
+              <a:t>초 </a:t>
+            </a:r>
+            <a:r>
+              <a:rPr lang="en-US" altLang="ko-KR" b="1" dirty="0" smtClean="0">
+                <a:solidFill>
+                  <a:schemeClr val="tx1"/>
+                </a:solidFill>
+              </a:rPr>
+              <a:t>– </a:t>
+            </a:r>
+            <a:r>
+              <a:rPr lang="ko-KR" altLang="en-US" b="1" smtClean="0">
+                <a:solidFill>
+                  <a:schemeClr val="tx1"/>
+                </a:solidFill>
+              </a:rPr>
+              <a:t>출제자의 문제를 맞추면</a:t>
+            </a:r>
+            <a:r>
+              <a:rPr lang="en-US" altLang="ko-KR" b="1" dirty="0" smtClean="0">
+                <a:solidFill>
+                  <a:schemeClr val="tx1"/>
+                </a:solidFill>
+              </a:rPr>
+              <a:t>,</a:t>
+            </a:r>
+            <a:r>
+              <a:rPr lang="ko-KR" altLang="en-US" b="1" smtClean="0">
+                <a:solidFill>
+                  <a:schemeClr val="tx1"/>
+                </a:solidFill>
+              </a:rPr>
+              <a:t> 출제자가 </a:t>
+            </a:r>
+            <a:r>
+              <a:rPr lang="en-US" altLang="ko-KR" b="1" dirty="0" smtClean="0">
+                <a:solidFill>
+                  <a:schemeClr val="tx1"/>
+                </a:solidFill>
+              </a:rPr>
+              <a:t>2</a:t>
+            </a:r>
+            <a:r>
+              <a:rPr lang="ko-KR" altLang="en-US" b="1" smtClean="0">
+                <a:solidFill>
+                  <a:schemeClr val="tx1"/>
+                </a:solidFill>
+              </a:rPr>
+              <a:t>점 획득</a:t>
+            </a:r>
+            <a:r>
+              <a:rPr lang="en-US" altLang="ko-KR" b="1" dirty="0" smtClean="0">
+                <a:solidFill>
+                  <a:schemeClr val="tx1"/>
+                </a:solidFill>
+              </a:rPr>
+              <a:t>, </a:t>
+            </a:r>
+            <a:r>
+              <a:rPr lang="ko-KR" altLang="en-US" b="1" smtClean="0">
+                <a:solidFill>
+                  <a:schemeClr val="tx1"/>
+                </a:solidFill>
+              </a:rPr>
+              <a:t>참가자는 </a:t>
+            </a:r>
+            <a:r>
+              <a:rPr lang="en-US" altLang="ko-KR" b="1" dirty="0" smtClean="0">
+                <a:solidFill>
+                  <a:schemeClr val="tx1"/>
+                </a:solidFill>
+              </a:rPr>
               <a:t>3</a:t>
             </a:r>
             <a:r>
-              <a:rPr lang="ko-KR" altLang="en-US"/>
-              <a:t>명 </a:t>
-            </a:r>
-            <a:r>
-              <a:rPr lang="en-US" altLang="ko-KR" dirty="0"/>
-              <a:t>(1</a:t>
-            </a:r>
-            <a:r>
-              <a:rPr lang="ko-KR" altLang="en-US"/>
-              <a:t>명 출제자</a:t>
-            </a:r>
-            <a:r>
-              <a:rPr lang="en-US" altLang="ko-KR" dirty="0"/>
-              <a:t>, 2</a:t>
-            </a:r>
-            <a:r>
-              <a:rPr lang="ko-KR" altLang="en-US"/>
-              <a:t>명 참가자</a:t>
-            </a:r>
-            <a:r>
-              <a:rPr lang="en-US" altLang="ko-KR" dirty="0" smtClean="0"/>
-              <a:t>)</a:t>
-            </a:r>
-            <a:endParaRPr lang="en-US" altLang="ko-KR" dirty="0"/>
-          </a:p>
-          <a:p>
-            <a:endParaRPr lang="en-US" altLang="ko-KR" dirty="0" smtClean="0"/>
-          </a:p>
-          <a:p>
-            <a:r>
-              <a:rPr lang="ko-KR" altLang="en-US" dirty="0" smtClean="0"/>
-              <a:t>게임 </a:t>
-            </a:r>
-            <a:r>
-              <a:rPr lang="ko-KR" altLang="en-US" dirty="0"/>
-              <a:t>방식</a:t>
-            </a:r>
-          </a:p>
-          <a:p>
-            <a:pPr lvl="1"/>
-            <a:r>
-              <a:rPr lang="ko-KR" altLang="en-US" dirty="0" smtClean="0"/>
-              <a:t>출제자는 분야</a:t>
-            </a:r>
-            <a:r>
-              <a:rPr lang="en-US" altLang="ko-KR" dirty="0" smtClean="0"/>
-              <a:t>&gt;</a:t>
-            </a:r>
-            <a:r>
-              <a:rPr lang="ko-KR" altLang="en-US"/>
-              <a:t>주제어 순서로 </a:t>
-            </a:r>
-            <a:r>
-              <a:rPr lang="ko-KR" altLang="en-US" smtClean="0"/>
-              <a:t>선택</a:t>
-            </a:r>
-            <a:endParaRPr lang="en-US" altLang="ko-KR" dirty="0" smtClean="0"/>
-          </a:p>
-          <a:p>
-            <a:pPr lvl="2"/>
-            <a:r>
-              <a:rPr lang="ko-KR" altLang="en-US" dirty="0" smtClean="0"/>
-              <a:t>각 </a:t>
-            </a:r>
-            <a:r>
-              <a:rPr lang="ko-KR" altLang="en-US" dirty="0"/>
-              <a:t>계층 별 </a:t>
-            </a:r>
-            <a:r>
-              <a:rPr lang="en-US" altLang="ko-KR" dirty="0"/>
-              <a:t>4</a:t>
-            </a:r>
-            <a:r>
-              <a:rPr lang="ko-KR" altLang="en-US"/>
-              <a:t>개씩 랜덤</a:t>
-            </a:r>
-          </a:p>
-          <a:p>
-            <a:pPr lvl="1"/>
-            <a:r>
-              <a:rPr lang="ko-KR" altLang="en-US" dirty="0"/>
-              <a:t>출제자가 그림 그리기 </a:t>
-            </a:r>
-            <a:r>
-              <a:rPr lang="ko-KR" altLang="en-US" dirty="0" smtClean="0"/>
-              <a:t>시작</a:t>
-            </a:r>
-            <a:endParaRPr lang="en-US" altLang="ko-KR" dirty="0"/>
-          </a:p>
-          <a:p>
-            <a:pPr lvl="1"/>
-            <a:r>
-              <a:rPr lang="ko-KR" altLang="en-US" dirty="0" smtClean="0"/>
+              <a:rPr lang="ko-KR" altLang="en-US" b="1" smtClean="0">
+                <a:solidFill>
+                  <a:schemeClr val="tx1"/>
+                </a:solidFill>
+              </a:rPr>
+              <a:t>점 획득</a:t>
+            </a:r>
+            <a:endParaRPr lang="en-US" altLang="ko-KR" b="1" dirty="0" smtClean="0">
+              <a:solidFill>
+                <a:schemeClr val="tx1"/>
+              </a:solidFill>
+            </a:endParaRPr>
+          </a:p>
+          <a:p>
+            <a:pPr marL="1257300" lvl="2" indent="-342900">
+              <a:lnSpc>
+                <a:spcPct val="150000"/>
+              </a:lnSpc>
+              <a:buFontTx/>
+              <a:buChar char="-"/>
+            </a:pPr>
+            <a:r>
+              <a:rPr lang="en-US" altLang="ko-KR" b="1" dirty="0" smtClean="0">
+                <a:solidFill>
+                  <a:schemeClr val="tx1"/>
+                </a:solidFill>
+              </a:rPr>
+              <a:t>30</a:t>
+            </a:r>
+            <a:r>
+              <a:rPr lang="ko-KR" altLang="en-US" b="1">
+                <a:solidFill>
+                  <a:schemeClr val="tx1"/>
+                </a:solidFill>
+              </a:rPr>
+              <a:t> </a:t>
+            </a:r>
+            <a:r>
+              <a:rPr lang="en-US" altLang="ko-KR" b="1" dirty="0" smtClean="0">
+                <a:solidFill>
+                  <a:schemeClr val="tx1"/>
+                </a:solidFill>
+              </a:rPr>
+              <a:t>~ 0</a:t>
+            </a:r>
+            <a:r>
+              <a:rPr lang="ko-KR" altLang="en-US" b="1" smtClean="0">
+                <a:solidFill>
+                  <a:schemeClr val="tx1"/>
+                </a:solidFill>
+              </a:rPr>
+              <a:t>초 </a:t>
+            </a:r>
+            <a:r>
+              <a:rPr lang="en-US" altLang="ko-KR" b="1" dirty="0" smtClean="0">
+                <a:solidFill>
+                  <a:schemeClr val="tx1"/>
+                </a:solidFill>
+              </a:rPr>
+              <a:t>– </a:t>
+            </a:r>
+            <a:r>
+              <a:rPr lang="ko-KR" altLang="en-US" b="1" smtClean="0">
+                <a:solidFill>
+                  <a:schemeClr val="tx1"/>
+                </a:solidFill>
+              </a:rPr>
+              <a:t>힌트 출력</a:t>
+            </a:r>
+            <a:r>
+              <a:rPr lang="en-US" altLang="ko-KR" b="1" dirty="0" smtClean="0">
+                <a:solidFill>
+                  <a:schemeClr val="tx1"/>
+                </a:solidFill>
+              </a:rPr>
+              <a:t>(</a:t>
+            </a:r>
+            <a:r>
+              <a:rPr lang="ko-KR" altLang="en-US" b="1" smtClean="0">
+                <a:solidFill>
+                  <a:schemeClr val="tx1"/>
+                </a:solidFill>
+              </a:rPr>
+              <a:t>카테고리</a:t>
+            </a:r>
+            <a:r>
+              <a:rPr lang="en-US" altLang="ko-KR" b="1" dirty="0" smtClean="0">
+                <a:solidFill>
+                  <a:schemeClr val="tx1"/>
+                </a:solidFill>
+              </a:rPr>
+              <a:t>). </a:t>
+            </a:r>
+            <a:r>
+              <a:rPr lang="ko-KR" altLang="en-US" b="1" smtClean="0">
+                <a:solidFill>
+                  <a:schemeClr val="tx1"/>
+                </a:solidFill>
+              </a:rPr>
+              <a:t>출제자의 </a:t>
+            </a:r>
+            <a:r>
+              <a:rPr lang="ko-KR" altLang="en-US" b="1">
+                <a:solidFill>
+                  <a:schemeClr val="tx1"/>
+                </a:solidFill>
+              </a:rPr>
+              <a:t>문제를 맞추면</a:t>
+            </a:r>
+            <a:r>
+              <a:rPr lang="en-US" altLang="ko-KR" b="1" dirty="0">
+                <a:solidFill>
+                  <a:schemeClr val="tx1"/>
+                </a:solidFill>
+              </a:rPr>
+              <a:t>,</a:t>
+            </a:r>
+            <a:r>
+              <a:rPr lang="ko-KR" altLang="en-US" b="1">
+                <a:solidFill>
+                  <a:schemeClr val="tx1"/>
+                </a:solidFill>
+              </a:rPr>
+              <a:t> 출제자가 </a:t>
+            </a:r>
+            <a:r>
+              <a:rPr lang="en-US" altLang="ko-KR" b="1" dirty="0" smtClean="0">
+                <a:solidFill>
+                  <a:schemeClr val="tx1"/>
+                </a:solidFill>
+              </a:rPr>
+              <a:t>1</a:t>
+            </a:r>
+            <a:r>
+              <a:rPr lang="ko-KR" altLang="en-US" b="1" smtClean="0">
+                <a:solidFill>
+                  <a:schemeClr val="tx1"/>
+                </a:solidFill>
+              </a:rPr>
+              <a:t>점 </a:t>
+            </a:r>
+            <a:r>
+              <a:rPr lang="ko-KR" altLang="en-US" b="1">
+                <a:solidFill>
+                  <a:schemeClr val="tx1"/>
+                </a:solidFill>
+              </a:rPr>
+              <a:t>획득</a:t>
+            </a:r>
+            <a:r>
+              <a:rPr lang="en-US" altLang="ko-KR" b="1" dirty="0">
+                <a:solidFill>
+                  <a:schemeClr val="tx1"/>
+                </a:solidFill>
+              </a:rPr>
+              <a:t>, </a:t>
+            </a:r>
+            <a:r>
+              <a:rPr lang="ko-KR" altLang="en-US" b="1">
+                <a:solidFill>
+                  <a:schemeClr val="tx1"/>
+                </a:solidFill>
+              </a:rPr>
               <a:t>참가자는 </a:t>
             </a:r>
             <a:r>
-              <a:rPr lang="ko-KR" altLang="en-US" dirty="0"/>
-              <a:t>정답을 자신의 화면에 </a:t>
-            </a:r>
-            <a:r>
-              <a:rPr lang="ko-KR" altLang="en-US" dirty="0" smtClean="0"/>
-              <a:t>글씨로 작성하여 </a:t>
-            </a:r>
-            <a:r>
-              <a:rPr lang="ko-KR" altLang="en-US" dirty="0"/>
-              <a:t>제출</a:t>
-            </a:r>
-          </a:p>
-          <a:p>
-            <a:pPr lvl="1"/>
-            <a:r>
-              <a:rPr lang="ko-KR" altLang="en-US" dirty="0" smtClean="0"/>
-              <a:t>출제자는 </a:t>
-            </a:r>
-            <a:r>
-              <a:rPr lang="ko-KR" altLang="en-US" dirty="0"/>
-              <a:t>확인 후 </a:t>
-            </a:r>
-            <a:r>
-              <a:rPr lang="ko-KR" altLang="en-US" dirty="0" smtClean="0"/>
-              <a:t>정답</a:t>
-            </a:r>
-            <a:r>
-              <a:rPr lang="en-US" altLang="ko-KR" dirty="0" smtClean="0"/>
-              <a:t>/</a:t>
-            </a:r>
-            <a:r>
-              <a:rPr lang="ko-KR" altLang="en-US" smtClean="0"/>
-              <a:t>오답 </a:t>
-            </a:r>
-            <a:r>
-              <a:rPr lang="ko-KR" altLang="en-US" dirty="0"/>
-              <a:t>판단</a:t>
-            </a:r>
-          </a:p>
-          <a:p>
-            <a:pPr lvl="1"/>
-            <a:r>
-              <a:rPr lang="ko-KR" altLang="en-US" dirty="0" smtClean="0"/>
-              <a:t>정답 시 맞춘 </a:t>
-            </a:r>
-            <a:r>
-              <a:rPr lang="ko-KR" altLang="en-US" dirty="0"/>
-              <a:t>사람이 출제자가 되고</a:t>
-            </a:r>
-            <a:r>
-              <a:rPr lang="en-US" altLang="ko-KR" dirty="0"/>
+              <a:rPr lang="en-US" altLang="ko-KR" b="1" dirty="0" smtClean="0">
+                <a:solidFill>
+                  <a:schemeClr val="tx1"/>
+                </a:solidFill>
+              </a:rPr>
+              <a:t>2</a:t>
+            </a:r>
+            <a:r>
+              <a:rPr lang="ko-KR" altLang="en-US" b="1" smtClean="0">
+                <a:solidFill>
+                  <a:schemeClr val="tx1"/>
+                </a:solidFill>
+              </a:rPr>
+              <a:t>점 획득</a:t>
+            </a:r>
+            <a:endParaRPr lang="en-US" altLang="ko-KR" b="1" dirty="0" smtClean="0">
+              <a:solidFill>
+                <a:schemeClr val="tx1"/>
+              </a:solidFill>
+            </a:endParaRPr>
+          </a:p>
+          <a:p>
+            <a:pPr marL="1257300" lvl="2" indent="-342900">
+              <a:lnSpc>
+                <a:spcPct val="150000"/>
+              </a:lnSpc>
+              <a:buFontTx/>
+              <a:buChar char="-"/>
+            </a:pPr>
+            <a:r>
+              <a:rPr lang="en-US" altLang="ko-KR" b="1" dirty="0" smtClean="0">
+                <a:solidFill>
+                  <a:schemeClr val="tx1"/>
+                </a:solidFill>
+              </a:rPr>
+              <a:t>0</a:t>
+            </a:r>
+            <a:r>
+              <a:rPr lang="ko-KR" altLang="en-US" b="1" smtClean="0">
+                <a:solidFill>
+                  <a:schemeClr val="tx1"/>
+                </a:solidFill>
+              </a:rPr>
+              <a:t>초 이후 </a:t>
+            </a:r>
+            <a:r>
+              <a:rPr lang="en-US" altLang="ko-KR" b="1" dirty="0" smtClean="0">
+                <a:solidFill>
+                  <a:schemeClr val="tx1"/>
+                </a:solidFill>
+              </a:rPr>
+              <a:t>– </a:t>
+            </a:r>
+            <a:r>
+              <a:rPr lang="ko-KR" altLang="en-US" b="1" smtClean="0">
+                <a:solidFill>
+                  <a:schemeClr val="tx1"/>
+                </a:solidFill>
+              </a:rPr>
+              <a:t>바로 종료 후</a:t>
+            </a:r>
+            <a:r>
+              <a:rPr lang="en-US" altLang="ko-KR" b="1" dirty="0" smtClean="0">
+                <a:solidFill>
+                  <a:schemeClr val="tx1"/>
+                </a:solidFill>
+              </a:rPr>
               <a:t>, </a:t>
             </a:r>
             <a:r>
-              <a:rPr lang="en-US" altLang="ko-KR" dirty="0" smtClean="0"/>
-              <a:t/>
-            </a:r>
-            <a:br>
-              <a:rPr lang="en-US" altLang="ko-KR" dirty="0" smtClean="0"/>
-            </a:br>
-            <a:r>
-              <a:rPr lang="ko-KR" altLang="en-US" smtClean="0"/>
-              <a:t>다시 </a:t>
-            </a:r>
-            <a:r>
-              <a:rPr lang="ko-KR" altLang="en-US"/>
-              <a:t>주제어 선택 화면으로 전환</a:t>
-            </a:r>
-          </a:p>
-          <a:p>
-            <a:pPr lvl="1"/>
-            <a:r>
-              <a:rPr lang="ko-KR" altLang="en-US" dirty="0"/>
-              <a:t>다음 라운드 </a:t>
-            </a:r>
-            <a:r>
-              <a:rPr lang="ko-KR" altLang="en-US" dirty="0" smtClean="0"/>
-              <a:t>시작</a:t>
-            </a:r>
-            <a:endParaRPr lang="en-US" altLang="ko-KR" dirty="0" smtClean="0"/>
-          </a:p>
-          <a:p>
-            <a:pPr lvl="1"/>
-            <a:endParaRPr lang="en-US" altLang="ko-KR" dirty="0"/>
-          </a:p>
-          <a:p>
-            <a:r>
-              <a:rPr lang="ko-KR" altLang="en-US" dirty="0" smtClean="0"/>
-              <a:t>점수 획득 방법</a:t>
-            </a:r>
-            <a:endParaRPr lang="en-US" altLang="ko-KR" dirty="0" smtClean="0"/>
-          </a:p>
-          <a:p>
-            <a:pPr lvl="1"/>
-            <a:r>
-              <a:rPr lang="ko-KR" altLang="en-US" dirty="0" smtClean="0"/>
-              <a:t>문제를 맞춘 참가자는 </a:t>
-            </a:r>
-            <a:r>
-              <a:rPr lang="en-US" altLang="ko-KR" dirty="0" smtClean="0"/>
-              <a:t>OO</a:t>
-            </a:r>
-            <a:r>
-              <a:rPr lang="ko-KR" altLang="en-US" smtClean="0"/>
-              <a:t>점의 점수 획득</a:t>
-            </a:r>
-            <a:endParaRPr lang="en-US" altLang="ko-KR" dirty="0" smtClean="0"/>
-          </a:p>
-          <a:p>
-            <a:pPr lvl="1"/>
-            <a:r>
-              <a:rPr lang="en-US" altLang="ko-KR" dirty="0" smtClean="0"/>
+              <a:rPr lang="ko-KR" altLang="en-US" b="1" smtClean="0">
+                <a:solidFill>
+                  <a:schemeClr val="tx1"/>
+                </a:solidFill>
+              </a:rPr>
+              <a:t>정답 공개</a:t>
+            </a:r>
+            <a:r>
+              <a:rPr lang="en-US" altLang="ko-KR" b="1" dirty="0" smtClean="0">
+                <a:solidFill>
+                  <a:schemeClr val="tx1"/>
+                </a:solidFill>
+              </a:rPr>
+              <a:t>. </a:t>
+            </a:r>
+            <a:r>
+              <a:rPr lang="ko-KR" altLang="en-US" b="1" smtClean="0">
+                <a:solidFill>
+                  <a:schemeClr val="tx1"/>
+                </a:solidFill>
+              </a:rPr>
+              <a:t>출제자 </a:t>
+            </a:r>
+            <a:r>
+              <a:rPr lang="en-US" altLang="ko-KR" b="1" dirty="0" smtClean="0">
+                <a:solidFill>
+                  <a:schemeClr val="tx1"/>
+                </a:solidFill>
+              </a:rPr>
               <a:t>1</a:t>
             </a:r>
             <a:r>
-              <a:rPr lang="ko-KR" altLang="en-US" smtClean="0"/>
-              <a:t>분의 그림 그리기 제한 시간동안 맞춘 사람이 있는 경우에는 출제자 </a:t>
-            </a:r>
-            <a:r>
-              <a:rPr lang="en-US" altLang="ko-KR" dirty="0" smtClean="0"/>
-              <a:t>OO</a:t>
-            </a:r>
-            <a:r>
-              <a:rPr lang="ko-KR" altLang="en-US" smtClean="0"/>
-              <a:t>점 획득</a:t>
-            </a:r>
-            <a:endParaRPr lang="en-US" altLang="ko-KR" dirty="0" smtClean="0"/>
-          </a:p>
-          <a:p>
-            <a:pPr lvl="1"/>
-            <a:r>
-              <a:rPr lang="ko-KR" altLang="en-US" dirty="0" smtClean="0"/>
-              <a:t>맞춘 사람이 없는 경우에는 출제자 </a:t>
-            </a:r>
-            <a:r>
-              <a:rPr lang="en-US" altLang="ko-KR" dirty="0" smtClean="0"/>
-              <a:t>OO</a:t>
-            </a:r>
-            <a:r>
-              <a:rPr lang="ko-KR" altLang="en-US" smtClean="0"/>
+              <a:rPr lang="ko-KR" altLang="en-US" b="1" smtClean="0">
+                <a:solidFill>
+                  <a:schemeClr val="tx1"/>
+                </a:solidFill>
+              </a:rPr>
               <a:t>점 감점</a:t>
             </a:r>
-            <a:endParaRPr lang="en-US" altLang="ko-KR" dirty="0" smtClean="0"/>
-          </a:p>
-          <a:p>
-            <a:pPr lvl="1"/>
-            <a:r>
-              <a:rPr lang="en-US" altLang="ko-KR" dirty="0" smtClean="0"/>
-              <a:t>5</a:t>
-            </a:r>
-            <a:r>
-              <a:rPr lang="ko-KR" altLang="en-US" smtClean="0"/>
-              <a:t>라운드 이후 각 인원 점수를 합산하여 </a:t>
-            </a:r>
-            <a:r>
-              <a:rPr lang="en-US" altLang="ko-KR" dirty="0" smtClean="0"/>
-              <a:t>1~3</a:t>
-            </a:r>
-            <a:r>
-              <a:rPr lang="ko-KR" altLang="en-US" smtClean="0"/>
-              <a:t>등 표시</a:t>
-            </a:r>
-            <a:endParaRPr lang="ko-KR" altLang="en-US" dirty="0"/>
+            <a:r>
+              <a:rPr lang="en-US" altLang="ko-KR" b="1" dirty="0" smtClean="0">
+                <a:solidFill>
+                  <a:schemeClr val="tx1"/>
+                </a:solidFill>
+              </a:rPr>
+              <a:t>, </a:t>
+            </a:r>
+            <a:r>
+              <a:rPr lang="ko-KR" altLang="en-US" b="1" smtClean="0">
+                <a:solidFill>
+                  <a:schemeClr val="tx1"/>
+                </a:solidFill>
+              </a:rPr>
+              <a:t>다음 출제자는 기존 출제자 유지 </a:t>
+            </a:r>
+            <a:endParaRPr lang="en-US" altLang="ko-KR" b="1" dirty="0" smtClean="0">
+              <a:solidFill>
+                <a:schemeClr val="tx1"/>
+              </a:solidFill>
+            </a:endParaRPr>
+          </a:p>
+          <a:p>
+            <a:pPr marL="342900" indent="-342900">
+              <a:lnSpc>
+                <a:spcPct val="150000"/>
+              </a:lnSpc>
+              <a:buFontTx/>
+              <a:buChar char="-"/>
+            </a:pPr>
+            <a:r>
+              <a:rPr lang="ko-KR" altLang="en-US" b="1" dirty="0" smtClean="0">
+                <a:solidFill>
+                  <a:schemeClr val="tx1"/>
+                </a:solidFill>
+              </a:rPr>
+              <a:t>기타</a:t>
+            </a:r>
+            <a:endParaRPr lang="en-US" altLang="ko-KR" b="1" dirty="0" smtClean="0">
+              <a:solidFill>
+                <a:schemeClr val="tx1"/>
+              </a:solidFill>
+            </a:endParaRPr>
+          </a:p>
+          <a:p>
+            <a:pPr marL="800100" lvl="1" indent="-342900">
+              <a:lnSpc>
+                <a:spcPct val="150000"/>
+              </a:lnSpc>
+              <a:buFontTx/>
+              <a:buChar char="-"/>
+            </a:pPr>
+            <a:r>
+              <a:rPr lang="ko-KR" altLang="en-US" b="1" dirty="0">
+                <a:solidFill>
+                  <a:schemeClr val="tx1"/>
+                </a:solidFill>
+              </a:rPr>
+              <a:t>팀 소개 영상 </a:t>
+            </a:r>
+            <a:r>
+              <a:rPr lang="en-US" altLang="ko-KR" b="1" dirty="0">
+                <a:solidFill>
+                  <a:schemeClr val="tx1"/>
+                </a:solidFill>
+              </a:rPr>
+              <a:t>– </a:t>
+            </a:r>
+            <a:r>
+              <a:rPr lang="ko-KR" altLang="en-US" b="1">
+                <a:solidFill>
+                  <a:schemeClr val="tx1"/>
+                </a:solidFill>
+              </a:rPr>
+              <a:t>월요일 오후 </a:t>
+            </a:r>
+            <a:r>
+              <a:rPr lang="ko-KR" altLang="en-US" b="1" smtClean="0">
+                <a:solidFill>
+                  <a:schemeClr val="tx1"/>
+                </a:solidFill>
+              </a:rPr>
+              <a:t>한시까지 제출</a:t>
+            </a:r>
+            <a:endParaRPr lang="en-US" altLang="ko-KR" b="1" dirty="0" smtClean="0">
+              <a:solidFill>
+                <a:schemeClr val="tx1"/>
+              </a:solidFill>
+            </a:endParaRPr>
+          </a:p>
+          <a:p>
+            <a:pPr marL="800100" lvl="1" indent="-342900">
+              <a:lnSpc>
+                <a:spcPct val="150000"/>
+              </a:lnSpc>
+              <a:buFontTx/>
+              <a:buChar char="-"/>
+            </a:pPr>
+            <a:r>
+              <a:rPr lang="ko-KR" altLang="en-US" b="1" dirty="0" smtClean="0">
+                <a:solidFill>
+                  <a:schemeClr val="tx1"/>
+                </a:solidFill>
+              </a:rPr>
+              <a:t>전시회 시연 고려 </a:t>
+            </a:r>
+            <a:r>
+              <a:rPr lang="en-US" altLang="ko-KR" b="1" dirty="0" smtClean="0">
+                <a:solidFill>
+                  <a:schemeClr val="tx1"/>
+                </a:solidFill>
+              </a:rPr>
+              <a:t>– PC </a:t>
+            </a:r>
+            <a:r>
+              <a:rPr lang="ko-KR" altLang="en-US" b="1" smtClean="0">
+                <a:solidFill>
+                  <a:schemeClr val="tx1"/>
+                </a:solidFill>
+              </a:rPr>
+              <a:t>모니터에 띄울 수 있는지</a:t>
+            </a:r>
+            <a:endParaRPr lang="en-US" altLang="ko-KR" sz="2800" b="1" dirty="0" smtClean="0">
+              <a:solidFill>
+                <a:schemeClr val="tx1"/>
+              </a:solidFill>
+            </a:endParaRPr>
           </a:p>
         </p:txBody>
       </p:sp>
       <p:sp>
         <p:nvSpPr>
-          <p:cNvPr id="3" name="TextBox 2"/>
+          <p:cNvPr id="2" name="TextBox 1"/>
           <p:cNvSpPr txBox="1"/>
           <p:nvPr/>
         </p:nvSpPr>
@@ -9474,56 +10418,702 @@
           <a:lstStyle/>
           <a:p>
             <a:r>
-              <a:rPr lang="en-US" altLang="ko-KR" sz="5400" b="1" dirty="0">
+              <a:rPr lang="en-US" altLang="ko-KR" sz="5400" b="1" dirty="0" smtClean="0">
                 <a:solidFill>
                   <a:schemeClr val="bg1"/>
                 </a:solidFill>
                 <a:latin typeface="LG스마트체2.0 Regular" panose="020B0600000101010101" pitchFamily="50" charset="-127"/>
                 <a:ea typeface="LG스마트체2.0 Regular" panose="020B0600000101010101" pitchFamily="50" charset="-127"/>
               </a:rPr>
-              <a:t>1. </a:t>
-            </a:r>
-            <a:r>
-              <a:rPr lang="ko-KR" altLang="en-US" sz="5400" b="1" dirty="0">
+              <a:t>0. </a:t>
+            </a:r>
+            <a:r>
+              <a:rPr lang="ko-KR" altLang="en-US" sz="5400" b="1" smtClean="0">
                 <a:solidFill>
                   <a:schemeClr val="bg1"/>
                 </a:solidFill>
                 <a:latin typeface="LG스마트체2.0 Regular" panose="020B0600000101010101" pitchFamily="50" charset="-127"/>
                 <a:ea typeface="LG스마트체2.0 Regular" panose="020B0600000101010101" pitchFamily="50" charset="-127"/>
               </a:rPr>
-              <a:t>주제 및 결과 요약</a:t>
-            </a:r>
+              <a:t>기획</a:t>
+            </a:r>
+            <a:r>
+              <a:rPr lang="en-US" altLang="ko-KR" sz="5400" b="1" dirty="0" smtClean="0">
+                <a:solidFill>
+                  <a:schemeClr val="bg1"/>
+                </a:solidFill>
+                <a:latin typeface="LG스마트체2.0 Regular" panose="020B0600000101010101" pitchFamily="50" charset="-127"/>
+                <a:ea typeface="LG스마트체2.0 Regular" panose="020B0600000101010101" pitchFamily="50" charset="-127"/>
+              </a:rPr>
+              <a:t>(260417)</a:t>
+            </a:r>
+            <a:endParaRPr lang="ko-KR" altLang="en-US" sz="5400" b="1" dirty="0">
+              <a:solidFill>
+                <a:schemeClr val="bg1"/>
+              </a:solidFill>
+              <a:latin typeface="LG스마트체2.0 Regular" panose="020B0600000101010101" pitchFamily="50" charset="-127"/>
+              <a:ea typeface="LG스마트체2.0 Regular" panose="020B0600000101010101" pitchFamily="50" charset="-127"/>
+            </a:endParaRPr>
           </a:p>
         </p:txBody>
       </p:sp>
-      <p:pic>
-        <p:nvPicPr>
-          <p:cNvPr id="5" name="그림 4"/>
-          <p:cNvPicPr>
-            <a:picLocks noChangeAspect="1"/>
-          </p:cNvPicPr>
+      <p:sp>
+        <p:nvSpPr>
+          <p:cNvPr id="5" name="직사각형 4"/>
+          <p:cNvSpPr/>
           <p:nvPr/>
-        </p:nvPicPr>
-        <p:blipFill>
-          <a:blip r:embed="rId2"/>
-          <a:stretch>
-            <a:fillRect/>
-          </a:stretch>
-        </p:blipFill>
+        </p:nvSpPr>
         <p:spPr>
           <a:xfrm>
-            <a:off x="8270081" y="1767433"/>
-            <a:ext cx="8684419" cy="4884986"/>
+            <a:off x="701541" y="1561514"/>
+            <a:ext cx="7743960" cy="8653640"/>
           </a:xfrm>
           <a:prstGeom prst="rect">
             <a:avLst/>
           </a:prstGeom>
+          <a:solidFill>
+            <a:srgbClr val="FFFF00"/>
+          </a:solidFill>
         </p:spPr>
-      </p:pic>
+        <p:style>
+          <a:lnRef idx="2">
+            <a:schemeClr val="accent1">
+              <a:shade val="50000"/>
+            </a:schemeClr>
+          </a:lnRef>
+          <a:fillRef idx="1">
+            <a:schemeClr val="accent1"/>
+          </a:fillRef>
+          <a:effectRef idx="0">
+            <a:schemeClr val="accent1"/>
+          </a:effectRef>
+          <a:fontRef idx="minor">
+            <a:schemeClr val="lt1"/>
+          </a:fontRef>
+        </p:style>
+        <p:txBody>
+          <a:bodyPr rtlCol="0" anchor="t"/>
+          <a:lstStyle/>
+          <a:p>
+            <a:pPr marL="342900" indent="-342900">
+              <a:lnSpc>
+                <a:spcPct val="150000"/>
+              </a:lnSpc>
+              <a:buFontTx/>
+              <a:buChar char="-"/>
+            </a:pPr>
+            <a:r>
+              <a:rPr lang="en-US" altLang="ko-KR" b="1" dirty="0" smtClean="0">
+                <a:solidFill>
+                  <a:schemeClr val="tx1"/>
+                </a:solidFill>
+              </a:rPr>
+              <a:t>4/20 </a:t>
+            </a:r>
+            <a:r>
+              <a:rPr lang="ko-KR" altLang="en-US" b="1" smtClean="0">
+                <a:solidFill>
+                  <a:schemeClr val="tx1"/>
+                </a:solidFill>
+              </a:rPr>
+              <a:t>월 팀별 영상 제작</a:t>
+            </a:r>
+            <a:endParaRPr lang="en-US" altLang="ko-KR" b="1" smtClean="0">
+              <a:solidFill>
+                <a:schemeClr val="tx1"/>
+              </a:solidFill>
+            </a:endParaRPr>
+          </a:p>
+          <a:p>
+            <a:pPr marL="342900" indent="-342900">
+              <a:lnSpc>
+                <a:spcPct val="150000"/>
+              </a:lnSpc>
+              <a:buFontTx/>
+              <a:buChar char="-"/>
+            </a:pPr>
+            <a:r>
+              <a:rPr lang="en-US" altLang="ko-KR" b="1" dirty="0" smtClean="0">
+                <a:solidFill>
+                  <a:schemeClr val="tx1"/>
+                </a:solidFill>
+              </a:rPr>
+              <a:t>4/21 </a:t>
+            </a:r>
+            <a:r>
+              <a:rPr lang="ko-KR" altLang="en-US" b="1" smtClean="0">
+                <a:solidFill>
+                  <a:schemeClr val="tx1"/>
+                </a:solidFill>
+              </a:rPr>
+              <a:t>화 오후 한시반 </a:t>
+            </a:r>
+            <a:r>
+              <a:rPr lang="en-US" altLang="ko-KR" b="1" dirty="0" smtClean="0">
+                <a:solidFill>
+                  <a:schemeClr val="tx1"/>
+                </a:solidFill>
+              </a:rPr>
+              <a:t>2</a:t>
+            </a:r>
+            <a:r>
+              <a:rPr lang="ko-KR" altLang="en-US" b="1" smtClean="0">
+                <a:solidFill>
+                  <a:schemeClr val="tx1"/>
+                </a:solidFill>
+              </a:rPr>
+              <a:t>차 데모</a:t>
+            </a:r>
+            <a:endParaRPr lang="en-US" altLang="ko-KR" b="1" dirty="0" smtClean="0">
+              <a:solidFill>
+                <a:schemeClr val="tx1"/>
+              </a:solidFill>
+            </a:endParaRPr>
+          </a:p>
+          <a:p>
+            <a:pPr marL="342900" indent="-342900">
+              <a:lnSpc>
+                <a:spcPct val="150000"/>
+              </a:lnSpc>
+              <a:buFontTx/>
+              <a:buChar char="-"/>
+            </a:pPr>
+            <a:r>
+              <a:rPr lang="en-US" altLang="ko-KR" b="1" dirty="0" smtClean="0">
+                <a:solidFill>
+                  <a:schemeClr val="tx1"/>
+                </a:solidFill>
+              </a:rPr>
+              <a:t>4/22 </a:t>
+            </a:r>
+            <a:r>
+              <a:rPr lang="ko-KR" altLang="en-US" b="1" smtClean="0">
+                <a:solidFill>
+                  <a:schemeClr val="tx1"/>
+                </a:solidFill>
+              </a:rPr>
+              <a:t>수 오후 한시반 </a:t>
+            </a:r>
+            <a:r>
+              <a:rPr lang="en-US" altLang="ko-KR" b="1" dirty="0" smtClean="0">
+                <a:solidFill>
+                  <a:schemeClr val="tx1"/>
+                </a:solidFill>
+              </a:rPr>
+              <a:t>3</a:t>
+            </a:r>
+            <a:r>
+              <a:rPr lang="ko-KR" altLang="en-US" b="1" smtClean="0">
+                <a:solidFill>
+                  <a:schemeClr val="tx1"/>
+                </a:solidFill>
+              </a:rPr>
+              <a:t>차 데모</a:t>
+            </a:r>
+            <a:endParaRPr lang="en-US" altLang="ko-KR" b="1" dirty="0" smtClean="0">
+              <a:solidFill>
+                <a:schemeClr val="tx1"/>
+              </a:solidFill>
+            </a:endParaRPr>
+          </a:p>
+          <a:p>
+            <a:pPr marL="342900" indent="-342900">
+              <a:lnSpc>
+                <a:spcPct val="150000"/>
+              </a:lnSpc>
+              <a:buFontTx/>
+              <a:buChar char="-"/>
+            </a:pPr>
+            <a:r>
+              <a:rPr lang="en-US" altLang="ko-KR" b="1" dirty="0" smtClean="0">
+                <a:solidFill>
+                  <a:schemeClr val="tx1"/>
+                </a:solidFill>
+              </a:rPr>
+              <a:t>4/23 </a:t>
+            </a:r>
+            <a:r>
+              <a:rPr lang="ko-KR" altLang="en-US" b="1" smtClean="0">
+                <a:solidFill>
+                  <a:schemeClr val="tx1"/>
+                </a:solidFill>
+              </a:rPr>
+              <a:t>목 오후 한시반 최종 발표</a:t>
+            </a:r>
+            <a:r>
+              <a:rPr lang="en-US" altLang="ko-KR" b="1" dirty="0" smtClean="0">
+                <a:solidFill>
+                  <a:schemeClr val="tx1"/>
+                </a:solidFill>
+              </a:rPr>
+              <a:t>, </a:t>
+            </a:r>
+            <a:r>
+              <a:rPr lang="ko-KR" altLang="en-US" b="1" smtClean="0">
+                <a:solidFill>
+                  <a:schemeClr val="tx1"/>
+                </a:solidFill>
+              </a:rPr>
+              <a:t>세시반 반별 전시회</a:t>
+            </a:r>
+            <a:endParaRPr lang="en-US" altLang="ko-KR" b="1" dirty="0" smtClean="0">
+              <a:solidFill>
+                <a:schemeClr val="tx1"/>
+              </a:solidFill>
+            </a:endParaRPr>
+          </a:p>
+        </p:txBody>
+      </p:sp>
+      <p:grpSp>
+        <p:nvGrpSpPr>
+          <p:cNvPr id="20" name="그룹 19"/>
+          <p:cNvGrpSpPr/>
+          <p:nvPr/>
+        </p:nvGrpSpPr>
+        <p:grpSpPr>
+          <a:xfrm>
+            <a:off x="1965916" y="5764804"/>
+            <a:ext cx="4655366" cy="3357592"/>
+            <a:chOff x="11739591" y="2631786"/>
+            <a:chExt cx="4655366" cy="3357592"/>
+          </a:xfrm>
+        </p:grpSpPr>
+        <p:sp>
+          <p:nvSpPr>
+            <p:cNvPr id="11" name="직사각형 10"/>
+            <p:cNvSpPr/>
+            <p:nvPr/>
+          </p:nvSpPr>
+          <p:spPr>
+            <a:xfrm>
+              <a:off x="12635344" y="3056708"/>
+              <a:ext cx="3759613" cy="2926080"/>
+            </a:xfrm>
+            <a:prstGeom prst="rect">
+              <a:avLst/>
+            </a:prstGeom>
+            <a:solidFill>
+              <a:schemeClr val="bg1"/>
+            </a:solidFill>
+            <a:ln w="28575">
+              <a:solidFill>
+                <a:schemeClr val="tx1"/>
+              </a:solidFill>
+            </a:ln>
+          </p:spPr>
+          <p:style>
+            <a:lnRef idx="2">
+              <a:schemeClr val="accent1">
+                <a:shade val="50000"/>
+              </a:schemeClr>
+            </a:lnRef>
+            <a:fillRef idx="1">
+              <a:schemeClr val="accent1"/>
+            </a:fillRef>
+            <a:effectRef idx="0">
+              <a:schemeClr val="accent1"/>
+            </a:effectRef>
+            <a:fontRef idx="minor">
+              <a:schemeClr val="lt1"/>
+            </a:fontRef>
+          </p:style>
+          <p:txBody>
+            <a:bodyPr rtlCol="0" anchor="ctr"/>
+            <a:lstStyle/>
+            <a:p>
+              <a:pPr algn="ctr"/>
+              <a:endParaRPr lang="ko-KR" altLang="en-US" b="1"/>
+            </a:p>
+          </p:txBody>
+        </p:sp>
+        <p:cxnSp>
+          <p:nvCxnSpPr>
+            <p:cNvPr id="12" name="직선 연결선 11"/>
+            <p:cNvCxnSpPr/>
+            <p:nvPr/>
+          </p:nvCxnSpPr>
+          <p:spPr>
+            <a:xfrm>
+              <a:off x="14435529" y="4513217"/>
+              <a:ext cx="0" cy="1476161"/>
+            </a:xfrm>
+            <a:prstGeom prst="line">
+              <a:avLst/>
+            </a:prstGeom>
+            <a:ln w="38100">
+              <a:solidFill>
+                <a:schemeClr val="tx1"/>
+              </a:solidFill>
+            </a:ln>
+          </p:spPr>
+          <p:style>
+            <a:lnRef idx="1">
+              <a:schemeClr val="accent1"/>
+            </a:lnRef>
+            <a:fillRef idx="0">
+              <a:schemeClr val="accent1"/>
+            </a:fillRef>
+            <a:effectRef idx="0">
+              <a:schemeClr val="accent1"/>
+            </a:effectRef>
+            <a:fontRef idx="minor">
+              <a:schemeClr val="tx1"/>
+            </a:fontRef>
+          </p:style>
+        </p:cxnSp>
+        <p:cxnSp>
+          <p:nvCxnSpPr>
+            <p:cNvPr id="13" name="직선 연결선 12"/>
+            <p:cNvCxnSpPr>
+              <a:stCxn id="11" idx="3"/>
+              <a:endCxn id="11" idx="1"/>
+            </p:cNvCxnSpPr>
+            <p:nvPr/>
+          </p:nvCxnSpPr>
+          <p:spPr>
+            <a:xfrm flipH="1">
+              <a:off x="12635344" y="4519748"/>
+              <a:ext cx="3759613" cy="0"/>
+            </a:xfrm>
+            <a:prstGeom prst="line">
+              <a:avLst/>
+            </a:prstGeom>
+            <a:ln w="38100">
+              <a:solidFill>
+                <a:schemeClr val="tx1"/>
+              </a:solidFill>
+            </a:ln>
+          </p:spPr>
+          <p:style>
+            <a:lnRef idx="1">
+              <a:schemeClr val="accent1"/>
+            </a:lnRef>
+            <a:fillRef idx="0">
+              <a:schemeClr val="accent1"/>
+            </a:fillRef>
+            <a:effectRef idx="0">
+              <a:schemeClr val="accent1"/>
+            </a:effectRef>
+            <a:fontRef idx="minor">
+              <a:schemeClr val="tx1"/>
+            </a:fontRef>
+          </p:style>
+        </p:cxnSp>
+        <p:sp>
+          <p:nvSpPr>
+            <p:cNvPr id="7" name="TextBox 6"/>
+            <p:cNvSpPr txBox="1"/>
+            <p:nvPr/>
+          </p:nvSpPr>
+          <p:spPr>
+            <a:xfrm>
+              <a:off x="11849395" y="2631786"/>
+              <a:ext cx="1418978" cy="369332"/>
+            </a:xfrm>
+            <a:prstGeom prst="rect">
+              <a:avLst/>
+            </a:prstGeom>
+            <a:noFill/>
+          </p:spPr>
+          <p:txBody>
+            <a:bodyPr wrap="none" rtlCol="0">
+              <a:spAutoFit/>
+            </a:bodyPr>
+            <a:lstStyle/>
+            <a:p>
+              <a:r>
+                <a:rPr lang="ko-KR" altLang="en-US" b="1" dirty="0" smtClean="0"/>
+                <a:t>화면 </a:t>
+              </a:r>
+              <a:r>
+                <a:rPr lang="en-US" altLang="ko-KR" b="1" dirty="0" smtClean="0"/>
+                <a:t>UI </a:t>
+              </a:r>
+              <a:r>
+                <a:rPr lang="ko-KR" altLang="en-US" b="1" smtClean="0"/>
+                <a:t>구성</a:t>
+              </a:r>
+              <a:endParaRPr lang="ko-KR" altLang="en-US" b="1"/>
+            </a:p>
+          </p:txBody>
+        </p:sp>
+        <p:sp>
+          <p:nvSpPr>
+            <p:cNvPr id="8" name="TextBox 7"/>
+            <p:cNvSpPr txBox="1"/>
+            <p:nvPr/>
+          </p:nvSpPr>
+          <p:spPr>
+            <a:xfrm>
+              <a:off x="12729613" y="3151052"/>
+              <a:ext cx="1194558" cy="307777"/>
+            </a:xfrm>
+            <a:prstGeom prst="rect">
+              <a:avLst/>
+            </a:prstGeom>
+            <a:noFill/>
+          </p:spPr>
+          <p:txBody>
+            <a:bodyPr wrap="none" rtlCol="0">
+              <a:spAutoFit/>
+            </a:bodyPr>
+            <a:lstStyle/>
+            <a:p>
+              <a:r>
+                <a:rPr lang="ko-KR" altLang="en-US" sz="1400" b="1" dirty="0" smtClean="0"/>
+                <a:t>출제자</a:t>
+              </a:r>
+              <a:r>
+                <a:rPr lang="en-US" altLang="ko-KR" sz="1400" b="1" dirty="0"/>
+                <a:t>(</a:t>
+              </a:r>
+              <a:r>
+                <a:rPr lang="ko-KR" altLang="en-US" sz="1400" b="1" smtClean="0"/>
+                <a:t>점수</a:t>
+              </a:r>
+              <a:r>
+                <a:rPr lang="en-US" altLang="ko-KR" sz="1400" b="1" dirty="0" smtClean="0"/>
+                <a:t>)</a:t>
+              </a:r>
+              <a:endParaRPr lang="ko-KR" altLang="en-US" sz="1400" b="1"/>
+            </a:p>
+          </p:txBody>
+        </p:sp>
+        <p:sp>
+          <p:nvSpPr>
+            <p:cNvPr id="9" name="TextBox 8"/>
+            <p:cNvSpPr txBox="1"/>
+            <p:nvPr/>
+          </p:nvSpPr>
+          <p:spPr>
+            <a:xfrm>
+              <a:off x="12729613" y="4588179"/>
+              <a:ext cx="1366080" cy="307777"/>
+            </a:xfrm>
+            <a:prstGeom prst="rect">
+              <a:avLst/>
+            </a:prstGeom>
+            <a:noFill/>
+          </p:spPr>
+          <p:txBody>
+            <a:bodyPr wrap="none" rtlCol="0">
+              <a:spAutoFit/>
+            </a:bodyPr>
+            <a:lstStyle/>
+            <a:p>
+              <a:r>
+                <a:rPr lang="ko-KR" altLang="en-US" sz="1400" b="1" dirty="0" smtClean="0"/>
+                <a:t>참가자 </a:t>
+              </a:r>
+              <a:r>
+                <a:rPr lang="en-US" altLang="ko-KR" sz="1400" b="1" dirty="0" smtClean="0"/>
+                <a:t>1</a:t>
+              </a:r>
+              <a:r>
+                <a:rPr lang="en-US" altLang="ko-KR" sz="1400" b="1" dirty="0"/>
+                <a:t> (</a:t>
+              </a:r>
+              <a:r>
+                <a:rPr lang="ko-KR" altLang="en-US" sz="1400" b="1"/>
+                <a:t>점수</a:t>
+              </a:r>
+              <a:r>
+                <a:rPr lang="en-US" altLang="ko-KR" sz="1400" b="1" dirty="0"/>
+                <a:t>)</a:t>
+              </a:r>
+              <a:endParaRPr lang="ko-KR" altLang="en-US" sz="1400" b="1" dirty="0"/>
+            </a:p>
+          </p:txBody>
+        </p:sp>
+        <p:sp>
+          <p:nvSpPr>
+            <p:cNvPr id="10" name="TextBox 9"/>
+            <p:cNvSpPr txBox="1"/>
+            <p:nvPr/>
+          </p:nvSpPr>
+          <p:spPr>
+            <a:xfrm>
+              <a:off x="14529799" y="4569839"/>
+              <a:ext cx="1366080" cy="307777"/>
+            </a:xfrm>
+            <a:prstGeom prst="rect">
+              <a:avLst/>
+            </a:prstGeom>
+            <a:noFill/>
+          </p:spPr>
+          <p:txBody>
+            <a:bodyPr wrap="none" rtlCol="0">
+              <a:spAutoFit/>
+            </a:bodyPr>
+            <a:lstStyle/>
+            <a:p>
+              <a:r>
+                <a:rPr lang="ko-KR" altLang="en-US" sz="1400" b="1" dirty="0" smtClean="0"/>
+                <a:t>참가자 </a:t>
+              </a:r>
+              <a:r>
+                <a:rPr lang="en-US" altLang="ko-KR" sz="1400" b="1" dirty="0" smtClean="0"/>
+                <a:t>2 </a:t>
+              </a:r>
+              <a:r>
+                <a:rPr lang="en-US" altLang="ko-KR" sz="1400" b="1" dirty="0"/>
+                <a:t>(</a:t>
+              </a:r>
+              <a:r>
+                <a:rPr lang="ko-KR" altLang="en-US" sz="1400" b="1"/>
+                <a:t>점수</a:t>
+              </a:r>
+              <a:r>
+                <a:rPr lang="en-US" altLang="ko-KR" sz="1400" b="1" dirty="0"/>
+                <a:t>)</a:t>
+              </a:r>
+              <a:endParaRPr lang="ko-KR" altLang="en-US" sz="1400" b="1" dirty="0"/>
+            </a:p>
+          </p:txBody>
+        </p:sp>
+        <p:sp>
+          <p:nvSpPr>
+            <p:cNvPr id="16" name="직사각형 15"/>
+            <p:cNvSpPr/>
+            <p:nvPr/>
+          </p:nvSpPr>
+          <p:spPr>
+            <a:xfrm>
+              <a:off x="11758716" y="3056709"/>
+              <a:ext cx="876627" cy="2926080"/>
+            </a:xfrm>
+            <a:prstGeom prst="rect">
+              <a:avLst/>
+            </a:prstGeom>
+            <a:solidFill>
+              <a:schemeClr val="bg1"/>
+            </a:solidFill>
+            <a:ln w="28575">
+              <a:solidFill>
+                <a:schemeClr val="tx1"/>
+              </a:solidFill>
+            </a:ln>
+          </p:spPr>
+          <p:style>
+            <a:lnRef idx="2">
+              <a:schemeClr val="accent1">
+                <a:shade val="50000"/>
+              </a:schemeClr>
+            </a:lnRef>
+            <a:fillRef idx="1">
+              <a:schemeClr val="accent1"/>
+            </a:fillRef>
+            <a:effectRef idx="0">
+              <a:schemeClr val="accent1"/>
+            </a:effectRef>
+            <a:fontRef idx="minor">
+              <a:schemeClr val="lt1"/>
+            </a:fontRef>
+          </p:style>
+          <p:txBody>
+            <a:bodyPr rtlCol="0" anchor="ctr"/>
+            <a:lstStyle/>
+            <a:p>
+              <a:pPr algn="ctr"/>
+              <a:endParaRPr lang="ko-KR" altLang="en-US" b="1"/>
+            </a:p>
+          </p:txBody>
+        </p:sp>
+        <p:sp>
+          <p:nvSpPr>
+            <p:cNvPr id="17" name="TextBox 16"/>
+            <p:cNvSpPr txBox="1"/>
+            <p:nvPr/>
+          </p:nvSpPr>
+          <p:spPr>
+            <a:xfrm>
+              <a:off x="11739591" y="3151052"/>
+              <a:ext cx="942887" cy="307777"/>
+            </a:xfrm>
+            <a:prstGeom prst="rect">
+              <a:avLst/>
+            </a:prstGeom>
+            <a:noFill/>
+          </p:spPr>
+          <p:txBody>
+            <a:bodyPr wrap="none" rtlCol="0">
+              <a:spAutoFit/>
+            </a:bodyPr>
+            <a:lstStyle/>
+            <a:p>
+              <a:r>
+                <a:rPr lang="ko-KR" altLang="en-US" sz="1400" b="1" dirty="0" smtClean="0"/>
+                <a:t>남은 시간</a:t>
+              </a:r>
+              <a:endParaRPr lang="ko-KR" altLang="en-US" sz="1400" b="1" dirty="0"/>
+            </a:p>
+          </p:txBody>
+        </p:sp>
+        <p:sp>
+          <p:nvSpPr>
+            <p:cNvPr id="18" name="TextBox 17"/>
+            <p:cNvSpPr txBox="1"/>
+            <p:nvPr/>
+          </p:nvSpPr>
+          <p:spPr>
+            <a:xfrm>
+              <a:off x="11849396" y="4056313"/>
+              <a:ext cx="723275" cy="307777"/>
+            </a:xfrm>
+            <a:prstGeom prst="rect">
+              <a:avLst/>
+            </a:prstGeom>
+            <a:noFill/>
+          </p:spPr>
+          <p:txBody>
+            <a:bodyPr wrap="none" rtlCol="0">
+              <a:spAutoFit/>
+            </a:bodyPr>
+            <a:lstStyle/>
+            <a:p>
+              <a:r>
+                <a:rPr lang="ko-KR" altLang="en-US" sz="1400" b="1" dirty="0" smtClean="0"/>
+                <a:t>라운드</a:t>
+              </a:r>
+              <a:endParaRPr lang="ko-KR" altLang="en-US" sz="1400" b="1" dirty="0"/>
+            </a:p>
+          </p:txBody>
+        </p:sp>
+        <p:sp>
+          <p:nvSpPr>
+            <p:cNvPr id="19" name="TextBox 18"/>
+            <p:cNvSpPr txBox="1"/>
+            <p:nvPr/>
+          </p:nvSpPr>
+          <p:spPr>
+            <a:xfrm>
+              <a:off x="11849395" y="5023380"/>
+              <a:ext cx="723275" cy="307777"/>
+            </a:xfrm>
+            <a:prstGeom prst="rect">
+              <a:avLst/>
+            </a:prstGeom>
+            <a:noFill/>
+          </p:spPr>
+          <p:txBody>
+            <a:bodyPr wrap="none" rtlCol="0">
+              <a:spAutoFit/>
+            </a:bodyPr>
+            <a:lstStyle/>
+            <a:p>
+              <a:r>
+                <a:rPr lang="ko-KR" altLang="en-US" sz="1400" b="1" dirty="0" smtClean="0"/>
+                <a:t>캐릭터</a:t>
+              </a:r>
+              <a:endParaRPr lang="ko-KR" altLang="en-US" sz="1400" b="1" dirty="0"/>
+            </a:p>
+          </p:txBody>
+        </p:sp>
+      </p:grpSp>
     </p:spTree>
     <p:extLst>
       <p:ext uri="{BB962C8B-B14F-4D97-AF65-F5344CB8AC3E}">
-        <p14:creationId xmlns:p14="http://schemas.microsoft.com/office/powerpoint/2010/main" val="279983564"/>
+        <p14:creationId xmlns:p14="http://schemas.microsoft.com/office/powerpoint/2010/main" val="753764332"/>
       </p:ext>
     </p:extLst>
   </p:cSld>
@@ -9572,7 +11162,289 @@
           <a:bodyPr/>
           <a:lstStyle/>
           <a:p>
-            <a:endParaRPr lang="ko-KR" altLang="en-US"/>
+            <a:r>
+              <a:rPr lang="ko-KR" altLang="en-US" dirty="0" smtClean="0"/>
+              <a:t>프로젝트 주제 </a:t>
+            </a:r>
+            <a:r>
+              <a:rPr lang="en-US" altLang="ko-KR" dirty="0"/>
+              <a:t>: </a:t>
+            </a:r>
+            <a:r>
+              <a:rPr lang="ko-KR" altLang="en-US"/>
+              <a:t>캐치 마인드</a:t>
+            </a:r>
+          </a:p>
+          <a:p>
+            <a:pPr lvl="1"/>
+            <a:r>
+              <a:rPr lang="ko-KR" altLang="en-US" dirty="0"/>
+              <a:t>필요 인원 </a:t>
+            </a:r>
+            <a:r>
+              <a:rPr lang="en-US" altLang="ko-KR" dirty="0"/>
+              <a:t>3</a:t>
+            </a:r>
+            <a:r>
+              <a:rPr lang="ko-KR" altLang="en-US"/>
+              <a:t>명 </a:t>
+            </a:r>
+            <a:r>
+              <a:rPr lang="en-US" altLang="ko-KR" dirty="0"/>
+              <a:t>(1</a:t>
+            </a:r>
+            <a:r>
+              <a:rPr lang="ko-KR" altLang="en-US"/>
+              <a:t>명 출제자</a:t>
+            </a:r>
+            <a:r>
+              <a:rPr lang="en-US" altLang="ko-KR" dirty="0"/>
+              <a:t>, 2</a:t>
+            </a:r>
+            <a:r>
+              <a:rPr lang="ko-KR" altLang="en-US"/>
+              <a:t>명 참가자</a:t>
+            </a:r>
+            <a:r>
+              <a:rPr lang="en-US" altLang="ko-KR" dirty="0" smtClean="0"/>
+              <a:t>)</a:t>
+            </a:r>
+            <a:endParaRPr lang="en-US" altLang="ko-KR" dirty="0"/>
+          </a:p>
+          <a:p>
+            <a:endParaRPr lang="en-US" altLang="ko-KR" dirty="0" smtClean="0"/>
+          </a:p>
+          <a:p>
+            <a:r>
+              <a:rPr lang="ko-KR" altLang="en-US" dirty="0" smtClean="0"/>
+              <a:t>게임 </a:t>
+            </a:r>
+            <a:r>
+              <a:rPr lang="ko-KR" altLang="en-US" dirty="0"/>
+              <a:t>방식</a:t>
+            </a:r>
+          </a:p>
+          <a:p>
+            <a:pPr lvl="1"/>
+            <a:r>
+              <a:rPr lang="ko-KR" altLang="en-US" dirty="0" smtClean="0"/>
+              <a:t>출제자는 분야</a:t>
+            </a:r>
+            <a:r>
+              <a:rPr lang="en-US" altLang="ko-KR" dirty="0" smtClean="0"/>
+              <a:t>&gt;</a:t>
+            </a:r>
+            <a:r>
+              <a:rPr lang="ko-KR" altLang="en-US"/>
+              <a:t>주제어 순서로 </a:t>
+            </a:r>
+            <a:r>
+              <a:rPr lang="ko-KR" altLang="en-US" smtClean="0"/>
+              <a:t>선택</a:t>
+            </a:r>
+            <a:endParaRPr lang="en-US" altLang="ko-KR" dirty="0" smtClean="0"/>
+          </a:p>
+          <a:p>
+            <a:pPr lvl="2"/>
+            <a:r>
+              <a:rPr lang="ko-KR" altLang="en-US" dirty="0" smtClean="0"/>
+              <a:t>각 </a:t>
+            </a:r>
+            <a:r>
+              <a:rPr lang="ko-KR" altLang="en-US" dirty="0"/>
+              <a:t>계층 별 </a:t>
+            </a:r>
+            <a:r>
+              <a:rPr lang="en-US" altLang="ko-KR" dirty="0"/>
+              <a:t>4</a:t>
+            </a:r>
+            <a:r>
+              <a:rPr lang="ko-KR" altLang="en-US"/>
+              <a:t>개씩 랜덤</a:t>
+            </a:r>
+          </a:p>
+          <a:p>
+            <a:pPr lvl="1"/>
+            <a:r>
+              <a:rPr lang="ko-KR" altLang="en-US" dirty="0"/>
+              <a:t>출제자가 그림 그리기 </a:t>
+            </a:r>
+            <a:r>
+              <a:rPr lang="ko-KR" altLang="en-US" dirty="0" smtClean="0"/>
+              <a:t>시작</a:t>
+            </a:r>
+            <a:endParaRPr lang="en-US" altLang="ko-KR" dirty="0"/>
+          </a:p>
+          <a:p>
+            <a:pPr lvl="1"/>
+            <a:r>
+              <a:rPr lang="ko-KR" altLang="en-US" dirty="0" smtClean="0"/>
+              <a:t>참가자는 </a:t>
+            </a:r>
+            <a:r>
+              <a:rPr lang="ko-KR" altLang="en-US" dirty="0"/>
+              <a:t>정답을 자신의 화면에 </a:t>
+            </a:r>
+            <a:r>
+              <a:rPr lang="ko-KR" altLang="en-US" dirty="0" smtClean="0"/>
+              <a:t>글씨로 작성하여 </a:t>
+            </a:r>
+            <a:r>
+              <a:rPr lang="ko-KR" altLang="en-US" dirty="0"/>
+              <a:t>제출</a:t>
+            </a:r>
+          </a:p>
+          <a:p>
+            <a:pPr lvl="1"/>
+            <a:r>
+              <a:rPr lang="ko-KR" altLang="en-US" dirty="0" smtClean="0"/>
+              <a:t>출제자는 </a:t>
+            </a:r>
+            <a:r>
+              <a:rPr lang="ko-KR" altLang="en-US" dirty="0"/>
+              <a:t>확인 후 </a:t>
+            </a:r>
+            <a:r>
+              <a:rPr lang="ko-KR" altLang="en-US" dirty="0" smtClean="0"/>
+              <a:t>정답</a:t>
+            </a:r>
+            <a:r>
+              <a:rPr lang="en-US" altLang="ko-KR" dirty="0" smtClean="0"/>
+              <a:t>/</a:t>
+            </a:r>
+            <a:r>
+              <a:rPr lang="ko-KR" altLang="en-US" smtClean="0"/>
+              <a:t>오답 </a:t>
+            </a:r>
+            <a:r>
+              <a:rPr lang="ko-KR" altLang="en-US" dirty="0"/>
+              <a:t>판단</a:t>
+            </a:r>
+          </a:p>
+          <a:p>
+            <a:pPr lvl="1"/>
+            <a:r>
+              <a:rPr lang="ko-KR" altLang="en-US" dirty="0" smtClean="0"/>
+              <a:t>정답 시 맞춘 </a:t>
+            </a:r>
+            <a:r>
+              <a:rPr lang="ko-KR" altLang="en-US" dirty="0"/>
+              <a:t>사람이 출제자가 되고</a:t>
+            </a:r>
+            <a:r>
+              <a:rPr lang="en-US" altLang="ko-KR" dirty="0"/>
+              <a:t>, </a:t>
+            </a:r>
+            <a:r>
+              <a:rPr lang="en-US" altLang="ko-KR" dirty="0" smtClean="0"/>
+              <a:t/>
+            </a:r>
+            <a:br>
+              <a:rPr lang="en-US" altLang="ko-KR" dirty="0" smtClean="0"/>
+            </a:br>
+            <a:r>
+              <a:rPr lang="ko-KR" altLang="en-US" smtClean="0"/>
+              <a:t>다시 </a:t>
+            </a:r>
+            <a:r>
+              <a:rPr lang="ko-KR" altLang="en-US"/>
+              <a:t>주제어 선택 화면으로 전환</a:t>
+            </a:r>
+          </a:p>
+          <a:p>
+            <a:pPr lvl="1"/>
+            <a:r>
+              <a:rPr lang="ko-KR" altLang="en-US" dirty="0"/>
+              <a:t>다음 라운드 </a:t>
+            </a:r>
+            <a:r>
+              <a:rPr lang="ko-KR" altLang="en-US" dirty="0" smtClean="0"/>
+              <a:t>시작</a:t>
+            </a:r>
+            <a:endParaRPr lang="en-US" altLang="ko-KR" dirty="0" smtClean="0"/>
+          </a:p>
+          <a:p>
+            <a:pPr lvl="1"/>
+            <a:endParaRPr lang="en-US" altLang="ko-KR" dirty="0"/>
+          </a:p>
+          <a:p>
+            <a:r>
+              <a:rPr lang="ko-KR" altLang="en-US" dirty="0" smtClean="0"/>
+              <a:t>점수 획득 방법</a:t>
+            </a:r>
+            <a:endParaRPr lang="en-US" altLang="ko-KR" dirty="0" smtClean="0"/>
+          </a:p>
+          <a:p>
+            <a:pPr lvl="1"/>
+            <a:r>
+              <a:rPr lang="ko-KR" altLang="en-US" dirty="0" smtClean="0"/>
+              <a:t>문제를 맞춘 참가자는 </a:t>
+            </a:r>
+            <a:r>
+              <a:rPr lang="en-US" altLang="ko-KR" dirty="0" smtClean="0"/>
+              <a:t>OO</a:t>
+            </a:r>
+            <a:r>
+              <a:rPr lang="ko-KR" altLang="en-US" smtClean="0"/>
+              <a:t>점의 점수 획득</a:t>
+            </a:r>
+            <a:endParaRPr lang="en-US" altLang="ko-KR" dirty="0" smtClean="0"/>
+          </a:p>
+          <a:p>
+            <a:pPr lvl="1"/>
+            <a:r>
+              <a:rPr lang="en-US" altLang="ko-KR" dirty="0" smtClean="0"/>
+              <a:t>1</a:t>
+            </a:r>
+            <a:r>
+              <a:rPr lang="ko-KR" altLang="en-US" smtClean="0"/>
+              <a:t>분의 그림 그리기 제한 시간동안 맞춘 사람이 있는 경우에는 출제자 </a:t>
+            </a:r>
+            <a:r>
+              <a:rPr lang="en-US" altLang="ko-KR" dirty="0" smtClean="0"/>
+              <a:t>OO</a:t>
+            </a:r>
+            <a:r>
+              <a:rPr lang="ko-KR" altLang="en-US" smtClean="0"/>
+              <a:t>점 획득</a:t>
+            </a:r>
+            <a:endParaRPr lang="en-US" altLang="ko-KR" dirty="0" smtClean="0"/>
+          </a:p>
+          <a:p>
+            <a:pPr lvl="1"/>
+            <a:r>
+              <a:rPr lang="ko-KR" altLang="en-US" dirty="0" smtClean="0"/>
+              <a:t>맞춘 사람이 없는 경우에는 출제자 </a:t>
+            </a:r>
+            <a:r>
+              <a:rPr lang="en-US" altLang="ko-KR" dirty="0" smtClean="0"/>
+              <a:t>OO</a:t>
+            </a:r>
+            <a:r>
+              <a:rPr lang="ko-KR" altLang="en-US" smtClean="0"/>
+              <a:t>점 감점</a:t>
+            </a:r>
+            <a:endParaRPr lang="en-US" altLang="ko-KR" dirty="0" smtClean="0"/>
+          </a:p>
+          <a:p>
+            <a:pPr lvl="1"/>
+            <a:r>
+              <a:rPr lang="en-US" altLang="ko-KR" dirty="0" smtClean="0"/>
+              <a:t>5</a:t>
+            </a:r>
+            <a:r>
+              <a:rPr lang="ko-KR" altLang="en-US" smtClean="0"/>
+              <a:t>라운드 이후 각 인원 점수를 합산하여 </a:t>
+            </a:r>
+            <a:r>
+              <a:rPr lang="en-US" altLang="ko-KR" dirty="0" smtClean="0"/>
+              <a:t>1~3</a:t>
+            </a:r>
+            <a:r>
+              <a:rPr lang="ko-KR" altLang="en-US" smtClean="0"/>
+              <a:t>등 표시</a:t>
+            </a:r>
+            <a:endParaRPr lang="ko-KR" altLang="en-US" dirty="0"/>
           </a:p>
         </p:txBody>
       </p:sp>
@@ -9606,7 +11478,7 @@
                 <a:latin typeface="LG스마트체2.0 Regular" panose="020B0600000101010101" pitchFamily="50" charset="-127"/>
                 <a:ea typeface="LG스마트체2.0 Regular" panose="020B0600000101010101" pitchFamily="50" charset="-127"/>
               </a:rPr>
-              <a:t>2. </a:t>
+              <a:t>1. </a:t>
             </a:r>
             <a:r>
               <a:rPr lang="ko-KR" altLang="en-US" sz="5400" b="1" dirty="0">
@@ -9616,125 +11488,39 @@
                 <a:latin typeface="LG스마트체2.0 Regular" panose="020B0600000101010101" pitchFamily="50" charset="-127"/>
                 <a:ea typeface="LG스마트체2.0 Regular" panose="020B0600000101010101" pitchFamily="50" charset="-127"/>
               </a:rPr>
-              <a:t>개발 목표 및 개발 결과</a:t>
+              <a:t>주제 및 결과 요약</a:t>
             </a:r>
           </a:p>
         </p:txBody>
       </p:sp>
-      <p:sp>
-        <p:nvSpPr>
-          <p:cNvPr id="4" name="직사각형 3"/>
-          <p:cNvSpPr/>
+      <p:pic>
+        <p:nvPicPr>
+          <p:cNvPr id="5" name="그림 4"/>
+          <p:cNvPicPr>
+            <a:picLocks noChangeAspect="1"/>
+          </p:cNvPicPr>
           <p:nvPr/>
-        </p:nvSpPr>
+        </p:nvPicPr>
+        <p:blipFill>
+          <a:blip r:embed="rId2"/>
+          <a:stretch>
+            <a:fillRect/>
+          </a:stretch>
+        </p:blipFill>
         <p:spPr>
           <a:xfrm>
-            <a:off x="884420" y="2488367"/>
-            <a:ext cx="11092721" cy="2548328"/>
+            <a:off x="8270081" y="1767433"/>
+            <a:ext cx="8684419" cy="4884986"/>
           </a:xfrm>
           <a:prstGeom prst="rect">
             <a:avLst/>
           </a:prstGeom>
-          <a:solidFill>
-            <a:srgbClr val="FFFF00"/>
-          </a:solidFill>
         </p:spPr>
-        <p:style>
-          <a:lnRef idx="2">
-            <a:schemeClr val="accent1">
-              <a:shade val="50000"/>
-            </a:schemeClr>
-          </a:lnRef>
-          <a:fillRef idx="1">
-            <a:schemeClr val="accent1"/>
-          </a:fillRef>
-          <a:effectRef idx="0">
-            <a:schemeClr val="accent1"/>
-          </a:effectRef>
-          <a:fontRef idx="minor">
-            <a:schemeClr val="lt1"/>
-          </a:fontRef>
-        </p:style>
-        <p:txBody>
-          <a:bodyPr rtlCol="0" anchor="ctr"/>
-          <a:lstStyle/>
-          <a:p>
-            <a:pPr marL="457200" indent="-457200">
-              <a:buFontTx/>
-              <a:buChar char="-"/>
-            </a:pPr>
-            <a:r>
-              <a:rPr lang="ko-KR" altLang="en-US" sz="3200" b="1" dirty="0">
-                <a:solidFill>
-                  <a:schemeClr val="tx1"/>
-                </a:solidFill>
-              </a:rPr>
-              <a:t>처음 기획한 개발 목표</a:t>
-            </a:r>
-            <a:endParaRPr lang="en-US" altLang="ko-KR" sz="3200" b="1" dirty="0">
-              <a:solidFill>
-                <a:schemeClr val="tx1"/>
-              </a:solidFill>
-            </a:endParaRPr>
-          </a:p>
-          <a:p>
-            <a:pPr marL="457200" indent="-457200">
-              <a:buFontTx/>
-              <a:buChar char="-"/>
-            </a:pPr>
-            <a:r>
-              <a:rPr lang="ko-KR" altLang="en-US" sz="3200" b="1" dirty="0">
-                <a:solidFill>
-                  <a:schemeClr val="tx1"/>
-                </a:solidFill>
-              </a:rPr>
-              <a:t>실제 개발 결과 소개</a:t>
-            </a:r>
-            <a:endParaRPr lang="en-US" altLang="ko-KR" sz="3200" b="1" dirty="0">
-              <a:solidFill>
-                <a:schemeClr val="tx1"/>
-              </a:solidFill>
-            </a:endParaRPr>
-          </a:p>
-          <a:p>
-            <a:pPr marL="457200" indent="-457200">
-              <a:buFontTx/>
-              <a:buChar char="-"/>
-            </a:pPr>
-            <a:r>
-              <a:rPr lang="ko-KR" altLang="en-US" sz="3200" b="1" dirty="0">
-                <a:solidFill>
-                  <a:schemeClr val="tx1"/>
-                </a:solidFill>
-              </a:rPr>
-              <a:t>가급적 결과 내용을 상세히 기술</a:t>
-            </a:r>
-            <a:endParaRPr lang="en-US" altLang="ko-KR" sz="3200" b="1" dirty="0">
-              <a:solidFill>
-                <a:schemeClr val="tx1"/>
-              </a:solidFill>
-            </a:endParaRPr>
-          </a:p>
-          <a:p>
-            <a:pPr marL="457200" indent="-457200">
-              <a:buFontTx/>
-              <a:buChar char="-"/>
-            </a:pPr>
-            <a:r>
-              <a:rPr lang="ko-KR" altLang="en-US" sz="3200" b="1" dirty="0">
-                <a:solidFill>
-                  <a:schemeClr val="tx1"/>
-                </a:solidFill>
-              </a:rPr>
-              <a:t>페이지 수 무관</a:t>
-            </a:r>
-          </a:p>
-        </p:txBody>
-      </p:sp>
+      </p:pic>
     </p:spTree>
     <p:extLst>
       <p:ext uri="{BB962C8B-B14F-4D97-AF65-F5344CB8AC3E}">
-        <p14:creationId xmlns:p14="http://schemas.microsoft.com/office/powerpoint/2010/main" val="1608528413"/>
+        <p14:creationId xmlns:p14="http://schemas.microsoft.com/office/powerpoint/2010/main" val="279983564"/>
       </p:ext>
     </p:extLst>
   </p:cSld>
@@ -9783,32 +11569,7 @@
           <a:bodyPr/>
           <a:lstStyle/>
           <a:p>
-            <a:r>
-              <a:rPr lang="ko-KR" altLang="en-US" dirty="0" smtClean="0"/>
-              <a:t>다중 클라이언트 실시간 </a:t>
-            </a:r>
-            <a:r>
-              <a:rPr lang="en-US" altLang="ko-KR" dirty="0" smtClean="0"/>
-              <a:t>UDP </a:t>
-            </a:r>
-            <a:r>
-              <a:rPr lang="ko-KR" altLang="en-US" smtClean="0"/>
-              <a:t>통신</a:t>
-            </a:r>
-            <a:endParaRPr lang="en-US" altLang="ko-KR" dirty="0" smtClean="0"/>
-          </a:p>
-          <a:p>
-            <a:r>
-              <a:rPr lang="ko-KR" altLang="en-US" dirty="0" smtClean="0"/>
-              <a:t>출제자와 참가자 화면 동기화</a:t>
-            </a:r>
-            <a:endParaRPr lang="en-US" altLang="ko-KR" dirty="0" smtClean="0"/>
-          </a:p>
-          <a:p>
-            <a:endParaRPr lang="en-US" altLang="ko-KR" dirty="0" smtClean="0"/>
-          </a:p>
-          <a:p>
-            <a:endParaRPr lang="ko-KR" altLang="en-US" dirty="0"/>
+            <a:endParaRPr lang="ko-KR" altLang="en-US"/>
           </a:p>
         </p:txBody>
       </p:sp>
@@ -9842,7 +11603,7 @@
                 <a:latin typeface="LG스마트체2.0 Regular" panose="020B0600000101010101" pitchFamily="50" charset="-127"/>
                 <a:ea typeface="LG스마트체2.0 Regular" panose="020B0600000101010101" pitchFamily="50" charset="-127"/>
               </a:rPr>
-              <a:t>3. </a:t>
+              <a:t>2. </a:t>
             </a:r>
             <a:r>
               <a:rPr lang="ko-KR" altLang="en-US" sz="5400" b="1" dirty="0">
@@ -9852,7 +11613,7 @@
                 <a:latin typeface="LG스마트체2.0 Regular" panose="020B0600000101010101" pitchFamily="50" charset="-127"/>
                 <a:ea typeface="LG스마트체2.0 Regular" panose="020B0600000101010101" pitchFamily="50" charset="-127"/>
               </a:rPr>
-              <a:t>핵심 기술</a:t>
+              <a:t>개발 목표 및 개발 결과</a:t>
             </a:r>
           </a:p>
         </p:txBody>
@@ -9865,8 +11626,8 @@
         </p:nvSpPr>
         <p:spPr>
           <a:xfrm>
-            <a:off x="-690380" y="7570611"/>
-            <a:ext cx="11092721" cy="2188564"/>
+            <a:off x="884420" y="2488367"/>
+            <a:ext cx="11092721" cy="2548328"/>
           </a:xfrm>
           <a:prstGeom prst="rect">
             <a:avLst/>
@@ -9905,7 +11666,7 @@
                   <a:schemeClr val="tx1"/>
                 </a:solidFill>
               </a:rPr>
-              <a:t>개발에 사용된 가장 핵심적으로 구현된 기술 소개</a:t>
+              <a:t>처음 기획한 개발 목표</a:t>
             </a:r>
             <a:endParaRPr lang="en-US" altLang="ko-KR" sz="3200" b="1" dirty="0">
               <a:solidFill>
@@ -9924,7 +11685,7 @@
                   <a:schemeClr val="tx1"/>
                 </a:solidFill>
               </a:rPr>
-              <a:t>기술 내용 또는 소스코드 등 다양한 방법으로 핵심을 소개</a:t>
+              <a:t>실제 개발 결과 소개</a:t>
             </a:r>
             <a:endParaRPr lang="en-US" altLang="ko-KR" sz="3200" b="1" dirty="0">
               <a:solidFill>
@@ -9943,6 +11704,25 @@
                   <a:schemeClr val="tx1"/>
                 </a:solidFill>
               </a:rPr>
+              <a:t>가급적 결과 내용을 상세히 기술</a:t>
+            </a:r>
+            <a:endParaRPr lang="en-US" altLang="ko-KR" sz="3200" b="1" dirty="0">
+              <a:solidFill>
+                <a:schemeClr val="tx1"/>
+              </a:solidFill>
+            </a:endParaRPr>
+          </a:p>
+          <a:p>
+            <a:pPr marL="457200" indent="-457200">
+              <a:buFontTx/>
+              <a:buChar char="-"/>
+            </a:pPr>
+            <a:r>
+              <a:rPr lang="ko-KR" altLang="en-US" sz="3200" b="1" dirty="0">
+                <a:solidFill>
+                  <a:schemeClr val="tx1"/>
+                </a:solidFill>
+              </a:rPr>
               <a:t>페이지 수 무관</a:t>
             </a:r>
           </a:p>
@@ -9951,7 +11731,7 @@
     </p:spTree>
     <p:extLst>
       <p:ext uri="{BB962C8B-B14F-4D97-AF65-F5344CB8AC3E}">
-        <p14:creationId xmlns:p14="http://schemas.microsoft.com/office/powerpoint/2010/main" val="3138293880"/>
+        <p14:creationId xmlns:p14="http://schemas.microsoft.com/office/powerpoint/2010/main" val="1608528413"/>
       </p:ext>
     </p:extLst>
   </p:cSld>

--- a/LG_부트캠프_12기_C반_프로젝트일정_및_최종제출결과물_3팀/4.LG_부트캠프_12기_C반_결과보고서(3팀)_v1.pptx
+++ b/LG_부트캠프_12기_C반_프로젝트일정_및_최종제출결과물_3팀/4.LG_부트캠프_12기_C반_결과보고서(3팀)_v1.pptx
@@ -10438,14 +10438,24 @@
               <a:t>기획</a:t>
             </a:r>
             <a:r>
-              <a:rPr lang="en-US" altLang="ko-KR" sz="5400" b="1" dirty="0" smtClean="0">
+              <a:rPr lang="en-US" altLang="ko-KR" sz="5400" b="1" smtClean="0">
                 <a:solidFill>
                   <a:schemeClr val="bg1"/>
                 </a:solidFill>
                 <a:latin typeface="LG스마트체2.0 Regular" panose="020B0600000101010101" pitchFamily="50" charset="-127"/>
                 <a:ea typeface="LG스마트체2.0 Regular" panose="020B0600000101010101" pitchFamily="50" charset="-127"/>
               </a:rPr>
-              <a:t>(260417)</a:t>
+              <a:t>(</a:t>
+            </a:r>
+            <a:r>
+              <a:rPr lang="en-US" altLang="ko-KR" sz="5400" b="1" smtClean="0">
+                <a:solidFill>
+                  <a:schemeClr val="bg1"/>
+                </a:solidFill>
+                <a:latin typeface="LG스마트체2.0 Regular" panose="020B0600000101010101" pitchFamily="50" charset="-127"/>
+                <a:ea typeface="LG스마트체2.0 Regular" panose="020B0600000101010101" pitchFamily="50" charset="-127"/>
+              </a:rPr>
+              <a:t>260420)</a:t>
             </a:r>
             <a:endParaRPr lang="ko-KR" altLang="en-US" sz="5400" b="1" dirty="0">
               <a:solidFill>
@@ -10518,7 +10528,7 @@
               </a:rPr>
               <a:t>월 팀별 영상 제작</a:t>
             </a:r>
-            <a:endParaRPr lang="en-US" altLang="ko-KR" b="1" smtClean="0">
+            <a:endParaRPr lang="en-US" altLang="ko-KR" b="1" dirty="0" smtClean="0">
               <a:solidFill>
                 <a:schemeClr val="tx1"/>
               </a:solidFill>
